--- a/docs/LF/slides/LF_2026/DeepCausality_TAC_2026.pptx
+++ b/docs/LF/slides/LF_2026/DeepCausality_TAC_2026.pptx
@@ -5,7 +5,7 @@
     <p:sldMasterId id="2147483648" r:id="rId1"/>
   </p:sldMasterIdLst>
   <p:notesMasterIdLst>
-    <p:notesMasterId r:id="rId18"/>
+    <p:notesMasterId r:id="rId17"/>
   </p:notesMasterIdLst>
   <p:sldIdLst>
     <p:sldId id="256" r:id="rId2"/>
@@ -20,10 +20,9 @@
     <p:sldId id="272" r:id="rId11"/>
     <p:sldId id="273" r:id="rId12"/>
     <p:sldId id="277" r:id="rId13"/>
-    <p:sldId id="279" r:id="rId14"/>
-    <p:sldId id="268" r:id="rId15"/>
-    <p:sldId id="274" r:id="rId16"/>
-    <p:sldId id="278" r:id="rId17"/>
+    <p:sldId id="268" r:id="rId14"/>
+    <p:sldId id="274" r:id="rId15"/>
+    <p:sldId id="278" r:id="rId16"/>
   </p:sldIdLst>
   <p:sldSz cx="12192000" cy="6858000"/>
   <p:notesSz cx="9144000" cy="6858000"/>
@@ -2107,7 +2106,7 @@
           <a:p>
             <a:fld id="{5BCAD085-E8A6-8845-BD4E-CB4CCA059FC4}" type="datetimeFigureOut">
               <a:rPr lang="en-US" smtClean="0"/>
-              <a:t>9/2/26</a:t>
+              <a:t>9/25/26</a:t>
             </a:fld>
             <a:endParaRPr lang="en-US"/>
           </a:p>
@@ -2275,7 +2274,7 @@
           <a:p>
             <a:fld id="{5BCAD085-E8A6-8845-BD4E-CB4CCA059FC4}" type="datetimeFigureOut">
               <a:rPr lang="en-US" smtClean="0"/>
-              <a:t>9/2/26</a:t>
+              <a:t>9/25/26</a:t>
             </a:fld>
             <a:endParaRPr lang="en-US"/>
           </a:p>
@@ -2453,7 +2452,7 @@
           <a:p>
             <a:fld id="{5BCAD085-E8A6-8845-BD4E-CB4CCA059FC4}" type="datetimeFigureOut">
               <a:rPr lang="en-US" smtClean="0"/>
-              <a:t>9/2/26</a:t>
+              <a:t>9/25/26</a:t>
             </a:fld>
             <a:endParaRPr lang="en-US"/>
           </a:p>
@@ -2621,7 +2620,7 @@
           <a:p>
             <a:fld id="{5BCAD085-E8A6-8845-BD4E-CB4CCA059FC4}" type="datetimeFigureOut">
               <a:rPr lang="en-US" smtClean="0"/>
-              <a:t>9/2/26</a:t>
+              <a:t>9/25/26</a:t>
             </a:fld>
             <a:endParaRPr lang="en-US"/>
           </a:p>
@@ -2866,7 +2865,7 @@
           <a:p>
             <a:fld id="{5BCAD085-E8A6-8845-BD4E-CB4CCA059FC4}" type="datetimeFigureOut">
               <a:rPr lang="en-US" smtClean="0"/>
-              <a:t>9/2/26</a:t>
+              <a:t>9/25/26</a:t>
             </a:fld>
             <a:endParaRPr lang="en-US"/>
           </a:p>
@@ -3151,7 +3150,7 @@
           <a:p>
             <a:fld id="{5BCAD085-E8A6-8845-BD4E-CB4CCA059FC4}" type="datetimeFigureOut">
               <a:rPr lang="en-US" smtClean="0"/>
-              <a:t>9/2/26</a:t>
+              <a:t>9/25/26</a:t>
             </a:fld>
             <a:endParaRPr lang="en-US"/>
           </a:p>
@@ -3570,7 +3569,7 @@
           <a:p>
             <a:fld id="{5BCAD085-E8A6-8845-BD4E-CB4CCA059FC4}" type="datetimeFigureOut">
               <a:rPr lang="en-US" smtClean="0"/>
-              <a:t>9/2/26</a:t>
+              <a:t>9/25/26</a:t>
             </a:fld>
             <a:endParaRPr lang="en-US"/>
           </a:p>
@@ -3687,7 +3686,7 @@
           <a:p>
             <a:fld id="{5BCAD085-E8A6-8845-BD4E-CB4CCA059FC4}" type="datetimeFigureOut">
               <a:rPr lang="en-US" smtClean="0"/>
-              <a:t>9/2/26</a:t>
+              <a:t>9/25/26</a:t>
             </a:fld>
             <a:endParaRPr lang="en-US"/>
           </a:p>
@@ -3782,7 +3781,7 @@
           <a:p>
             <a:fld id="{5BCAD085-E8A6-8845-BD4E-CB4CCA059FC4}" type="datetimeFigureOut">
               <a:rPr lang="en-US" smtClean="0"/>
-              <a:t>9/2/26</a:t>
+              <a:t>9/25/26</a:t>
             </a:fld>
             <a:endParaRPr lang="en-US"/>
           </a:p>
@@ -4057,7 +4056,7 @@
           <a:p>
             <a:fld id="{5BCAD085-E8A6-8845-BD4E-CB4CCA059FC4}" type="datetimeFigureOut">
               <a:rPr lang="en-US" smtClean="0"/>
-              <a:t>9/2/26</a:t>
+              <a:t>9/25/26</a:t>
             </a:fld>
             <a:endParaRPr lang="en-US"/>
           </a:p>
@@ -4309,7 +4308,7 @@
           <a:p>
             <a:fld id="{5BCAD085-E8A6-8845-BD4E-CB4CCA059FC4}" type="datetimeFigureOut">
               <a:rPr lang="en-US" smtClean="0"/>
-              <a:t>9/2/26</a:t>
+              <a:t>9/25/26</a:t>
             </a:fld>
             <a:endParaRPr lang="en-US"/>
           </a:p>
@@ -4520,7 +4519,7 @@
           <a:p>
             <a:fld id="{5BCAD085-E8A6-8845-BD4E-CB4CCA059FC4}" type="datetimeFigureOut">
               <a:rPr lang="en-US" smtClean="0"/>
-              <a:t>9/2/26</a:t>
+              <a:t>9/25/26</a:t>
             </a:fld>
             <a:endParaRPr lang="en-US"/>
           </a:p>
@@ -5498,16 +5497,7 @@
                 </a:solidFill>
                 <a:latin typeface="Geist Medium"/>
               </a:rPr>
-              <a:t>Deep</a:t>
-            </a:r>
-            <a:r>
-              <a:rPr lang="en-US" sz="2600" spc="-31" dirty="0">
-                <a:solidFill>
-                  <a:srgbClr val="E6EDF3"/>
-                </a:solidFill>
-                <a:latin typeface="Geist Medium"/>
-              </a:rPr>
-              <a:t>Causality: One Stack from Discovery to Deployment</a:t>
+              <a:t>DeepCausality: One Stack from Discovery to Deployment</a:t>
             </a:r>
           </a:p>
         </p:txBody>
@@ -5730,12 +5720,6 @@
               </a:rPr>
               <a:t>DOWNSTREAM PROJECTS</a:t>
             </a:r>
-            <a:endParaRPr lang="en-US" sz="1100" spc="88" dirty="0">
-              <a:solidFill>
-                <a:srgbClr val="5CD4E1"/>
-              </a:solidFill>
-              <a:latin typeface="JetBrains Mono Medium"/>
-            </a:endParaRPr>
           </a:p>
         </p:txBody>
       </p:sp>
@@ -5785,23 +5769,8 @@
                 </a:solidFill>
                 <a:latin typeface="Geist Medium"/>
               </a:rPr>
-              <a:t>DeepCausality</a:t>
-            </a:r>
-            <a:r>
-              <a:rPr lang="en-US" sz="3000" spc="-36" dirty="0">
-                <a:solidFill>
-                  <a:srgbClr val="E6EDF3"/>
-                </a:solidFill>
-                <a:latin typeface="Geist Medium"/>
-              </a:rPr>
-              <a:t>: downstream projects</a:t>
-            </a:r>
-            <a:endParaRPr lang="en-US" sz="3000" spc="-36" dirty="0">
-              <a:solidFill>
-                <a:srgbClr val="E6EDF3"/>
-              </a:solidFill>
-              <a:latin typeface="Geist Medium"/>
-            </a:endParaRPr>
+              <a:t>DeepCausality: downstream projects</a:t>
+            </a:r>
           </a:p>
         </p:txBody>
       </p:sp>
@@ -5845,23 +5814,8 @@
                 </a:solidFill>
                 <a:latin typeface="Geist"/>
               </a:rPr>
-              <a:t>A shared foundation across projects. More details at </a:t>
-            </a:r>
-            <a:r>
-              <a:rPr lang="en-US" sz="1400" dirty="0">
-                <a:solidFill>
-                  <a:srgbClr val="AAB3BD"/>
-                </a:solidFill>
-                <a:latin typeface="Geist"/>
-              </a:rPr>
-              <a:t>www.deepcausality.com</a:t>
-            </a:r>
-            <a:endParaRPr lang="en-US" sz="1400" dirty="0">
-              <a:solidFill>
-                <a:srgbClr val="AAB3BD"/>
-              </a:solidFill>
-              <a:latin typeface="Geist"/>
-            </a:endParaRPr>
+              <a:t>A shared foundation across projects. More details at www.deepcausality.com</a:t>
+            </a:r>
           </a:p>
         </p:txBody>
       </p:sp>
@@ -7542,12 +7496,6 @@
               </a:rPr>
               <a:t>Where the integration stands today</a:t>
             </a:r>
-            <a:endParaRPr lang="en-US" sz="1400" b="1" dirty="0">
-              <a:solidFill>
-                <a:srgbClr val="AAB3BD"/>
-              </a:solidFill>
-              <a:latin typeface="Geist"/>
-            </a:endParaRPr>
           </a:p>
         </p:txBody>
       </p:sp>
@@ -8407,12 +8355,6 @@
               </a:rPr>
               <a:t>Deployed at United Airlines.</a:t>
             </a:r>
-            <a:endParaRPr lang="en-US" sz="1200" dirty="0">
-              <a:solidFill>
-                <a:srgbClr val="AAB3BD"/>
-              </a:solidFill>
-              <a:latin typeface="Geist"/>
-            </a:endParaRPr>
           </a:p>
         </p:txBody>
       </p:sp>
@@ -8564,12 +8506,6 @@
               </a:rPr>
               <a:t>DeepCausality</a:t>
             </a:r>
-            <a:endParaRPr lang="en-US" sz="1450" spc="-15" dirty="0">
-              <a:solidFill>
-                <a:srgbClr val="E6EDF3"/>
-              </a:solidFill>
-              <a:latin typeface="Geist Medium"/>
-            </a:endParaRPr>
           </a:p>
         </p:txBody>
       </p:sp>
@@ -8643,25 +8579,7 @@
                 </a:solidFill>
                 <a:latin typeface="Geist"/>
               </a:rPr>
-              <a:t>1 </a:t>
-            </a:r>
-            <a:r>
-              <a:rPr lang="en-US" sz="1200" dirty="0">
-                <a:solidFill>
-                  <a:srgbClr val="AAB3BD"/>
-                </a:solidFill>
-                <a:latin typeface="Geist"/>
-              </a:rPr>
-              <a:t>million</a:t>
-            </a:r>
-            <a:r>
-              <a:rPr lang="en-US" sz="1200" dirty="0">
-                <a:solidFill>
-                  <a:srgbClr val="AAB3BD"/>
-                </a:solidFill>
-                <a:latin typeface="Geist"/>
-              </a:rPr>
-              <a:t> ops/sec</a:t>
+              <a:t>1 million ops/sec</a:t>
             </a:r>
           </a:p>
           <a:p>
@@ -8975,12 +8893,6 @@
               </a:rPr>
               <a:t>Where the integration goes next</a:t>
             </a:r>
-            <a:endParaRPr lang="en-US" sz="1400" b="1" dirty="0">
-              <a:solidFill>
-                <a:srgbClr val="AAB3BD"/>
-              </a:solidFill>
-              <a:latin typeface="Geist"/>
-            </a:endParaRPr>
           </a:p>
         </p:txBody>
       </p:sp>
@@ -9963,12 +9875,6 @@
               </a:rPr>
               <a:t>Dynamic incident response</a:t>
             </a:r>
-            <a:endParaRPr lang="en-US" sz="1200" dirty="0">
-              <a:solidFill>
-                <a:srgbClr val="AAB3BD"/>
-              </a:solidFill>
-              <a:latin typeface="Geist"/>
-            </a:endParaRPr>
           </a:p>
         </p:txBody>
       </p:sp>
@@ -10120,12 +10026,6 @@
               </a:rPr>
               <a:t>DeepCausality</a:t>
             </a:r>
-            <a:endParaRPr lang="en-US" sz="1450" spc="-15" dirty="0">
-              <a:solidFill>
-                <a:srgbClr val="E6EDF3"/>
-              </a:solidFill>
-              <a:latin typeface="Geist Medium"/>
-            </a:endParaRPr>
           </a:p>
         </p:txBody>
       </p:sp>
@@ -10288,16 +10188,7 @@
                 </a:solidFill>
                 <a:latin typeface="Geist"/>
               </a:rPr>
-              <a:t>DeepBrain</a:t>
-            </a:r>
-            <a:r>
-              <a:rPr lang="en-US" sz="1200" dirty="0">
-                <a:solidFill>
-                  <a:srgbClr val="AAB3BD"/>
-                </a:solidFill>
-                <a:latin typeface="Geist"/>
-              </a:rPr>
-              <a:t> ontology</a:t>
+              <a:t>DeepBrain ontology</a:t>
             </a:r>
           </a:p>
         </p:txBody>
@@ -10342,7 +10233,7 @@
       </p:grpSpPr>
       <p:sp>
         <p:nvSpPr>
-          <p:cNvPr id="2" name="Eyebrow"/>
+          <p:cNvPr id="2" name="TextBox 1"/>
           <p:cNvSpPr txBox="1"/>
           <p:nvPr/>
         </p:nvSpPr>
@@ -10374,20 +10265,20 @@
               </a:spcAft>
             </a:pPr>
             <a:r>
-              <a:rPr lang="en-US" sz="1100" spc="88" dirty="0">
+              <a:rPr lang="en-US" sz="1100" spc="88">
                 <a:solidFill>
                   <a:srgbClr val="5CD4E1"/>
                 </a:solidFill>
                 <a:latin typeface="JetBrains Mono Medium"/>
               </a:rPr>
-              <a:t>WHAT COMES NEXT</a:t>
-            </a:r>
-          </a:p>
-        </p:txBody>
-      </p:sp>
-      <p:sp>
-        <p:nvSpPr>
-          <p:cNvPr id="3" name="Title"/>
+              <a:t>PROJECT HEALTH</a:t>
+            </a:r>
+          </a:p>
+        </p:txBody>
+      </p:sp>
+      <p:sp>
+        <p:nvSpPr>
+          <p:cNvPr id="3" name="TextBox 2"/>
           <p:cNvSpPr txBox="1"/>
           <p:nvPr/>
         </p:nvSpPr>
@@ -10419,29 +10310,20 @@
               </a:spcAft>
             </a:pPr>
             <a:r>
-              <a:rPr lang="en-US" sz="3000" spc="-36" dirty="0">
+              <a:rPr lang="en-US" sz="3000" spc="-36">
                 <a:solidFill>
                   <a:srgbClr val="E6EDF3"/>
                 </a:solidFill>
                 <a:latin typeface="Geist Medium"/>
               </a:rPr>
-              <a:t>Scrith.ai</a:t>
-            </a:r>
-            <a:r>
-              <a:rPr lang="en-US" sz="3000" spc="-36" dirty="0">
-                <a:solidFill>
-                  <a:srgbClr val="E6EDF3"/>
-                </a:solidFill>
-                <a:latin typeface="Geist Medium"/>
-              </a:rPr>
-              <a:t>: dynamic context and ontology</a:t>
-            </a:r>
-          </a:p>
-        </p:txBody>
-      </p:sp>
-      <p:sp>
-        <p:nvSpPr>
-          <p:cNvPr id="4" name="Subtitle"/>
+              <a:t>Where the project stands in 2026</a:t>
+            </a:r>
+          </a:p>
+        </p:txBody>
+      </p:sp>
+      <p:sp>
+        <p:nvSpPr>
+          <p:cNvPr id="4" name="TextBox 3"/>
           <p:cNvSpPr txBox="1"/>
           <p:nvPr/>
         </p:nvSpPr>
@@ -10479,17 +10361,15 @@
                 </a:solidFill>
                 <a:latin typeface="Geist"/>
               </a:rPr>
-              <a:t>A joint project of the Center for Dynamic Causality and Carver Automation.</a:t>
+              <a:t>In September 2023, at the LF Sandbox admission, the project was in its infancy.</a:t>
             </a:r>
           </a:p>
         </p:txBody>
       </p:sp>
       <p:cxnSp>
         <p:nvCxnSpPr>
-          <p:cNvPr id="5" name="Rule Top"/>
-          <p:cNvCxnSpPr>
-            <a:cxnSpLocks/>
-          </p:cNvCxnSpPr>
+          <p:cNvPr id="5" name="Connector 4"/>
+          <p:cNvCxnSpPr/>
           <p:nvPr/>
         </p:nvCxnSpPr>
         <p:spPr>
@@ -10523,18 +10403,18 @@
       </p:cxnSp>
       <p:sp>
         <p:nvSpPr>
-          <p:cNvPr id="6" name="Source A"/>
+          <p:cNvPr id="6" name="Rounded Rectangle 5"/>
           <p:cNvSpPr/>
           <p:nvPr/>
         </p:nvSpPr>
         <p:spPr>
           <a:xfrm>
-            <a:off x="731520" y="1900000"/>
-            <a:ext cx="3417813" cy="1800000"/>
+            <a:off x="731520" y="1875282"/>
+            <a:ext cx="3430005" cy="1233510"/>
           </a:xfrm>
           <a:prstGeom prst="roundRect">
             <a:avLst>
-              <a:gd name="adj" fmla="val 3816"/>
+              <a:gd name="adj" fmla="val 6671"/>
             </a:avLst>
           </a:prstGeom>
           <a:solidFill>
@@ -10572,13 +10452,13 @@
       </p:sp>
       <p:sp>
         <p:nvSpPr>
-          <p:cNvPr id="7" name="Source A Bar"/>
+          <p:cNvPr id="7" name="Rectangle 6"/>
           <p:cNvSpPr/>
           <p:nvPr/>
         </p:nvSpPr>
         <p:spPr>
           <a:xfrm>
-            <a:off x="731520" y="2318288"/>
+            <a:off x="731520" y="2092177"/>
             <a:ext cx="34747" cy="274320"/>
           </a:xfrm>
           <a:prstGeom prst="rect">
@@ -10617,14 +10497,14 @@
       </p:sp>
       <p:sp>
         <p:nvSpPr>
-          <p:cNvPr id="8" name="Source A Eyebrow"/>
+          <p:cNvPr id="8" name="TextBox 7"/>
           <p:cNvSpPr txBox="1"/>
           <p:nvPr/>
         </p:nvSpPr>
         <p:spPr>
           <a:xfrm>
-            <a:off x="987552" y="2070000"/>
-            <a:ext cx="2924037" cy="153225"/>
+            <a:off x="987552" y="2046457"/>
+            <a:ext cx="2936229" cy="424688"/>
           </a:xfrm>
           <a:prstGeom prst="rect">
             <a:avLst/>
@@ -10639,7 +10519,7 @@
           <a:p>
             <a:pPr algn="l">
               <a:lnSpc>
-                <a:spcPts val="1062"/>
+                <a:spcPts val="3200"/>
               </a:lnSpc>
               <a:spcBef>
                 <a:spcPts val="0"/>
@@ -10649,27 +10529,27 @@
               </a:spcAft>
             </a:pPr>
             <a:r>
-              <a:rPr lang="en-US" sz="850" spc="68" dirty="0">
-                <a:solidFill>
-                  <a:srgbClr val="5CD4E1"/>
-                </a:solidFill>
-                <a:latin typeface="JetBrains Mono Medium"/>
-              </a:rPr>
-              <a:t>FROM DEEPCAUSALITY</a:t>
-            </a:r>
-          </a:p>
-        </p:txBody>
-      </p:sp>
-      <p:sp>
-        <p:nvSpPr>
-          <p:cNvPr id="9" name="Source A Heading"/>
+              <a:rPr lang="en-US" sz="3200" spc="-38" dirty="0">
+                <a:solidFill>
+                  <a:srgbClr val="E6EDF3"/>
+                </a:solidFill>
+                <a:latin typeface="Geist Medium"/>
+              </a:rPr>
+              <a:t>33</a:t>
+            </a:r>
+          </a:p>
+        </p:txBody>
+      </p:sp>
+      <p:sp>
+        <p:nvSpPr>
+          <p:cNvPr id="9" name="TextBox 8"/>
           <p:cNvSpPr txBox="1"/>
           <p:nvPr/>
         </p:nvSpPr>
         <p:spPr>
           <a:xfrm>
-            <a:off x="987552" y="2300000"/>
-            <a:ext cx="2924037" cy="254508"/>
+            <a:off x="987552" y="2544297"/>
+            <a:ext cx="2936229" cy="175133"/>
           </a:xfrm>
           <a:prstGeom prst="rect">
             <a:avLst/>
@@ -10684,7 +10564,7 @@
           <a:p>
             <a:pPr algn="l">
               <a:lnSpc>
-                <a:spcPts val="1860"/>
+                <a:spcPts val="1235"/>
               </a:lnSpc>
               <a:spcBef>
                 <a:spcPts val="0"/>
@@ -10694,27 +10574,27 @@
               </a:spcAft>
             </a:pPr>
             <a:r>
-              <a:rPr lang="en-US" sz="1550" spc="-17" dirty="0">
-                <a:solidFill>
-                  <a:srgbClr val="E6EDF3"/>
-                </a:solidFill>
-                <a:latin typeface="Geist Medium"/>
-              </a:rPr>
-              <a:t>Dynamic causality</a:t>
-            </a:r>
-          </a:p>
-        </p:txBody>
-      </p:sp>
-      <p:sp>
-        <p:nvSpPr>
-          <p:cNvPr id="10" name="Source A Body"/>
+              <a:rPr lang="en-US" sz="950" spc="76">
+                <a:solidFill>
+                  <a:srgbClr val="5CD4E1"/>
+                </a:solidFill>
+                <a:latin typeface="JetBrains Mono Medium"/>
+              </a:rPr>
+              <a:t>CRATES</a:t>
+            </a:r>
+          </a:p>
+        </p:txBody>
+      </p:sp>
+      <p:sp>
+        <p:nvSpPr>
+          <p:cNvPr id="10" name="TextBox 9"/>
           <p:cNvSpPr txBox="1"/>
           <p:nvPr/>
         </p:nvSpPr>
         <p:spPr>
           <a:xfrm>
-            <a:off x="987552" y="2600000"/>
-            <a:ext cx="2924037" cy="1020000"/>
+            <a:off x="987552" y="2756006"/>
+            <a:ext cx="2936229" cy="199898"/>
           </a:xfrm>
           <a:prstGeom prst="rect">
             <a:avLst/>
@@ -10722,14 +10602,14 @@
           <a:noFill/>
         </p:spPr>
         <p:txBody>
-          <a:bodyPr wrap="square" lIns="0" tIns="0" rIns="0" bIns="0" anchor="t">
+          <a:bodyPr wrap="none" lIns="0" tIns="0" rIns="0" bIns="0" anchor="t">
             <a:noAutofit/>
           </a:bodyPr>
           <a:lstStyle/>
           <a:p>
             <a:pPr algn="l">
               <a:lnSpc>
-                <a:spcPts val="1584"/>
+                <a:spcPts val="1430"/>
               </a:lnSpc>
               <a:spcBef>
                 <a:spcPts val="0"/>
@@ -10739,76 +10619,31 @@
               </a:spcAft>
             </a:pPr>
             <a:r>
-              <a:rPr lang="en-US" sz="1100" dirty="0">
+              <a:rPr lang="en-US" sz="1100">
                 <a:solidFill>
                   <a:srgbClr val="AAB3BD"/>
                 </a:solidFill>
                 <a:latin typeface="Geist"/>
               </a:rPr>
-              <a:t>Causal Monad, explicit context, and Effect Ethos: causal reasoning that keeps working while the context keeps changing.</a:t>
-            </a:r>
-          </a:p>
-        </p:txBody>
-      </p:sp>
-      <p:sp>
-        <p:nvSpPr>
-          <p:cNvPr id="11" name="Plus"/>
-          <p:cNvSpPr txBox="1"/>
-          <p:nvPr/>
-        </p:nvSpPr>
-        <p:spPr>
-          <a:xfrm>
-            <a:off x="731520" y="3700000"/>
-            <a:ext cx="3417813" cy="400000"/>
-          </a:xfrm>
-          <a:prstGeom prst="rect">
-            <a:avLst/>
-          </a:prstGeom>
-          <a:noFill/>
-        </p:spPr>
-        <p:txBody>
-          <a:bodyPr wrap="none" lIns="0" tIns="0" rIns="0" bIns="0" anchor="ctr">
-            <a:noAutofit/>
-          </a:bodyPr>
-          <a:lstStyle/>
-          <a:p>
-            <a:pPr algn="ctr">
-              <a:lnSpc>
-                <a:spcPts val="2880"/>
-              </a:lnSpc>
-              <a:spcBef>
-                <a:spcPts val="0"/>
-              </a:spcBef>
-              <a:spcAft>
-                <a:spcPts val="0"/>
-              </a:spcAft>
-            </a:pPr>
-            <a:r>
-              <a:rPr lang="en-US" sz="2400" dirty="0">
-                <a:solidFill>
-                  <a:srgbClr val="6B7682"/>
-                </a:solidFill>
-                <a:latin typeface="JetBrains Mono"/>
-              </a:rPr>
-              <a:t>+</a:t>
-            </a:r>
-          </a:p>
-        </p:txBody>
-      </p:sp>
-      <p:sp>
-        <p:nvSpPr>
-          <p:cNvPr id="12" name="Source B"/>
+              <a:t>Four in 2023</a:t>
+            </a:r>
+          </a:p>
+        </p:txBody>
+      </p:sp>
+      <p:sp>
+        <p:nvSpPr>
+          <p:cNvPr id="11" name="Rounded Rectangle 10"/>
           <p:cNvSpPr/>
           <p:nvPr/>
         </p:nvSpPr>
         <p:spPr>
           <a:xfrm>
-            <a:off x="731520" y="4100000"/>
-            <a:ext cx="3417813" cy="1800000"/>
+            <a:off x="4380981" y="1875282"/>
+            <a:ext cx="3430005" cy="1233510"/>
           </a:xfrm>
           <a:prstGeom prst="roundRect">
             <a:avLst>
-              <a:gd name="adj" fmla="val 3816"/>
+              <a:gd name="adj" fmla="val 6671"/>
             </a:avLst>
           </a:prstGeom>
           <a:solidFill>
@@ -10846,20 +10681,20 @@
       </p:sp>
       <p:sp>
         <p:nvSpPr>
-          <p:cNvPr id="13" name="Source B Bar"/>
+          <p:cNvPr id="12" name="Rectangle 11"/>
           <p:cNvSpPr/>
           <p:nvPr/>
         </p:nvSpPr>
         <p:spPr>
           <a:xfrm>
-            <a:off x="731520" y="4518288"/>
+            <a:off x="4380981" y="2092177"/>
             <a:ext cx="34747" cy="274320"/>
           </a:xfrm>
           <a:prstGeom prst="rect">
             <a:avLst/>
           </a:prstGeom>
           <a:solidFill>
-            <a:srgbClr val="6B7682"/>
+            <a:srgbClr val="5CD4E1"/>
           </a:solidFill>
           <a:ln>
             <a:noFill/>
@@ -10891,14 +10726,14 @@
       </p:sp>
       <p:sp>
         <p:nvSpPr>
-          <p:cNvPr id="14" name="Source B Eyebrow"/>
+          <p:cNvPr id="13" name="TextBox 12"/>
           <p:cNvSpPr txBox="1"/>
           <p:nvPr/>
         </p:nvSpPr>
         <p:spPr>
           <a:xfrm>
-            <a:off x="987552" y="4270000"/>
-            <a:ext cx="2924037" cy="153225"/>
+            <a:off x="4637013" y="2046457"/>
+            <a:ext cx="2936229" cy="424688"/>
           </a:xfrm>
           <a:prstGeom prst="rect">
             <a:avLst/>
@@ -10913,7 +10748,7 @@
           <a:p>
             <a:pPr algn="l">
               <a:lnSpc>
-                <a:spcPts val="1062"/>
+                <a:spcPts val="3200"/>
               </a:lnSpc>
               <a:spcBef>
                 <a:spcPts val="0"/>
@@ -10923,27 +10758,27 @@
               </a:spcAft>
             </a:pPr>
             <a:r>
-              <a:rPr lang="en-US" sz="850" spc="68" dirty="0">
-                <a:solidFill>
-                  <a:srgbClr val="5CD4E1"/>
-                </a:solidFill>
-                <a:latin typeface="JetBrains Mono Medium"/>
-              </a:rPr>
-              <a:t>FROM DEEPBRAIN</a:t>
-            </a:r>
-          </a:p>
-        </p:txBody>
-      </p:sp>
-      <p:sp>
-        <p:nvSpPr>
-          <p:cNvPr id="15" name="Source B Heading"/>
+              <a:rPr lang="en-US" sz="3200" spc="-38" dirty="0">
+                <a:solidFill>
+                  <a:srgbClr val="E6EDF3"/>
+                </a:solidFill>
+                <a:latin typeface="Geist Medium"/>
+              </a:rPr>
+              <a:t>475k</a:t>
+            </a:r>
+          </a:p>
+        </p:txBody>
+      </p:sp>
+      <p:sp>
+        <p:nvSpPr>
+          <p:cNvPr id="14" name="TextBox 13"/>
           <p:cNvSpPr txBox="1"/>
           <p:nvPr/>
         </p:nvSpPr>
         <p:spPr>
           <a:xfrm>
-            <a:off x="987552" y="4500000"/>
-            <a:ext cx="2924037" cy="254508"/>
+            <a:off x="4637013" y="2544297"/>
+            <a:ext cx="2936229" cy="175133"/>
           </a:xfrm>
           <a:prstGeom prst="rect">
             <a:avLst/>
@@ -10958,7 +10793,7 @@
           <a:p>
             <a:pPr algn="l">
               <a:lnSpc>
-                <a:spcPts val="1860"/>
+                <a:spcPts val="1235"/>
               </a:lnSpc>
               <a:spcBef>
                 <a:spcPts val="0"/>
@@ -10968,27 +10803,27 @@
               </a:spcAft>
             </a:pPr>
             <a:r>
-              <a:rPr lang="en-US" sz="1550" spc="-17" dirty="0">
-                <a:solidFill>
-                  <a:srgbClr val="E6EDF3"/>
-                </a:solidFill>
-                <a:latin typeface="Geist Medium"/>
-              </a:rPr>
-              <a:t>Knowledge propagation</a:t>
-            </a:r>
-          </a:p>
-        </p:txBody>
-      </p:sp>
-      <p:sp>
-        <p:nvSpPr>
-          <p:cNvPr id="16" name="Source B Body"/>
+              <a:rPr lang="en-US" sz="950" spc="76">
+                <a:solidFill>
+                  <a:srgbClr val="5CD4E1"/>
+                </a:solidFill>
+                <a:latin typeface="JetBrains Mono Medium"/>
+              </a:rPr>
+              <a:t>LINES OF RUST</a:t>
+            </a:r>
+          </a:p>
+        </p:txBody>
+      </p:sp>
+      <p:sp>
+        <p:nvSpPr>
+          <p:cNvPr id="15" name="TextBox 14"/>
           <p:cNvSpPr txBox="1"/>
           <p:nvPr/>
         </p:nvSpPr>
         <p:spPr>
           <a:xfrm>
-            <a:off x="987552" y="4800000"/>
-            <a:ext cx="2924037" cy="1020000"/>
+            <a:off x="4637013" y="2756006"/>
+            <a:ext cx="2936229" cy="199898"/>
           </a:xfrm>
           <a:prstGeom prst="rect">
             <a:avLst/>
@@ -10996,14 +10831,14 @@
           <a:noFill/>
         </p:spPr>
         <p:txBody>
-          <a:bodyPr wrap="square" lIns="0" tIns="0" rIns="0" bIns="0" anchor="t">
+          <a:bodyPr wrap="none" lIns="0" tIns="0" rIns="0" bIns="0" anchor="t">
             <a:noAutofit/>
           </a:bodyPr>
           <a:lstStyle/>
           <a:p>
             <a:pPr algn="l">
               <a:lnSpc>
-                <a:spcPts val="1584"/>
+                <a:spcPts val="1430"/>
               </a:lnSpc>
               <a:spcBef>
                 <a:spcPts val="0"/>
@@ -11013,62 +10848,1157 @@
               </a:spcAft>
             </a:pPr>
             <a:r>
-              <a:rPr lang="en-US" sz="1100" dirty="0">
+              <a:rPr lang="en-US" sz="1100">
                 <a:solidFill>
                   <a:srgbClr val="AAB3BD"/>
                 </a:solidFill>
                 <a:latin typeface="Geist"/>
               </a:rPr>
-              <a:t>An ontology of objects and relations, provenance on every edge, and knowledge that propagates the way effects do.</a:t>
-            </a:r>
-          </a:p>
+              <a:t>20.7k in 2023</a:t>
+            </a:r>
+          </a:p>
+        </p:txBody>
+      </p:sp>
+      <p:sp>
+        <p:nvSpPr>
+          <p:cNvPr id="16" name="Rounded Rectangle 15"/>
+          <p:cNvSpPr/>
+          <p:nvPr/>
+        </p:nvSpPr>
+        <p:spPr>
+          <a:xfrm>
+            <a:off x="8030443" y="1875282"/>
+            <a:ext cx="3430005" cy="1233510"/>
+          </a:xfrm>
+          <a:prstGeom prst="roundRect">
+            <a:avLst>
+              <a:gd name="adj" fmla="val 6671"/>
+            </a:avLst>
+          </a:prstGeom>
+          <a:solidFill>
+            <a:srgbClr val="0B1118"/>
+          </a:solidFill>
+          <a:ln w="9525">
+            <a:solidFill>
+              <a:srgbClr val="1F2A36"/>
+            </a:solidFill>
+          </a:ln>
+          <a:effectLst/>
+        </p:spPr>
+        <p:style>
+          <a:lnRef idx="1">
+            <a:schemeClr val="accent1"/>
+          </a:lnRef>
+          <a:fillRef idx="3">
+            <a:schemeClr val="accent1"/>
+          </a:fillRef>
+          <a:effectRef idx="2">
+            <a:schemeClr val="accent1"/>
+          </a:effectRef>
+          <a:fontRef idx="minor">
+            <a:schemeClr val="lt1"/>
+          </a:fontRef>
+        </p:style>
+        <p:txBody>
+          <a:bodyPr rtlCol="0" anchor="ctr"/>
+          <a:lstStyle/>
+          <a:p>
+            <a:pPr algn="ctr"/>
+            <a:endParaRPr lang="en-US"/>
+          </a:p>
+        </p:txBody>
+      </p:sp>
+      <p:sp>
+        <p:nvSpPr>
+          <p:cNvPr id="17" name="Rectangle 16"/>
+          <p:cNvSpPr/>
+          <p:nvPr/>
+        </p:nvSpPr>
+        <p:spPr>
+          <a:xfrm>
+            <a:off x="8030443" y="2092177"/>
+            <a:ext cx="34747" cy="274320"/>
+          </a:xfrm>
+          <a:prstGeom prst="rect">
+            <a:avLst/>
+          </a:prstGeom>
+          <a:solidFill>
+            <a:srgbClr val="5CD4E1"/>
+          </a:solidFill>
+          <a:ln>
+            <a:noFill/>
+          </a:ln>
+          <a:effectLst/>
+        </p:spPr>
+        <p:style>
+          <a:lnRef idx="1">
+            <a:schemeClr val="accent1"/>
+          </a:lnRef>
+          <a:fillRef idx="3">
+            <a:schemeClr val="accent1"/>
+          </a:fillRef>
+          <a:effectRef idx="2">
+            <a:schemeClr val="accent1"/>
+          </a:effectRef>
+          <a:fontRef idx="minor">
+            <a:schemeClr val="lt1"/>
+          </a:fontRef>
+        </p:style>
+        <p:txBody>
+          <a:bodyPr rtlCol="0" anchor="ctr"/>
+          <a:lstStyle/>
+          <a:p>
+            <a:pPr algn="ctr"/>
+            <a:endParaRPr lang="en-US"/>
+          </a:p>
+        </p:txBody>
+      </p:sp>
+      <p:sp>
+        <p:nvSpPr>
+          <p:cNvPr id="18" name="TextBox 17"/>
+          <p:cNvSpPr txBox="1"/>
+          <p:nvPr/>
+        </p:nvSpPr>
+        <p:spPr>
+          <a:xfrm>
+            <a:off x="8286475" y="2046457"/>
+            <a:ext cx="2936229" cy="424688"/>
+          </a:xfrm>
+          <a:prstGeom prst="rect">
+            <a:avLst/>
+          </a:prstGeom>
+          <a:noFill/>
+        </p:spPr>
+        <p:txBody>
+          <a:bodyPr wrap="none" lIns="0" tIns="0" rIns="0" bIns="0" anchor="t">
+            <a:noAutofit/>
+          </a:bodyPr>
+          <a:lstStyle/>
           <a:p>
             <a:pPr algn="l">
               <a:lnSpc>
-                <a:spcPts val="1584"/>
+                <a:spcPts val="3200"/>
               </a:lnSpc>
               <a:spcBef>
-                <a:spcPts val="400"/>
+                <a:spcPts val="0"/>
               </a:spcBef>
               <a:spcAft>
                 <a:spcPts val="0"/>
               </a:spcAft>
             </a:pPr>
             <a:r>
+              <a:rPr lang="en-US" sz="3200" spc="-38" dirty="0">
+                <a:solidFill>
+                  <a:srgbClr val="E6EDF3"/>
+                </a:solidFill>
+                <a:latin typeface="Geist Medium"/>
+              </a:rPr>
+              <a:t>14,463</a:t>
+            </a:r>
+          </a:p>
+        </p:txBody>
+      </p:sp>
+      <p:sp>
+        <p:nvSpPr>
+          <p:cNvPr id="19" name="TextBox 18"/>
+          <p:cNvSpPr txBox="1"/>
+          <p:nvPr/>
+        </p:nvSpPr>
+        <p:spPr>
+          <a:xfrm>
+            <a:off x="8286475" y="2544297"/>
+            <a:ext cx="2936229" cy="175133"/>
+          </a:xfrm>
+          <a:prstGeom prst="rect">
+            <a:avLst/>
+          </a:prstGeom>
+          <a:noFill/>
+        </p:spPr>
+        <p:txBody>
+          <a:bodyPr wrap="none" lIns="0" tIns="0" rIns="0" bIns="0" anchor="t">
+            <a:noAutofit/>
+          </a:bodyPr>
+          <a:lstStyle/>
+          <a:p>
+            <a:pPr algn="l">
+              <a:lnSpc>
+                <a:spcPts val="1235"/>
+              </a:lnSpc>
+              <a:spcBef>
+                <a:spcPts val="0"/>
+              </a:spcBef>
+              <a:spcAft>
+                <a:spcPts val="0"/>
+              </a:spcAft>
+            </a:pPr>
+            <a:r>
+              <a:rPr lang="en-US" sz="950" spc="76">
+                <a:solidFill>
+                  <a:srgbClr val="5CD4E1"/>
+                </a:solidFill>
+                <a:latin typeface="JetBrains Mono Medium"/>
+              </a:rPr>
+              <a:t>TESTS</a:t>
+            </a:r>
+          </a:p>
+        </p:txBody>
+      </p:sp>
+      <p:sp>
+        <p:nvSpPr>
+          <p:cNvPr id="20" name="TextBox 19"/>
+          <p:cNvSpPr txBox="1"/>
+          <p:nvPr/>
+        </p:nvSpPr>
+        <p:spPr>
+          <a:xfrm>
+            <a:off x="8286475" y="2756006"/>
+            <a:ext cx="2936229" cy="199898"/>
+          </a:xfrm>
+          <a:prstGeom prst="rect">
+            <a:avLst/>
+          </a:prstGeom>
+          <a:noFill/>
+        </p:spPr>
+        <p:txBody>
+          <a:bodyPr wrap="none" lIns="0" tIns="0" rIns="0" bIns="0" anchor="t">
+            <a:noAutofit/>
+          </a:bodyPr>
+          <a:lstStyle/>
+          <a:p>
+            <a:pPr algn="l">
+              <a:lnSpc>
+                <a:spcPts val="1430"/>
+              </a:lnSpc>
+              <a:spcBef>
+                <a:spcPts val="0"/>
+              </a:spcBef>
+              <a:spcAft>
+                <a:spcPts val="0"/>
+              </a:spcAft>
+            </a:pPr>
+            <a:r>
+              <a:rPr lang="en-US" sz="1100">
+                <a:solidFill>
+                  <a:srgbClr val="AAB3BD"/>
+                </a:solidFill>
+                <a:latin typeface="Geist"/>
+              </a:rPr>
+              <a:t>534 in 2023</a:t>
+            </a:r>
+          </a:p>
+        </p:txBody>
+      </p:sp>
+      <p:sp>
+        <p:nvSpPr>
+          <p:cNvPr id="21" name="Rounded Rectangle 20"/>
+          <p:cNvSpPr/>
+          <p:nvPr/>
+        </p:nvSpPr>
+        <p:spPr>
+          <a:xfrm>
+            <a:off x="731520" y="3328248"/>
+            <a:ext cx="3430005" cy="1233510"/>
+          </a:xfrm>
+          <a:prstGeom prst="roundRect">
+            <a:avLst>
+              <a:gd name="adj" fmla="val 6671"/>
+            </a:avLst>
+          </a:prstGeom>
+          <a:solidFill>
+            <a:srgbClr val="0B1118"/>
+          </a:solidFill>
+          <a:ln w="9525">
+            <a:solidFill>
+              <a:srgbClr val="1F2A36"/>
+            </a:solidFill>
+          </a:ln>
+          <a:effectLst/>
+        </p:spPr>
+        <p:style>
+          <a:lnRef idx="1">
+            <a:schemeClr val="accent1"/>
+          </a:lnRef>
+          <a:fillRef idx="3">
+            <a:schemeClr val="accent1"/>
+          </a:fillRef>
+          <a:effectRef idx="2">
+            <a:schemeClr val="accent1"/>
+          </a:effectRef>
+          <a:fontRef idx="minor">
+            <a:schemeClr val="lt1"/>
+          </a:fontRef>
+        </p:style>
+        <p:txBody>
+          <a:bodyPr rtlCol="0" anchor="ctr"/>
+          <a:lstStyle/>
+          <a:p>
+            <a:pPr algn="ctr"/>
+            <a:endParaRPr lang="en-US"/>
+          </a:p>
+        </p:txBody>
+      </p:sp>
+      <p:sp>
+        <p:nvSpPr>
+          <p:cNvPr id="22" name="Rectangle 21"/>
+          <p:cNvSpPr/>
+          <p:nvPr/>
+        </p:nvSpPr>
+        <p:spPr>
+          <a:xfrm>
+            <a:off x="731520" y="3545144"/>
+            <a:ext cx="34747" cy="274320"/>
+          </a:xfrm>
+          <a:prstGeom prst="rect">
+            <a:avLst/>
+          </a:prstGeom>
+          <a:solidFill>
+            <a:srgbClr val="5CD4E1"/>
+          </a:solidFill>
+          <a:ln>
+            <a:noFill/>
+          </a:ln>
+          <a:effectLst/>
+        </p:spPr>
+        <p:style>
+          <a:lnRef idx="1">
+            <a:schemeClr val="accent1"/>
+          </a:lnRef>
+          <a:fillRef idx="3">
+            <a:schemeClr val="accent1"/>
+          </a:fillRef>
+          <a:effectRef idx="2">
+            <a:schemeClr val="accent1"/>
+          </a:effectRef>
+          <a:fontRef idx="minor">
+            <a:schemeClr val="lt1"/>
+          </a:fontRef>
+        </p:style>
+        <p:txBody>
+          <a:bodyPr rtlCol="0" anchor="ctr"/>
+          <a:lstStyle/>
+          <a:p>
+            <a:pPr algn="ctr"/>
+            <a:endParaRPr lang="en-US"/>
+          </a:p>
+        </p:txBody>
+      </p:sp>
+      <p:sp>
+        <p:nvSpPr>
+          <p:cNvPr id="23" name="TextBox 22"/>
+          <p:cNvSpPr txBox="1"/>
+          <p:nvPr/>
+        </p:nvSpPr>
+        <p:spPr>
+          <a:xfrm>
+            <a:off x="987552" y="3499424"/>
+            <a:ext cx="2936229" cy="424688"/>
+          </a:xfrm>
+          <a:prstGeom prst="rect">
+            <a:avLst/>
+          </a:prstGeom>
+          <a:noFill/>
+        </p:spPr>
+        <p:txBody>
+          <a:bodyPr wrap="none" lIns="0" tIns="0" rIns="0" bIns="0" anchor="t">
+            <a:noAutofit/>
+          </a:bodyPr>
+          <a:lstStyle/>
+          <a:p>
+            <a:pPr algn="l">
+              <a:lnSpc>
+                <a:spcPts val="3200"/>
+              </a:lnSpc>
+              <a:spcBef>
+                <a:spcPts val="0"/>
+              </a:spcBef>
+              <a:spcAft>
+                <a:spcPts val="0"/>
+              </a:spcAft>
+            </a:pPr>
+            <a:r>
+              <a:rPr lang="en-US" sz="3200" spc="-38" dirty="0">
+                <a:solidFill>
+                  <a:srgbClr val="E6EDF3"/>
+                </a:solidFill>
+                <a:latin typeface="Geist Medium"/>
+              </a:rPr>
+              <a:t>155</a:t>
+            </a:r>
+          </a:p>
+        </p:txBody>
+      </p:sp>
+      <p:sp>
+        <p:nvSpPr>
+          <p:cNvPr id="24" name="TextBox 23"/>
+          <p:cNvSpPr txBox="1"/>
+          <p:nvPr/>
+        </p:nvSpPr>
+        <p:spPr>
+          <a:xfrm>
+            <a:off x="987552" y="3997264"/>
+            <a:ext cx="2936229" cy="175133"/>
+          </a:xfrm>
+          <a:prstGeom prst="rect">
+            <a:avLst/>
+          </a:prstGeom>
+          <a:noFill/>
+        </p:spPr>
+        <p:txBody>
+          <a:bodyPr wrap="none" lIns="0" tIns="0" rIns="0" bIns="0" anchor="t">
+            <a:noAutofit/>
+          </a:bodyPr>
+          <a:lstStyle/>
+          <a:p>
+            <a:pPr algn="l">
+              <a:lnSpc>
+                <a:spcPts val="1235"/>
+              </a:lnSpc>
+              <a:spcBef>
+                <a:spcPts val="0"/>
+              </a:spcBef>
+              <a:spcAft>
+                <a:spcPts val="0"/>
+              </a:spcAft>
+            </a:pPr>
+            <a:r>
+              <a:rPr lang="en-US" sz="950" spc="76">
+                <a:solidFill>
+                  <a:srgbClr val="5CD4E1"/>
+                </a:solidFill>
+                <a:latin typeface="JetBrains Mono Medium"/>
+              </a:rPr>
+              <a:t>RUNNABLE EXAMPLES</a:t>
+            </a:r>
+          </a:p>
+        </p:txBody>
+      </p:sp>
+      <p:sp>
+        <p:nvSpPr>
+          <p:cNvPr id="25" name="TextBox 24"/>
+          <p:cNvSpPr txBox="1"/>
+          <p:nvPr/>
+        </p:nvSpPr>
+        <p:spPr>
+          <a:xfrm>
+            <a:off x="987552" y="4208973"/>
+            <a:ext cx="2936229" cy="199898"/>
+          </a:xfrm>
+          <a:prstGeom prst="rect">
+            <a:avLst/>
+          </a:prstGeom>
+          <a:noFill/>
+        </p:spPr>
+        <p:txBody>
+          <a:bodyPr wrap="none" lIns="0" tIns="0" rIns="0" bIns="0" anchor="t">
+            <a:noAutofit/>
+          </a:bodyPr>
+          <a:lstStyle/>
+          <a:p>
+            <a:pPr algn="l">
+              <a:lnSpc>
+                <a:spcPts val="1430"/>
+              </a:lnSpc>
+              <a:spcBef>
+                <a:spcPts val="0"/>
+              </a:spcBef>
+              <a:spcAft>
+                <a:spcPts val="0"/>
+              </a:spcAft>
+            </a:pPr>
+            <a:r>
+              <a:rPr lang="en-US" sz="1100">
+                <a:solidFill>
+                  <a:srgbClr val="AAB3BD"/>
+                </a:solidFill>
+                <a:latin typeface="Geist"/>
+              </a:rPr>
+              <a:t>Across 14 domains</a:t>
+            </a:r>
+          </a:p>
+        </p:txBody>
+      </p:sp>
+      <p:sp>
+        <p:nvSpPr>
+          <p:cNvPr id="26" name="Rounded Rectangle 25"/>
+          <p:cNvSpPr/>
+          <p:nvPr/>
+        </p:nvSpPr>
+        <p:spPr>
+          <a:xfrm>
+            <a:off x="4380981" y="3328248"/>
+            <a:ext cx="3430005" cy="1233510"/>
+          </a:xfrm>
+          <a:prstGeom prst="roundRect">
+            <a:avLst>
+              <a:gd name="adj" fmla="val 6671"/>
+            </a:avLst>
+          </a:prstGeom>
+          <a:solidFill>
+            <a:srgbClr val="0B1118"/>
+          </a:solidFill>
+          <a:ln w="9525">
+            <a:solidFill>
+              <a:srgbClr val="1F2A36"/>
+            </a:solidFill>
+          </a:ln>
+          <a:effectLst/>
+        </p:spPr>
+        <p:style>
+          <a:lnRef idx="1">
+            <a:schemeClr val="accent1"/>
+          </a:lnRef>
+          <a:fillRef idx="3">
+            <a:schemeClr val="accent1"/>
+          </a:fillRef>
+          <a:effectRef idx="2">
+            <a:schemeClr val="accent1"/>
+          </a:effectRef>
+          <a:fontRef idx="minor">
+            <a:schemeClr val="lt1"/>
+          </a:fontRef>
+        </p:style>
+        <p:txBody>
+          <a:bodyPr rtlCol="0" anchor="ctr"/>
+          <a:lstStyle/>
+          <a:p>
+            <a:pPr algn="ctr"/>
+            <a:endParaRPr lang="en-US"/>
+          </a:p>
+        </p:txBody>
+      </p:sp>
+      <p:sp>
+        <p:nvSpPr>
+          <p:cNvPr id="27" name="Rectangle 26"/>
+          <p:cNvSpPr/>
+          <p:nvPr/>
+        </p:nvSpPr>
+        <p:spPr>
+          <a:xfrm>
+            <a:off x="4380981" y="3545144"/>
+            <a:ext cx="34747" cy="274320"/>
+          </a:xfrm>
+          <a:prstGeom prst="rect">
+            <a:avLst/>
+          </a:prstGeom>
+          <a:solidFill>
+            <a:srgbClr val="5CD4E1"/>
+          </a:solidFill>
+          <a:ln>
+            <a:noFill/>
+          </a:ln>
+          <a:effectLst/>
+        </p:spPr>
+        <p:style>
+          <a:lnRef idx="1">
+            <a:schemeClr val="accent1"/>
+          </a:lnRef>
+          <a:fillRef idx="3">
+            <a:schemeClr val="accent1"/>
+          </a:fillRef>
+          <a:effectRef idx="2">
+            <a:schemeClr val="accent1"/>
+          </a:effectRef>
+          <a:fontRef idx="minor">
+            <a:schemeClr val="lt1"/>
+          </a:fontRef>
+        </p:style>
+        <p:txBody>
+          <a:bodyPr rtlCol="0" anchor="ctr"/>
+          <a:lstStyle/>
+          <a:p>
+            <a:pPr algn="ctr"/>
+            <a:endParaRPr lang="en-US"/>
+          </a:p>
+        </p:txBody>
+      </p:sp>
+      <p:sp>
+        <p:nvSpPr>
+          <p:cNvPr id="28" name="TextBox 27"/>
+          <p:cNvSpPr txBox="1"/>
+          <p:nvPr/>
+        </p:nvSpPr>
+        <p:spPr>
+          <a:xfrm>
+            <a:off x="4637013" y="3499424"/>
+            <a:ext cx="2936229" cy="424688"/>
+          </a:xfrm>
+          <a:prstGeom prst="rect">
+            <a:avLst/>
+          </a:prstGeom>
+          <a:noFill/>
+        </p:spPr>
+        <p:txBody>
+          <a:bodyPr wrap="none" lIns="0" tIns="0" rIns="0" bIns="0" anchor="t">
+            <a:noAutofit/>
+          </a:bodyPr>
+          <a:lstStyle/>
+          <a:p>
+            <a:pPr algn="l">
+              <a:lnSpc>
+                <a:spcPts val="3200"/>
+              </a:lnSpc>
+              <a:spcBef>
+                <a:spcPts val="0"/>
+              </a:spcBef>
+              <a:spcAft>
+                <a:spcPts val="0"/>
+              </a:spcAft>
+            </a:pPr>
+            <a:r>
+              <a:rPr lang="en-US" sz="3200" spc="-38">
+                <a:solidFill>
+                  <a:srgbClr val="E6EDF3"/>
+                </a:solidFill>
+                <a:latin typeface="Geist Medium"/>
+              </a:rPr>
+              <a:t>183</a:t>
+            </a:r>
+          </a:p>
+        </p:txBody>
+      </p:sp>
+      <p:sp>
+        <p:nvSpPr>
+          <p:cNvPr id="29" name="TextBox 28"/>
+          <p:cNvSpPr txBox="1"/>
+          <p:nvPr/>
+        </p:nvSpPr>
+        <p:spPr>
+          <a:xfrm>
+            <a:off x="4637013" y="3997264"/>
+            <a:ext cx="2936229" cy="175133"/>
+          </a:xfrm>
+          <a:prstGeom prst="rect">
+            <a:avLst/>
+          </a:prstGeom>
+          <a:noFill/>
+        </p:spPr>
+        <p:txBody>
+          <a:bodyPr wrap="none" lIns="0" tIns="0" rIns="0" bIns="0" anchor="t">
+            <a:noAutofit/>
+          </a:bodyPr>
+          <a:lstStyle/>
+          <a:p>
+            <a:pPr algn="l">
+              <a:lnSpc>
+                <a:spcPts val="1235"/>
+              </a:lnSpc>
+              <a:spcBef>
+                <a:spcPts val="0"/>
+              </a:spcBef>
+              <a:spcAft>
+                <a:spcPts val="0"/>
+              </a:spcAft>
+            </a:pPr>
+            <a:r>
+              <a:rPr lang="en-US" sz="950" spc="76">
+                <a:solidFill>
+                  <a:srgbClr val="5CD4E1"/>
+                </a:solidFill>
+                <a:latin typeface="JetBrains Mono Medium"/>
+              </a:rPr>
+              <a:t>LEAN THEOREMS</a:t>
+            </a:r>
+          </a:p>
+        </p:txBody>
+      </p:sp>
+      <p:sp>
+        <p:nvSpPr>
+          <p:cNvPr id="30" name="TextBox 29"/>
+          <p:cNvSpPr txBox="1"/>
+          <p:nvPr/>
+        </p:nvSpPr>
+        <p:spPr>
+          <a:xfrm>
+            <a:off x="4637013" y="4208973"/>
+            <a:ext cx="2936229" cy="199898"/>
+          </a:xfrm>
+          <a:prstGeom prst="rect">
+            <a:avLst/>
+          </a:prstGeom>
+          <a:noFill/>
+        </p:spPr>
+        <p:txBody>
+          <a:bodyPr wrap="none" lIns="0" tIns="0" rIns="0" bIns="0" anchor="t">
+            <a:noAutofit/>
+          </a:bodyPr>
+          <a:lstStyle/>
+          <a:p>
+            <a:pPr algn="l">
+              <a:lnSpc>
+                <a:spcPts val="1430"/>
+              </a:lnSpc>
+              <a:spcBef>
+                <a:spcPts val="0"/>
+              </a:spcBef>
+              <a:spcAft>
+                <a:spcPts val="0"/>
+              </a:spcAft>
+            </a:pPr>
+            <a:r>
+              <a:rPr lang="en-US" sz="1100">
+                <a:solidFill>
+                  <a:srgbClr val="AAB3BD"/>
+                </a:solidFill>
+                <a:latin typeface="Geist"/>
+              </a:rPr>
+              <a:t>Bound to Rust witnesses</a:t>
+            </a:r>
+          </a:p>
+        </p:txBody>
+      </p:sp>
+      <p:sp>
+        <p:nvSpPr>
+          <p:cNvPr id="31" name="Rounded Rectangle 30"/>
+          <p:cNvSpPr/>
+          <p:nvPr/>
+        </p:nvSpPr>
+        <p:spPr>
+          <a:xfrm>
+            <a:off x="8030443" y="3328248"/>
+            <a:ext cx="3430005" cy="1233510"/>
+          </a:xfrm>
+          <a:prstGeom prst="roundRect">
+            <a:avLst>
+              <a:gd name="adj" fmla="val 6671"/>
+            </a:avLst>
+          </a:prstGeom>
+          <a:solidFill>
+            <a:srgbClr val="0B1118"/>
+          </a:solidFill>
+          <a:ln w="9525">
+            <a:solidFill>
+              <a:srgbClr val="1F2A36"/>
+            </a:solidFill>
+          </a:ln>
+          <a:effectLst/>
+        </p:spPr>
+        <p:style>
+          <a:lnRef idx="1">
+            <a:schemeClr val="accent1"/>
+          </a:lnRef>
+          <a:fillRef idx="3">
+            <a:schemeClr val="accent1"/>
+          </a:fillRef>
+          <a:effectRef idx="2">
+            <a:schemeClr val="accent1"/>
+          </a:effectRef>
+          <a:fontRef idx="minor">
+            <a:schemeClr val="lt1"/>
+          </a:fontRef>
+        </p:style>
+        <p:txBody>
+          <a:bodyPr rtlCol="0" anchor="ctr"/>
+          <a:lstStyle/>
+          <a:p>
+            <a:pPr algn="ctr"/>
+            <a:endParaRPr lang="en-US"/>
+          </a:p>
+        </p:txBody>
+      </p:sp>
+      <p:sp>
+        <p:nvSpPr>
+          <p:cNvPr id="32" name="Rectangle 31"/>
+          <p:cNvSpPr/>
+          <p:nvPr/>
+        </p:nvSpPr>
+        <p:spPr>
+          <a:xfrm>
+            <a:off x="8030443" y="3545144"/>
+            <a:ext cx="34747" cy="274320"/>
+          </a:xfrm>
+          <a:prstGeom prst="rect">
+            <a:avLst/>
+          </a:prstGeom>
+          <a:solidFill>
+            <a:srgbClr val="5CD4E1"/>
+          </a:solidFill>
+          <a:ln>
+            <a:noFill/>
+          </a:ln>
+          <a:effectLst/>
+        </p:spPr>
+        <p:style>
+          <a:lnRef idx="1">
+            <a:schemeClr val="accent1"/>
+          </a:lnRef>
+          <a:fillRef idx="3">
+            <a:schemeClr val="accent1"/>
+          </a:fillRef>
+          <a:effectRef idx="2">
+            <a:schemeClr val="accent1"/>
+          </a:effectRef>
+          <a:fontRef idx="minor">
+            <a:schemeClr val="lt1"/>
+          </a:fontRef>
+        </p:style>
+        <p:txBody>
+          <a:bodyPr rtlCol="0" anchor="ctr"/>
+          <a:lstStyle/>
+          <a:p>
+            <a:pPr algn="ctr"/>
+            <a:endParaRPr lang="en-US"/>
+          </a:p>
+        </p:txBody>
+      </p:sp>
+      <p:sp>
+        <p:nvSpPr>
+          <p:cNvPr id="33" name="TextBox 32"/>
+          <p:cNvSpPr txBox="1"/>
+          <p:nvPr/>
+        </p:nvSpPr>
+        <p:spPr>
+          <a:xfrm>
+            <a:off x="8286475" y="3499424"/>
+            <a:ext cx="2936229" cy="424688"/>
+          </a:xfrm>
+          <a:prstGeom prst="rect">
+            <a:avLst/>
+          </a:prstGeom>
+          <a:noFill/>
+        </p:spPr>
+        <p:txBody>
+          <a:bodyPr wrap="none" lIns="0" tIns="0" rIns="0" bIns="0" anchor="t">
+            <a:noAutofit/>
+          </a:bodyPr>
+          <a:lstStyle/>
+          <a:p>
+            <a:pPr algn="l">
+              <a:lnSpc>
+                <a:spcPts val="3200"/>
+              </a:lnSpc>
+              <a:spcBef>
+                <a:spcPts val="0"/>
+              </a:spcBef>
+              <a:spcAft>
+                <a:spcPts val="0"/>
+              </a:spcAft>
+            </a:pPr>
+            <a:r>
+              <a:rPr lang="en-US" sz="3200" spc="-38" dirty="0">
+                <a:solidFill>
+                  <a:srgbClr val="E6EDF3"/>
+                </a:solidFill>
+                <a:latin typeface="Geist Medium"/>
+              </a:rPr>
+              <a:t>33 / 33</a:t>
+            </a:r>
+          </a:p>
+        </p:txBody>
+      </p:sp>
+      <p:sp>
+        <p:nvSpPr>
+          <p:cNvPr id="34" name="TextBox 33"/>
+          <p:cNvSpPr txBox="1"/>
+          <p:nvPr/>
+        </p:nvSpPr>
+        <p:spPr>
+          <a:xfrm>
+            <a:off x="8286475" y="3997264"/>
+            <a:ext cx="2936229" cy="175133"/>
+          </a:xfrm>
+          <a:prstGeom prst="rect">
+            <a:avLst/>
+          </a:prstGeom>
+          <a:noFill/>
+        </p:spPr>
+        <p:txBody>
+          <a:bodyPr wrap="none" lIns="0" tIns="0" rIns="0" bIns="0" anchor="t">
+            <a:noAutofit/>
+          </a:bodyPr>
+          <a:lstStyle/>
+          <a:p>
+            <a:pPr algn="l">
+              <a:lnSpc>
+                <a:spcPts val="1235"/>
+              </a:lnSpc>
+              <a:spcBef>
+                <a:spcPts val="0"/>
+              </a:spcBef>
+              <a:spcAft>
+                <a:spcPts val="0"/>
+              </a:spcAft>
+            </a:pPr>
+            <a:r>
+              <a:rPr lang="en-US" sz="950" spc="76" dirty="0">
+                <a:solidFill>
+                  <a:srgbClr val="5CD4E1"/>
+                </a:solidFill>
+                <a:latin typeface="JetBrains Mono Medium"/>
+              </a:rPr>
+              <a:t>ZERO-UNSAFE code</a:t>
+            </a:r>
+          </a:p>
+        </p:txBody>
+      </p:sp>
+      <p:sp>
+        <p:nvSpPr>
+          <p:cNvPr id="35" name="TextBox 34"/>
+          <p:cNvSpPr txBox="1"/>
+          <p:nvPr/>
+        </p:nvSpPr>
+        <p:spPr>
+          <a:xfrm>
+            <a:off x="8286475" y="4208973"/>
+            <a:ext cx="2936229" cy="199898"/>
+          </a:xfrm>
+          <a:prstGeom prst="rect">
+            <a:avLst/>
+          </a:prstGeom>
+          <a:noFill/>
+        </p:spPr>
+        <p:txBody>
+          <a:bodyPr wrap="none" lIns="0" tIns="0" rIns="0" bIns="0" anchor="t">
+            <a:noAutofit/>
+          </a:bodyPr>
+          <a:lstStyle/>
+          <a:p>
+            <a:pPr algn="l">
+              <a:lnSpc>
+                <a:spcPts val="1430"/>
+              </a:lnSpc>
+              <a:spcBef>
+                <a:spcPts val="0"/>
+              </a:spcBef>
+              <a:spcAft>
+                <a:spcPts val="0"/>
+              </a:spcAft>
+            </a:pPr>
+            <a:r>
               <a:rPr lang="en-US" sz="1100" dirty="0">
                 <a:solidFill>
                   <a:srgbClr val="AAB3BD"/>
                 </a:solidFill>
                 <a:latin typeface="Geist"/>
               </a:rPr>
-              <a:t>Design stage, no code yet.</a:t>
+              <a:t>Verified by the Rust compiler!</a:t>
+            </a:r>
+          </a:p>
+        </p:txBody>
+      </p:sp>
+      <p:sp>
+        <p:nvSpPr>
+          <p:cNvPr id="36" name="Rounded Rectangle 35"/>
+          <p:cNvSpPr/>
+          <p:nvPr/>
+        </p:nvSpPr>
+        <p:spPr>
+          <a:xfrm>
+            <a:off x="731520" y="4799502"/>
+            <a:ext cx="10728929" cy="1042629"/>
+          </a:xfrm>
+          <a:prstGeom prst="roundRect">
+            <a:avLst>
+              <a:gd name="adj" fmla="val 7893"/>
+            </a:avLst>
+          </a:prstGeom>
+          <a:solidFill>
+            <a:srgbClr val="121A23"/>
+          </a:solidFill>
+          <a:ln w="9525">
+            <a:solidFill>
+              <a:srgbClr val="2A3A4A"/>
+            </a:solidFill>
+          </a:ln>
+          <a:effectLst/>
+        </p:spPr>
+        <p:style>
+          <a:lnRef idx="1">
+            <a:schemeClr val="accent1"/>
+          </a:lnRef>
+          <a:fillRef idx="3">
+            <a:schemeClr val="accent1"/>
+          </a:fillRef>
+          <a:effectRef idx="2">
+            <a:schemeClr val="accent1"/>
+          </a:effectRef>
+          <a:fontRef idx="minor">
+            <a:schemeClr val="lt1"/>
+          </a:fontRef>
+        </p:style>
+        <p:txBody>
+          <a:bodyPr rtlCol="0" anchor="ctr"/>
+          <a:lstStyle/>
+          <a:p>
+            <a:pPr algn="ctr"/>
+            <a:endParaRPr lang="en-US"/>
+          </a:p>
+        </p:txBody>
+      </p:sp>
+      <p:sp>
+        <p:nvSpPr>
+          <p:cNvPr id="37" name="Rectangle 36"/>
+          <p:cNvSpPr/>
+          <p:nvPr/>
+        </p:nvSpPr>
+        <p:spPr>
+          <a:xfrm>
+            <a:off x="731520" y="4988966"/>
+            <a:ext cx="41148" cy="292608"/>
+          </a:xfrm>
+          <a:prstGeom prst="rect">
+            <a:avLst/>
+          </a:prstGeom>
+          <a:solidFill>
+            <a:srgbClr val="5CD4E1"/>
+          </a:solidFill>
+          <a:ln>
+            <a:noFill/>
+          </a:ln>
+          <a:effectLst/>
+        </p:spPr>
+        <p:style>
+          <a:lnRef idx="1">
+            <a:schemeClr val="accent1"/>
+          </a:lnRef>
+          <a:fillRef idx="3">
+            <a:schemeClr val="accent1"/>
+          </a:fillRef>
+          <a:effectRef idx="2">
+            <a:schemeClr val="accent1"/>
+          </a:effectRef>
+          <a:fontRef idx="minor">
+            <a:schemeClr val="lt1"/>
+          </a:fontRef>
+        </p:style>
+        <p:txBody>
+          <a:bodyPr rtlCol="0" anchor="ctr"/>
+          <a:lstStyle/>
+          <a:p>
+            <a:pPr algn="ctr"/>
+            <a:endParaRPr lang="en-US"/>
+          </a:p>
+        </p:txBody>
+      </p:sp>
+      <p:sp>
+        <p:nvSpPr>
+          <p:cNvPr id="38" name="TextBox 37"/>
+          <p:cNvSpPr txBox="1"/>
+          <p:nvPr/>
+        </p:nvSpPr>
+        <p:spPr>
+          <a:xfrm>
+            <a:off x="969264" y="4970678"/>
+            <a:ext cx="10253441" cy="250698"/>
+          </a:xfrm>
+          <a:prstGeom prst="rect">
+            <a:avLst/>
+          </a:prstGeom>
+          <a:noFill/>
+        </p:spPr>
+        <p:txBody>
+          <a:bodyPr wrap="none" lIns="0" tIns="0" rIns="0" bIns="0" anchor="t">
+            <a:noAutofit/>
+          </a:bodyPr>
+          <a:lstStyle/>
+          <a:p>
+            <a:pPr algn="l">
+              <a:lnSpc>
+                <a:spcPts val="1830"/>
+              </a:lnSpc>
+              <a:spcBef>
+                <a:spcPts val="0"/>
+              </a:spcBef>
+              <a:spcAft>
+                <a:spcPts val="0"/>
+              </a:spcAft>
+            </a:pPr>
+            <a:r>
+              <a:rPr lang="en-US" sz="1500" spc="-17" dirty="0">
+                <a:solidFill>
+                  <a:srgbClr val="E6EDF3"/>
+                </a:solidFill>
+                <a:latin typeface="Geist Medium"/>
+              </a:rPr>
+              <a:t>Dynamic Causality is just getting started</a:t>
+            </a:r>
+          </a:p>
+        </p:txBody>
+      </p:sp>
+      <p:sp>
+        <p:nvSpPr>
+          <p:cNvPr id="39" name="TextBox 38"/>
+          <p:cNvSpPr txBox="1"/>
+          <p:nvPr/>
+        </p:nvSpPr>
+        <p:spPr>
+          <a:xfrm>
+            <a:off x="969264" y="5285384"/>
+            <a:ext cx="10253441" cy="403860"/>
+          </a:xfrm>
+          <a:prstGeom prst="rect">
+            <a:avLst/>
+          </a:prstGeom>
+          <a:noFill/>
+        </p:spPr>
+        <p:txBody>
+          <a:bodyPr wrap="none" lIns="0" tIns="0" rIns="0" bIns="0" anchor="t">
+            <a:noAutofit/>
+          </a:bodyPr>
+          <a:lstStyle/>
+          <a:p>
+            <a:pPr algn="l">
+              <a:lnSpc>
+                <a:spcPts val="1518"/>
+              </a:lnSpc>
+              <a:spcBef>
+                <a:spcPts val="0"/>
+              </a:spcBef>
+              <a:spcAft>
+                <a:spcPts val="0"/>
+              </a:spcAft>
+            </a:pPr>
+            <a:r>
+              <a:rPr lang="en-US" sz="1150" dirty="0">
+                <a:solidFill>
+                  <a:srgbClr val="AAB3BD"/>
+                </a:solidFill>
+                <a:latin typeface="Geist"/>
+              </a:rPr>
+              <a:t>ServiceRadar integration just began and is structured to continue.</a:t>
+            </a:r>
+          </a:p>
+          <a:p>
+            <a:pPr algn="l">
+              <a:lnSpc>
+                <a:spcPts val="1518"/>
+              </a:lnSpc>
+              <a:spcBef>
+                <a:spcPts val="0"/>
+              </a:spcBef>
+              <a:spcAft>
+                <a:spcPts val="0"/>
+              </a:spcAft>
+            </a:pPr>
+            <a:r>
+              <a:rPr lang="en-US" sz="1150" dirty="0">
+                <a:solidFill>
+                  <a:srgbClr val="AAB3BD"/>
+                </a:solidFill>
+                <a:latin typeface="Geist"/>
+              </a:rPr>
+              <a:t>Research in advanced topics started only in mid-2026 and will continue.</a:t>
             </a:r>
           </a:p>
         </p:txBody>
       </p:sp>
       <p:cxnSp>
         <p:nvCxnSpPr>
-          <p:cNvPr id="17" name="Arrow A"/>
-          <p:cNvCxnSpPr>
-            <a:cxnSpLocks/>
-          </p:cNvCxnSpPr>
+          <p:cNvPr id="40" name="Connector 39"/>
+          <p:cNvCxnSpPr/>
           <p:nvPr/>
         </p:nvCxnSpPr>
         <p:spPr>
           <a:xfrm>
-            <a:off x="4229333" y="2700000"/>
-            <a:ext cx="490667" cy="900000"/>
+            <a:off x="731520" y="6327648"/>
+            <a:ext cx="10728929" cy="0"/>
           </a:xfrm>
           <a:prstGeom prst="line">
             <a:avLst/>
           </a:prstGeom>
-          <a:ln w="13970">
+          <a:ln w="9525">
             <a:solidFill>
-              <a:srgbClr val="5CD4E1">
-                <a:alpha val="80000"/>
-              </a:srgbClr>
+              <a:srgbClr val="1F2A36"/>
             </a:solidFill>
-            <a:tailEnd type="triangle" w="med" len="med"/>
           </a:ln>
         </p:spPr>
         <p:style>
@@ -11086,1248 +12016,9 @@
           </a:fontRef>
         </p:style>
       </p:cxnSp>
-      <p:cxnSp>
-        <p:nvCxnSpPr>
-          <p:cNvPr id="18" name="Arrow B"/>
-          <p:cNvCxnSpPr>
-            <a:cxnSpLocks/>
-          </p:cNvCxnSpPr>
-          <p:nvPr/>
-        </p:nvCxnSpPr>
-        <p:spPr>
-          <a:xfrm flipV="1">
-            <a:off x="4229333" y="4200000"/>
-            <a:ext cx="490667" cy="900000"/>
-          </a:xfrm>
-          <a:prstGeom prst="line">
-            <a:avLst/>
-          </a:prstGeom>
-          <a:ln w="13970">
-            <a:solidFill>
-              <a:srgbClr val="5CD4E1">
-                <a:alpha val="80000"/>
-              </a:srgbClr>
-            </a:solidFill>
-            <a:tailEnd type="triangle" w="med" len="med"/>
-          </a:ln>
-        </p:spPr>
-        <p:style>
-          <a:lnRef idx="2">
-            <a:schemeClr val="accent1"/>
-          </a:lnRef>
-          <a:fillRef idx="0">
-            <a:schemeClr val="accent1"/>
-          </a:fillRef>
-          <a:effectRef idx="1">
-            <a:schemeClr val="accent1"/>
-          </a:effectRef>
-          <a:fontRef idx="minor">
-            <a:schemeClr val="tx1"/>
-          </a:fontRef>
-        </p:style>
-      </p:cxnSp>
-      <p:sp>
-        <p:nvSpPr>
-          <p:cNvPr id="19" name="Scrith Panel"/>
-          <p:cNvSpPr/>
-          <p:nvPr/>
-        </p:nvSpPr>
-        <p:spPr>
-          <a:xfrm>
-            <a:off x="4800000" y="1900000"/>
-            <a:ext cx="6660449" cy="4000000"/>
-          </a:xfrm>
-          <a:prstGeom prst="roundRect">
-            <a:avLst>
-              <a:gd name="adj" fmla="val 3816"/>
-            </a:avLst>
-          </a:prstGeom>
-          <a:solidFill>
-            <a:srgbClr val="0B1118"/>
-          </a:solidFill>
-          <a:ln w="9525">
-            <a:solidFill>
-              <a:srgbClr val="5CD4E1"/>
-            </a:solidFill>
-          </a:ln>
-          <a:effectLst/>
-        </p:spPr>
-        <p:style>
-          <a:lnRef idx="1">
-            <a:schemeClr val="accent1"/>
-          </a:lnRef>
-          <a:fillRef idx="3">
-            <a:schemeClr val="accent1"/>
-          </a:fillRef>
-          <a:effectRef idx="2">
-            <a:schemeClr val="accent1"/>
-          </a:effectRef>
-          <a:fontRef idx="minor">
-            <a:schemeClr val="lt1"/>
-          </a:fontRef>
-        </p:style>
-        <p:txBody>
-          <a:bodyPr rtlCol="0" anchor="ctr"/>
-          <a:lstStyle/>
-          <a:p>
-            <a:pPr algn="ctr"/>
-            <a:endParaRPr lang="en-US"/>
-          </a:p>
-        </p:txBody>
-      </p:sp>
-      <p:cxnSp>
-        <p:nvCxnSpPr>
-          <p:cNvPr id="20" name="Corner"/>
-          <p:cNvCxnSpPr>
-            <a:cxnSpLocks/>
-          </p:cNvCxnSpPr>
-          <p:nvPr/>
-        </p:nvCxnSpPr>
-        <p:spPr>
-          <a:xfrm>
-            <a:off x="4800000" y="1900000"/>
-            <a:ext cx="164592" cy="0"/>
-          </a:xfrm>
-          <a:prstGeom prst="line">
-            <a:avLst/>
-          </a:prstGeom>
-          <a:ln w="12700">
-            <a:solidFill>
-              <a:srgbClr val="5CD4E1">
-                <a:alpha val="55000"/>
-              </a:srgbClr>
-            </a:solidFill>
-          </a:ln>
-        </p:spPr>
-        <p:style>
-          <a:lnRef idx="2">
-            <a:schemeClr val="accent1"/>
-          </a:lnRef>
-          <a:fillRef idx="0">
-            <a:schemeClr val="accent1"/>
-          </a:fillRef>
-          <a:effectRef idx="1">
-            <a:schemeClr val="accent1"/>
-          </a:effectRef>
-          <a:fontRef idx="minor">
-            <a:schemeClr val="tx1"/>
-          </a:fontRef>
-        </p:style>
-      </p:cxnSp>
-      <p:cxnSp>
-        <p:nvCxnSpPr>
-          <p:cNvPr id="21" name="Corner"/>
-          <p:cNvCxnSpPr>
-            <a:cxnSpLocks/>
-          </p:cNvCxnSpPr>
-          <p:nvPr/>
-        </p:nvCxnSpPr>
-        <p:spPr>
-          <a:xfrm>
-            <a:off x="4800000" y="1900000"/>
-            <a:ext cx="0" cy="164592"/>
-          </a:xfrm>
-          <a:prstGeom prst="line">
-            <a:avLst/>
-          </a:prstGeom>
-          <a:ln w="12700">
-            <a:solidFill>
-              <a:srgbClr val="5CD4E1">
-                <a:alpha val="55000"/>
-              </a:srgbClr>
-            </a:solidFill>
-          </a:ln>
-        </p:spPr>
-        <p:style>
-          <a:lnRef idx="2">
-            <a:schemeClr val="accent1"/>
-          </a:lnRef>
-          <a:fillRef idx="0">
-            <a:schemeClr val="accent1"/>
-          </a:fillRef>
-          <a:effectRef idx="1">
-            <a:schemeClr val="accent1"/>
-          </a:effectRef>
-          <a:fontRef idx="minor">
-            <a:schemeClr val="tx1"/>
-          </a:fontRef>
-        </p:style>
-      </p:cxnSp>
-      <p:cxnSp>
-        <p:nvCxnSpPr>
-          <p:cNvPr id="22" name="Corner"/>
-          <p:cNvCxnSpPr>
-            <a:cxnSpLocks/>
-          </p:cNvCxnSpPr>
-          <p:nvPr/>
-        </p:nvCxnSpPr>
-        <p:spPr>
-          <a:xfrm flipH="1">
-            <a:off x="11295857" y="1900000"/>
-            <a:ext cx="164592" cy="0"/>
-          </a:xfrm>
-          <a:prstGeom prst="line">
-            <a:avLst/>
-          </a:prstGeom>
-          <a:ln w="12700">
-            <a:solidFill>
-              <a:srgbClr val="5CD4E1">
-                <a:alpha val="55000"/>
-              </a:srgbClr>
-            </a:solidFill>
-          </a:ln>
-        </p:spPr>
-        <p:style>
-          <a:lnRef idx="2">
-            <a:schemeClr val="accent1"/>
-          </a:lnRef>
-          <a:fillRef idx="0">
-            <a:schemeClr val="accent1"/>
-          </a:fillRef>
-          <a:effectRef idx="1">
-            <a:schemeClr val="accent1"/>
-          </a:effectRef>
-          <a:fontRef idx="minor">
-            <a:schemeClr val="tx1"/>
-          </a:fontRef>
-        </p:style>
-      </p:cxnSp>
-      <p:cxnSp>
-        <p:nvCxnSpPr>
-          <p:cNvPr id="23" name="Corner"/>
-          <p:cNvCxnSpPr>
-            <a:cxnSpLocks/>
-          </p:cNvCxnSpPr>
-          <p:nvPr/>
-        </p:nvCxnSpPr>
-        <p:spPr>
-          <a:xfrm>
-            <a:off x="11460449" y="1900000"/>
-            <a:ext cx="0" cy="164592"/>
-          </a:xfrm>
-          <a:prstGeom prst="line">
-            <a:avLst/>
-          </a:prstGeom>
-          <a:ln w="12700">
-            <a:solidFill>
-              <a:srgbClr val="5CD4E1">
-                <a:alpha val="55000"/>
-              </a:srgbClr>
-            </a:solidFill>
-          </a:ln>
-        </p:spPr>
-        <p:style>
-          <a:lnRef idx="2">
-            <a:schemeClr val="accent1"/>
-          </a:lnRef>
-          <a:fillRef idx="0">
-            <a:schemeClr val="accent1"/>
-          </a:fillRef>
-          <a:effectRef idx="1">
-            <a:schemeClr val="accent1"/>
-          </a:effectRef>
-          <a:fontRef idx="minor">
-            <a:schemeClr val="tx1"/>
-          </a:fontRef>
-        </p:style>
-      </p:cxnSp>
-      <p:cxnSp>
-        <p:nvCxnSpPr>
-          <p:cNvPr id="24" name="Corner"/>
-          <p:cNvCxnSpPr>
-            <a:cxnSpLocks/>
-          </p:cNvCxnSpPr>
-          <p:nvPr/>
-        </p:nvCxnSpPr>
-        <p:spPr>
-          <a:xfrm>
-            <a:off x="4800000" y="5900000"/>
-            <a:ext cx="164592" cy="0"/>
-          </a:xfrm>
-          <a:prstGeom prst="line">
-            <a:avLst/>
-          </a:prstGeom>
-          <a:ln w="12700">
-            <a:solidFill>
-              <a:srgbClr val="5CD4E1">
-                <a:alpha val="55000"/>
-              </a:srgbClr>
-            </a:solidFill>
-          </a:ln>
-        </p:spPr>
-        <p:style>
-          <a:lnRef idx="2">
-            <a:schemeClr val="accent1"/>
-          </a:lnRef>
-          <a:fillRef idx="0">
-            <a:schemeClr val="accent1"/>
-          </a:fillRef>
-          <a:effectRef idx="1">
-            <a:schemeClr val="accent1"/>
-          </a:effectRef>
-          <a:fontRef idx="minor">
-            <a:schemeClr val="tx1"/>
-          </a:fontRef>
-        </p:style>
-      </p:cxnSp>
-      <p:cxnSp>
-        <p:nvCxnSpPr>
-          <p:cNvPr id="25" name="Corner"/>
-          <p:cNvCxnSpPr>
-            <a:cxnSpLocks/>
-          </p:cNvCxnSpPr>
-          <p:nvPr/>
-        </p:nvCxnSpPr>
-        <p:spPr>
-          <a:xfrm flipV="1">
-            <a:off x="4800000" y="5735408"/>
-            <a:ext cx="0" cy="164592"/>
-          </a:xfrm>
-          <a:prstGeom prst="line">
-            <a:avLst/>
-          </a:prstGeom>
-          <a:ln w="12700">
-            <a:solidFill>
-              <a:srgbClr val="5CD4E1">
-                <a:alpha val="55000"/>
-              </a:srgbClr>
-            </a:solidFill>
-          </a:ln>
-        </p:spPr>
-        <p:style>
-          <a:lnRef idx="2">
-            <a:schemeClr val="accent1"/>
-          </a:lnRef>
-          <a:fillRef idx="0">
-            <a:schemeClr val="accent1"/>
-          </a:fillRef>
-          <a:effectRef idx="1">
-            <a:schemeClr val="accent1"/>
-          </a:effectRef>
-          <a:fontRef idx="minor">
-            <a:schemeClr val="tx1"/>
-          </a:fontRef>
-        </p:style>
-      </p:cxnSp>
-      <p:cxnSp>
-        <p:nvCxnSpPr>
-          <p:cNvPr id="26" name="Corner"/>
-          <p:cNvCxnSpPr>
-            <a:cxnSpLocks/>
-          </p:cNvCxnSpPr>
-          <p:nvPr/>
-        </p:nvCxnSpPr>
-        <p:spPr>
-          <a:xfrm flipH="1">
-            <a:off x="11295857" y="5900000"/>
-            <a:ext cx="164592" cy="0"/>
-          </a:xfrm>
-          <a:prstGeom prst="line">
-            <a:avLst/>
-          </a:prstGeom>
-          <a:ln w="12700">
-            <a:solidFill>
-              <a:srgbClr val="5CD4E1">
-                <a:alpha val="55000"/>
-              </a:srgbClr>
-            </a:solidFill>
-          </a:ln>
-        </p:spPr>
-        <p:style>
-          <a:lnRef idx="2">
-            <a:schemeClr val="accent1"/>
-          </a:lnRef>
-          <a:fillRef idx="0">
-            <a:schemeClr val="accent1"/>
-          </a:fillRef>
-          <a:effectRef idx="1">
-            <a:schemeClr val="accent1"/>
-          </a:effectRef>
-          <a:fontRef idx="minor">
-            <a:schemeClr val="tx1"/>
-          </a:fontRef>
-        </p:style>
-      </p:cxnSp>
-      <p:cxnSp>
-        <p:nvCxnSpPr>
-          <p:cNvPr id="27" name="Corner"/>
-          <p:cNvCxnSpPr>
-            <a:cxnSpLocks/>
-          </p:cNvCxnSpPr>
-          <p:nvPr/>
-        </p:nvCxnSpPr>
-        <p:spPr>
-          <a:xfrm flipV="1">
-            <a:off x="11460449" y="5735408"/>
-            <a:ext cx="0" cy="164592"/>
-          </a:xfrm>
-          <a:prstGeom prst="line">
-            <a:avLst/>
-          </a:prstGeom>
-          <a:ln w="12700">
-            <a:solidFill>
-              <a:srgbClr val="5CD4E1">
-                <a:alpha val="55000"/>
-              </a:srgbClr>
-            </a:solidFill>
-          </a:ln>
-        </p:spPr>
-        <p:style>
-          <a:lnRef idx="2">
-            <a:schemeClr val="accent1"/>
-          </a:lnRef>
-          <a:fillRef idx="0">
-            <a:schemeClr val="accent1"/>
-          </a:fillRef>
-          <a:effectRef idx="1">
-            <a:schemeClr val="accent1"/>
-          </a:effectRef>
-          <a:fontRef idx="minor">
-            <a:schemeClr val="tx1"/>
-          </a:fontRef>
-        </p:style>
-      </p:cxnSp>
-      <p:pic>
-        <p:nvPicPr>
-          <p:cNvPr id="28" name="Scrith Wordmark" descr="SCRITH wordmark"/>
-          <p:cNvPicPr>
-            <a:picLocks noChangeAspect="1"/>
-          </p:cNvPicPr>
-          <p:nvPr/>
-        </p:nvPicPr>
-        <p:blipFill>
-          <a:blip r:embed="rId2"/>
-          <a:stretch>
-            <a:fillRect/>
-          </a:stretch>
-        </p:blipFill>
-        <p:spPr>
-          <a:xfrm>
-            <a:off x="5056032" y="2100000"/>
-            <a:ext cx="1235275" cy="400000"/>
-          </a:xfrm>
-          <a:prstGeom prst="rect">
-            <a:avLst/>
-          </a:prstGeom>
-        </p:spPr>
-      </p:pic>
-      <p:sp>
-        <p:nvSpPr>
-          <p:cNvPr id="29" name="Scrith Eyebrow"/>
-          <p:cNvSpPr txBox="1"/>
-          <p:nvPr/>
-        </p:nvSpPr>
-        <p:spPr>
-          <a:xfrm>
-            <a:off x="5056032" y="2560000"/>
-            <a:ext cx="6148385" cy="153225"/>
-          </a:xfrm>
-          <a:prstGeom prst="rect">
-            <a:avLst/>
-          </a:prstGeom>
-          <a:noFill/>
-        </p:spPr>
-        <p:txBody>
-          <a:bodyPr wrap="none" lIns="0" tIns="0" rIns="0" bIns="0" anchor="t">
-            <a:noAutofit/>
-          </a:bodyPr>
-          <a:lstStyle/>
-          <a:p>
-            <a:pPr algn="l">
-              <a:lnSpc>
-                <a:spcPts val="1062"/>
-              </a:lnSpc>
-              <a:spcBef>
-                <a:spcPts val="0"/>
-              </a:spcBef>
-              <a:spcAft>
-                <a:spcPts val="0"/>
-              </a:spcAft>
-            </a:pPr>
-            <a:r>
-              <a:rPr lang="en-US" sz="850" spc="68" dirty="0">
-                <a:solidFill>
-                  <a:srgbClr val="5CD4E1"/>
-                </a:solidFill>
-                <a:latin typeface="JetBrains Mono Medium"/>
-              </a:rPr>
-              <a:t>DYNAMIC CONTEXT + ONTOLOGY FOR DYNAMIC CAUSAL REASONING · VISION STAGE · SCRITH.AI</a:t>
-            </a:r>
-          </a:p>
-        </p:txBody>
-      </p:sp>
-      <p:sp>
-        <p:nvSpPr>
-          <p:cNvPr id="30" name="Scrith Thesis"/>
-          <p:cNvSpPr txBox="1"/>
-          <p:nvPr/>
-        </p:nvSpPr>
-        <p:spPr>
-          <a:xfrm>
-            <a:off x="5056032" y="2760000"/>
-            <a:ext cx="6148385" cy="800000"/>
-          </a:xfrm>
-          <a:prstGeom prst="rect">
-            <a:avLst/>
-          </a:prstGeom>
-          <a:noFill/>
-        </p:spPr>
-        <p:txBody>
-          <a:bodyPr wrap="square" lIns="0" tIns="0" rIns="0" bIns="0" anchor="t">
-            <a:noAutofit/>
-          </a:bodyPr>
-          <a:lstStyle/>
-          <a:p>
-            <a:pPr algn="l">
-              <a:lnSpc>
-                <a:spcPts val="2016"/>
-              </a:lnSpc>
-              <a:spcBef>
-                <a:spcPts val="0"/>
-              </a:spcBef>
-              <a:spcAft>
-                <a:spcPts val="0"/>
-              </a:spcAft>
-            </a:pPr>
-            <a:r>
-              <a:rPr lang="en-US" sz="1400" dirty="0">
-                <a:solidFill>
-                  <a:srgbClr val="E6EDF3"/>
-                </a:solidFill>
-                <a:latin typeface="Geist"/>
-              </a:rPr>
-              <a:t>A causal operations layer: a live model of the objects in an environment, how they relate, and how cause moves between them, that people and AI query and then write governed action back through.</a:t>
-            </a:r>
-          </a:p>
-        </p:txBody>
-      </p:sp>
-      <p:cxnSp>
-        <p:nvCxnSpPr>
-          <p:cNvPr id="31" name="Panel Rule"/>
-          <p:cNvCxnSpPr>
-            <a:cxnSpLocks/>
-          </p:cNvCxnSpPr>
-          <p:nvPr/>
-        </p:nvCxnSpPr>
-        <p:spPr>
-          <a:xfrm>
-            <a:off x="5056032" y="3620000"/>
-            <a:ext cx="6148385" cy="0"/>
-          </a:xfrm>
-          <a:prstGeom prst="line">
-            <a:avLst/>
-          </a:prstGeom>
-          <a:ln w="9525">
-            <a:solidFill>
-              <a:srgbClr val="2A3A4A"/>
-            </a:solidFill>
-          </a:ln>
-        </p:spPr>
-        <p:style>
-          <a:lnRef idx="2">
-            <a:schemeClr val="accent1"/>
-          </a:lnRef>
-          <a:fillRef idx="0">
-            <a:schemeClr val="accent1"/>
-          </a:fillRef>
-          <a:effectRef idx="1">
-            <a:schemeClr val="accent1"/>
-          </a:effectRef>
-          <a:fontRef idx="minor">
-            <a:schemeClr val="tx1"/>
-          </a:fontRef>
-        </p:style>
-      </p:cxnSp>
-      <p:sp>
-        <p:nvSpPr>
-          <p:cNvPr id="32" name="Pillar 1 Eyebrow"/>
-          <p:cNvSpPr txBox="1"/>
-          <p:nvPr/>
-        </p:nvSpPr>
-        <p:spPr>
-          <a:xfrm>
-            <a:off x="5056032" y="3740000"/>
-            <a:ext cx="1940000" cy="153225"/>
-          </a:xfrm>
-          <a:prstGeom prst="rect">
-            <a:avLst/>
-          </a:prstGeom>
-          <a:noFill/>
-        </p:spPr>
-        <p:txBody>
-          <a:bodyPr wrap="none" lIns="0" tIns="0" rIns="0" bIns="0" anchor="t">
-            <a:noAutofit/>
-          </a:bodyPr>
-          <a:lstStyle/>
-          <a:p>
-            <a:pPr algn="l">
-              <a:lnSpc>
-                <a:spcPts val="1062"/>
-              </a:lnSpc>
-              <a:spcBef>
-                <a:spcPts val="0"/>
-              </a:spcBef>
-              <a:spcAft>
-                <a:spcPts val="0"/>
-              </a:spcAft>
-            </a:pPr>
-            <a:r>
-              <a:rPr lang="en-US" sz="850" spc="68" dirty="0">
-                <a:solidFill>
-                  <a:srgbClr val="6B7682"/>
-                </a:solidFill>
-                <a:latin typeface="JetBrains Mono"/>
-              </a:rPr>
-              <a:t>01</a:t>
-            </a:r>
-            <a:r>
-              <a:rPr lang="en-US" sz="850" spc="68" dirty="0">
-                <a:solidFill>
-                  <a:srgbClr val="5CD4E1"/>
-                </a:solidFill>
-                <a:latin typeface="JetBrains Mono Medium"/>
-              </a:rPr>
-              <a:t>  EXPLAIN</a:t>
-            </a:r>
-          </a:p>
-        </p:txBody>
-      </p:sp>
-      <p:sp>
-        <p:nvSpPr>
-          <p:cNvPr id="33" name="Pillar 1 Heading"/>
-          <p:cNvSpPr txBox="1"/>
-          <p:nvPr/>
-        </p:nvSpPr>
-        <p:spPr>
-          <a:xfrm>
-            <a:off x="5056032" y="3970000"/>
-            <a:ext cx="1940000" cy="460000"/>
-          </a:xfrm>
-          <a:prstGeom prst="rect">
-            <a:avLst/>
-          </a:prstGeom>
-          <a:noFill/>
-        </p:spPr>
-        <p:txBody>
-          <a:bodyPr wrap="square" lIns="0" tIns="0" rIns="0" bIns="0" anchor="t">
-            <a:noAutofit/>
-          </a:bodyPr>
-          <a:lstStyle/>
-          <a:p>
-            <a:pPr algn="l">
-              <a:lnSpc>
-                <a:spcPts val="1500"/>
-              </a:lnSpc>
-              <a:spcBef>
-                <a:spcPts val="0"/>
-              </a:spcBef>
-              <a:spcAft>
-                <a:spcPts val="0"/>
-              </a:spcAft>
-            </a:pPr>
-            <a:r>
-              <a:rPr lang="en-US" sz="1250" spc="-17" dirty="0">
-                <a:solidFill>
-                  <a:srgbClr val="E6EDF3"/>
-                </a:solidFill>
-                <a:latin typeface="Geist Medium"/>
-              </a:rPr>
-              <a:t>Answer why</a:t>
-            </a:r>
-          </a:p>
-        </p:txBody>
-      </p:sp>
-      <p:sp>
-        <p:nvSpPr>
-          <p:cNvPr id="34" name="Pillar 1 Body"/>
-          <p:cNvSpPr txBox="1"/>
-          <p:nvPr/>
-        </p:nvSpPr>
-        <p:spPr>
-          <a:xfrm>
-            <a:off x="5056032" y="4290000"/>
-            <a:ext cx="1940000" cy="820000"/>
-          </a:xfrm>
-          <a:prstGeom prst="rect">
-            <a:avLst/>
-          </a:prstGeom>
-          <a:noFill/>
-        </p:spPr>
-        <p:txBody>
-          <a:bodyPr wrap="square" lIns="0" tIns="0" rIns="0" bIns="0" anchor="t">
-            <a:noAutofit/>
-          </a:bodyPr>
-          <a:lstStyle/>
-          <a:p>
-            <a:pPr algn="l">
-              <a:lnSpc>
-                <a:spcPts val="1584"/>
-              </a:lnSpc>
-              <a:spcBef>
-                <a:spcPts val="0"/>
-              </a:spcBef>
-              <a:spcAft>
-                <a:spcPts val="0"/>
-              </a:spcAft>
-            </a:pPr>
-            <a:r>
-              <a:rPr lang="en-US" sz="1100" dirty="0">
-                <a:solidFill>
-                  <a:srgbClr val="AAB3BD"/>
-                </a:solidFill>
-                <a:latin typeface="Geist"/>
-              </a:rPr>
-              <a:t>The model carries cause: it explains an incident when it happens.</a:t>
-            </a:r>
-          </a:p>
-        </p:txBody>
-      </p:sp>
-      <p:sp>
-        <p:nvSpPr>
-          <p:cNvPr id="35" name="Pillar 2 Eyebrow"/>
-          <p:cNvSpPr txBox="1"/>
-          <p:nvPr/>
-        </p:nvSpPr>
-        <p:spPr>
-          <a:xfrm>
-            <a:off x="7160224" y="3740000"/>
-            <a:ext cx="1940000" cy="153225"/>
-          </a:xfrm>
-          <a:prstGeom prst="rect">
-            <a:avLst/>
-          </a:prstGeom>
-          <a:noFill/>
-        </p:spPr>
-        <p:txBody>
-          <a:bodyPr wrap="none" lIns="0" tIns="0" rIns="0" bIns="0" anchor="t">
-            <a:noAutofit/>
-          </a:bodyPr>
-          <a:lstStyle/>
-          <a:p>
-            <a:pPr algn="l">
-              <a:lnSpc>
-                <a:spcPts val="1062"/>
-              </a:lnSpc>
-              <a:spcBef>
-                <a:spcPts val="0"/>
-              </a:spcBef>
-              <a:spcAft>
-                <a:spcPts val="0"/>
-              </a:spcAft>
-            </a:pPr>
-            <a:r>
-              <a:rPr lang="en-US" sz="850" spc="68" dirty="0">
-                <a:solidFill>
-                  <a:srgbClr val="6B7682"/>
-                </a:solidFill>
-                <a:latin typeface="JetBrains Mono"/>
-              </a:rPr>
-              <a:t>02</a:t>
-            </a:r>
-            <a:r>
-              <a:rPr lang="en-US" sz="850" spc="68" dirty="0">
-                <a:solidFill>
-                  <a:srgbClr val="5CD4E1"/>
-                </a:solidFill>
-                <a:latin typeface="JetBrains Mono Medium"/>
-              </a:rPr>
-              <a:t>  SIMULATE</a:t>
-            </a:r>
-          </a:p>
-        </p:txBody>
-      </p:sp>
-      <p:sp>
-        <p:nvSpPr>
-          <p:cNvPr id="36" name="Pillar 2 Heading"/>
-          <p:cNvSpPr txBox="1"/>
-          <p:nvPr/>
-        </p:nvSpPr>
-        <p:spPr>
-          <a:xfrm>
-            <a:off x="7160224" y="3970000"/>
-            <a:ext cx="1940000" cy="460000"/>
-          </a:xfrm>
-          <a:prstGeom prst="rect">
-            <a:avLst/>
-          </a:prstGeom>
-          <a:noFill/>
-        </p:spPr>
-        <p:txBody>
-          <a:bodyPr wrap="square" lIns="0" tIns="0" rIns="0" bIns="0" anchor="t">
-            <a:noAutofit/>
-          </a:bodyPr>
-          <a:lstStyle/>
-          <a:p>
-            <a:pPr algn="l">
-              <a:lnSpc>
-                <a:spcPts val="1500"/>
-              </a:lnSpc>
-              <a:spcBef>
-                <a:spcPts val="0"/>
-              </a:spcBef>
-              <a:spcAft>
-                <a:spcPts val="0"/>
-              </a:spcAft>
-            </a:pPr>
-            <a:r>
-              <a:rPr lang="en-US" sz="1250" spc="-17" dirty="0">
-                <a:solidFill>
-                  <a:srgbClr val="E6EDF3"/>
-                </a:solidFill>
-                <a:latin typeface="Geist Medium"/>
-              </a:rPr>
-              <a:t>Simulate reality</a:t>
-            </a:r>
-          </a:p>
-        </p:txBody>
-      </p:sp>
-      <p:sp>
-        <p:nvSpPr>
-          <p:cNvPr id="37" name="Pillar 2 Body"/>
-          <p:cNvSpPr txBox="1"/>
-          <p:nvPr/>
-        </p:nvSpPr>
-        <p:spPr>
-          <a:xfrm>
-            <a:off x="7160224" y="4290000"/>
-            <a:ext cx="1940000" cy="820000"/>
-          </a:xfrm>
-          <a:prstGeom prst="rect">
-            <a:avLst/>
-          </a:prstGeom>
-          <a:noFill/>
-        </p:spPr>
-        <p:txBody>
-          <a:bodyPr wrap="square" lIns="0" tIns="0" rIns="0" bIns="0" anchor="t">
-            <a:noAutofit/>
-          </a:bodyPr>
-          <a:lstStyle/>
-          <a:p>
-            <a:pPr algn="l">
-              <a:lnSpc>
-                <a:spcPts val="1584"/>
-              </a:lnSpc>
-              <a:spcBef>
-                <a:spcPts val="0"/>
-              </a:spcBef>
-              <a:spcAft>
-                <a:spcPts val="0"/>
-              </a:spcAft>
-            </a:pPr>
-            <a:r>
-              <a:rPr lang="en-US" sz="1100" dirty="0">
-                <a:solidFill>
-                  <a:srgbClr val="AAB3BD"/>
-                </a:solidFill>
-                <a:latin typeface="Geist"/>
-              </a:rPr>
-              <a:t>Simulate counterfactual dynamics to inform targeted intervention.</a:t>
-            </a:r>
-          </a:p>
-        </p:txBody>
-      </p:sp>
-      <p:sp>
-        <p:nvSpPr>
-          <p:cNvPr id="38" name="Pillar 3 Eyebrow"/>
-          <p:cNvSpPr txBox="1"/>
-          <p:nvPr/>
-        </p:nvSpPr>
-        <p:spPr>
-          <a:xfrm>
-            <a:off x="9264416" y="3740000"/>
-            <a:ext cx="1940000" cy="153225"/>
-          </a:xfrm>
-          <a:prstGeom prst="rect">
-            <a:avLst/>
-          </a:prstGeom>
-          <a:noFill/>
-        </p:spPr>
-        <p:txBody>
-          <a:bodyPr wrap="none" lIns="0" tIns="0" rIns="0" bIns="0" anchor="t">
-            <a:noAutofit/>
-          </a:bodyPr>
-          <a:lstStyle/>
-          <a:p>
-            <a:pPr algn="l">
-              <a:lnSpc>
-                <a:spcPts val="1062"/>
-              </a:lnSpc>
-              <a:spcBef>
-                <a:spcPts val="0"/>
-              </a:spcBef>
-              <a:spcAft>
-                <a:spcPts val="0"/>
-              </a:spcAft>
-            </a:pPr>
-            <a:r>
-              <a:rPr lang="en-US" sz="850" spc="68" dirty="0">
-                <a:solidFill>
-                  <a:srgbClr val="6B7682"/>
-                </a:solidFill>
-                <a:latin typeface="JetBrains Mono"/>
-              </a:rPr>
-              <a:t>03</a:t>
-            </a:r>
-            <a:r>
-              <a:rPr lang="en-US" sz="850" spc="68" dirty="0">
-                <a:solidFill>
-                  <a:srgbClr val="5CD4E1"/>
-                </a:solidFill>
-                <a:latin typeface="JetBrains Mono Medium"/>
-              </a:rPr>
-              <a:t>  GOVERN</a:t>
-            </a:r>
-          </a:p>
-        </p:txBody>
-      </p:sp>
-      <p:sp>
-        <p:nvSpPr>
-          <p:cNvPr id="39" name="Pillar 3 Heading"/>
-          <p:cNvSpPr txBox="1"/>
-          <p:nvPr/>
-        </p:nvSpPr>
-        <p:spPr>
-          <a:xfrm>
-            <a:off x="9264416" y="3970000"/>
-            <a:ext cx="1940000" cy="460000"/>
-          </a:xfrm>
-          <a:prstGeom prst="rect">
-            <a:avLst/>
-          </a:prstGeom>
-          <a:noFill/>
-        </p:spPr>
-        <p:txBody>
-          <a:bodyPr wrap="square" lIns="0" tIns="0" rIns="0" bIns="0" anchor="t">
-            <a:noAutofit/>
-          </a:bodyPr>
-          <a:lstStyle/>
-          <a:p>
-            <a:pPr algn="l">
-              <a:lnSpc>
-                <a:spcPts val="1500"/>
-              </a:lnSpc>
-              <a:spcBef>
-                <a:spcPts val="0"/>
-              </a:spcBef>
-              <a:spcAft>
-                <a:spcPts val="0"/>
-              </a:spcAft>
-            </a:pPr>
-            <a:r>
-              <a:rPr lang="en-US" sz="1250" spc="-17" dirty="0">
-                <a:solidFill>
-                  <a:srgbClr val="E6EDF3"/>
-                </a:solidFill>
-                <a:latin typeface="Geist Medium"/>
-              </a:rPr>
-              <a:t>Act safely</a:t>
-            </a:r>
-          </a:p>
-        </p:txBody>
-      </p:sp>
-      <p:sp>
-        <p:nvSpPr>
-          <p:cNvPr id="40" name="Pillar 3 Body"/>
-          <p:cNvSpPr txBox="1"/>
-          <p:nvPr/>
-        </p:nvSpPr>
-        <p:spPr>
-          <a:xfrm>
-            <a:off x="9264416" y="4290000"/>
-            <a:ext cx="1940000" cy="820000"/>
-          </a:xfrm>
-          <a:prstGeom prst="rect">
-            <a:avLst/>
-          </a:prstGeom>
-          <a:noFill/>
-        </p:spPr>
-        <p:txBody>
-          <a:bodyPr wrap="square" lIns="0" tIns="0" rIns="0" bIns="0" anchor="t">
-            <a:noAutofit/>
-          </a:bodyPr>
-          <a:lstStyle/>
-          <a:p>
-            <a:pPr algn="l">
-              <a:lnSpc>
-                <a:spcPts val="1584"/>
-              </a:lnSpc>
-              <a:spcBef>
-                <a:spcPts val="0"/>
-              </a:spcBef>
-              <a:spcAft>
-                <a:spcPts val="0"/>
-              </a:spcAft>
-            </a:pPr>
-            <a:r>
-              <a:rPr lang="en-US" sz="1100" dirty="0">
-                <a:solidFill>
-                  <a:srgbClr val="AAB3BD"/>
-                </a:solidFill>
-                <a:latin typeface="Geist"/>
-              </a:rPr>
-              <a:t>Agents are safeguarded by the Effect Ethos, which enforces operational parameters.</a:t>
-            </a:r>
-          </a:p>
-        </p:txBody>
-      </p:sp>
-      <p:cxnSp>
-        <p:nvCxnSpPr>
-          <p:cNvPr id="41" name="Row Rule"/>
-          <p:cNvCxnSpPr>
-            <a:cxnSpLocks/>
-          </p:cNvCxnSpPr>
-          <p:nvPr/>
-        </p:nvCxnSpPr>
-        <p:spPr>
-          <a:xfrm>
-            <a:off x="5056032" y="5360000"/>
-            <a:ext cx="6148385" cy="0"/>
-          </a:xfrm>
-          <a:prstGeom prst="line">
-            <a:avLst/>
-          </a:prstGeom>
-          <a:ln w="9525">
-            <a:solidFill>
-              <a:srgbClr val="2A3A4A"/>
-            </a:solidFill>
-          </a:ln>
-        </p:spPr>
-        <p:style>
-          <a:lnRef idx="2">
-            <a:schemeClr val="accent1"/>
-          </a:lnRef>
-          <a:fillRef idx="0">
-            <a:schemeClr val="accent1"/>
-          </a:fillRef>
-          <a:effectRef idx="1">
-            <a:schemeClr val="accent1"/>
-          </a:effectRef>
-          <a:fontRef idx="minor">
-            <a:schemeClr val="tx1"/>
-          </a:fontRef>
-        </p:style>
-      </p:cxnSp>
-      <p:sp>
-        <p:nvSpPr>
-          <p:cNvPr id="42" name="Joint Label"/>
-          <p:cNvSpPr txBox="1"/>
-          <p:nvPr/>
-        </p:nvSpPr>
-        <p:spPr>
-          <a:xfrm>
-            <a:off x="5056032" y="5553388"/>
-            <a:ext cx="1000000" cy="153225"/>
-          </a:xfrm>
-          <a:prstGeom prst="rect">
-            <a:avLst/>
-          </a:prstGeom>
-          <a:noFill/>
-        </p:spPr>
-        <p:txBody>
-          <a:bodyPr wrap="none" lIns="0" tIns="0" rIns="0" bIns="0" anchor="t">
-            <a:noAutofit/>
-          </a:bodyPr>
-          <a:lstStyle/>
-          <a:p>
-            <a:pPr algn="l">
-              <a:lnSpc>
-                <a:spcPts val="1062"/>
-              </a:lnSpc>
-              <a:spcBef>
-                <a:spcPts val="0"/>
-              </a:spcBef>
-              <a:spcAft>
-                <a:spcPts val="0"/>
-              </a:spcAft>
-            </a:pPr>
-            <a:r>
-              <a:rPr lang="en-US" sz="850" spc="68" dirty="0">
-                <a:solidFill>
-                  <a:srgbClr val="5CD4E1"/>
-                </a:solidFill>
-                <a:latin typeface="JetBrains Mono Medium"/>
-              </a:rPr>
-              <a:t>JOINT PROJECT</a:t>
-            </a:r>
-          </a:p>
-        </p:txBody>
-      </p:sp>
-      <p:pic>
-        <p:nvPicPr>
-          <p:cNvPr id="43" name="Causal Center Emblem" descr="The Center for Dynamic Causality"/>
-          <p:cNvPicPr>
-            <a:picLocks noChangeAspect="1"/>
-          </p:cNvPicPr>
-          <p:nvPr/>
-        </p:nvPicPr>
-        <p:blipFill>
-          <a:blip>
-            <a:extLst>
-              <a:ext uri="{96DAC541-7B7A-43D3-8B79-37D633B846F1}">
-                <asvg:svgBlip xmlns:asvg="http://schemas.microsoft.com/office/drawing/2016/SVG/main" r:embed="rId3"/>
-              </a:ext>
-            </a:extLst>
-          </a:blip>
-          <a:stretch>
-            <a:fillRect/>
-          </a:stretch>
-        </p:blipFill>
-        <p:spPr>
-          <a:xfrm>
-            <a:off x="6156032" y="5410000"/>
-            <a:ext cx="518664" cy="440000"/>
-          </a:xfrm>
-          <a:prstGeom prst="rect">
-            <a:avLst/>
-          </a:prstGeom>
-        </p:spPr>
-      </p:pic>
-      <p:sp>
-        <p:nvSpPr>
-          <p:cNvPr id="44" name="Causal Center Name"/>
-          <p:cNvSpPr txBox="1"/>
-          <p:nvPr/>
-        </p:nvSpPr>
-        <p:spPr>
-          <a:xfrm>
-            <a:off x="6794696" y="5520000"/>
-            <a:ext cx="2300000" cy="220000"/>
-          </a:xfrm>
-          <a:prstGeom prst="rect">
-            <a:avLst/>
-          </a:prstGeom>
-          <a:noFill/>
-        </p:spPr>
-        <p:txBody>
-          <a:bodyPr wrap="none" lIns="0" tIns="0" rIns="0" bIns="0" anchor="t">
-            <a:noAutofit/>
-          </a:bodyPr>
-          <a:lstStyle/>
-          <a:p>
-            <a:pPr algn="l">
-              <a:lnSpc>
-                <a:spcPts val="1584"/>
-              </a:lnSpc>
-              <a:spcBef>
-                <a:spcPts val="0"/>
-              </a:spcBef>
-              <a:spcAft>
-                <a:spcPts val="0"/>
-              </a:spcAft>
-            </a:pPr>
-            <a:r>
-              <a:rPr lang="en-US" sz="1100" dirty="0">
-                <a:solidFill>
-                  <a:srgbClr val="E6EDF3"/>
-                </a:solidFill>
-                <a:latin typeface="Geist Medium"/>
-              </a:rPr>
-              <a:t>Center for Dynamic Causality</a:t>
-            </a:r>
-          </a:p>
-        </p:txBody>
-      </p:sp>
-      <p:cxnSp>
-        <p:nvCxnSpPr>
-          <p:cNvPr id="45" name="Row Divider"/>
-          <p:cNvCxnSpPr>
-            <a:cxnSpLocks/>
-          </p:cNvCxnSpPr>
-          <p:nvPr/>
-        </p:nvCxnSpPr>
-        <p:spPr>
-          <a:xfrm>
-            <a:off x="9154696" y="5460000"/>
-            <a:ext cx="0" cy="340000"/>
-          </a:xfrm>
-          <a:prstGeom prst="line">
-            <a:avLst/>
-          </a:prstGeom>
-          <a:ln w="9525">
-            <a:solidFill>
-              <a:srgbClr val="2A3A4A"/>
-            </a:solidFill>
-          </a:ln>
-        </p:spPr>
-        <p:style>
-          <a:lnRef idx="2">
-            <a:schemeClr val="accent1"/>
-          </a:lnRef>
-          <a:fillRef idx="0">
-            <a:schemeClr val="accent1"/>
-          </a:fillRef>
-          <a:effectRef idx="1">
-            <a:schemeClr val="accent1"/>
-          </a:effectRef>
-          <a:fontRef idx="minor">
-            <a:schemeClr val="tx1"/>
-          </a:fontRef>
-        </p:style>
-      </p:cxnSp>
-      <p:pic>
-        <p:nvPicPr>
-          <p:cNvPr id="46" name="Carver Automation Logo" descr="Carver Automation"/>
-          <p:cNvPicPr>
-            <a:picLocks noChangeAspect="1"/>
-          </p:cNvPicPr>
-          <p:nvPr/>
-        </p:nvPicPr>
-        <p:blipFill>
-          <a:blip r:embed="rId4"/>
-          <a:stretch>
-            <a:fillRect/>
-          </a:stretch>
-        </p:blipFill>
-        <p:spPr>
-          <a:xfrm>
-            <a:off x="9394696" y="5530000"/>
-            <a:ext cx="1653333" cy="200000"/>
-          </a:xfrm>
-          <a:prstGeom prst="rect">
-            <a:avLst/>
-          </a:prstGeom>
-        </p:spPr>
-      </p:pic>
-      <p:cxnSp>
-        <p:nvCxnSpPr>
-          <p:cNvPr id="47" name="Rule Bottom"/>
-          <p:cNvCxnSpPr>
-            <a:cxnSpLocks/>
-          </p:cNvCxnSpPr>
-          <p:nvPr/>
-        </p:nvCxnSpPr>
-        <p:spPr>
-          <a:xfrm>
-            <a:off x="731520" y="6327648"/>
-            <a:ext cx="10728929" cy="0"/>
-          </a:xfrm>
-          <a:prstGeom prst="line">
-            <a:avLst/>
-          </a:prstGeom>
-          <a:ln w="9525">
-            <a:solidFill>
-              <a:srgbClr val="1F2A36"/>
-            </a:solidFill>
-          </a:ln>
-        </p:spPr>
-        <p:style>
-          <a:lnRef idx="2">
-            <a:schemeClr val="accent1"/>
-          </a:lnRef>
-          <a:fillRef idx="0">
-            <a:schemeClr val="accent1"/>
-          </a:fillRef>
-          <a:effectRef idx="1">
-            <a:schemeClr val="accent1"/>
-          </a:effectRef>
-          <a:fontRef idx="minor">
-            <a:schemeClr val="tx1"/>
-          </a:fontRef>
-        </p:style>
-      </p:cxnSp>
-      <p:sp>
-        <p:nvSpPr>
-          <p:cNvPr id="48" name="Footer"/>
+      <p:sp>
+        <p:nvSpPr>
+          <p:cNvPr id="41" name="TextBox 40"/>
           <p:cNvSpPr txBox="1"/>
           <p:nvPr/>
         </p:nvSpPr>
@@ -12379,1986 +12070,6 @@
 </file>
 
 <file path=ppt/slides/slide14.xml><?xml version="1.0" encoding="utf-8"?>
-<p:sld xmlns:a="http://schemas.openxmlformats.org/drawingml/2006/main" xmlns:r="http://schemas.openxmlformats.org/officeDocument/2006/relationships" xmlns:p="http://schemas.openxmlformats.org/presentationml/2006/main">
-  <p:cSld>
-    <p:bg>
-      <p:bgPr>
-        <a:solidFill>
-          <a:srgbClr val="070B10"/>
-        </a:solidFill>
-        <a:effectLst/>
-      </p:bgPr>
-    </p:bg>
-    <p:spTree>
-      <p:nvGrpSpPr>
-        <p:cNvPr id="1" name=""/>
-        <p:cNvGrpSpPr/>
-        <p:nvPr/>
-      </p:nvGrpSpPr>
-      <p:grpSpPr>
-        <a:xfrm>
-          <a:off x="0" y="0"/>
-          <a:ext cx="0" cy="0"/>
-          <a:chOff x="0" y="0"/>
-          <a:chExt cx="0" cy="0"/>
-        </a:xfrm>
-      </p:grpSpPr>
-      <p:sp>
-        <p:nvSpPr>
-          <p:cNvPr id="2" name="TextBox 1"/>
-          <p:cNvSpPr txBox="1"/>
-          <p:nvPr/>
-        </p:nvSpPr>
-        <p:spPr>
-          <a:xfrm>
-            <a:off x="731520" y="384048"/>
-            <a:ext cx="10728929" cy="192912"/>
-          </a:xfrm>
-          <a:prstGeom prst="rect">
-            <a:avLst/>
-          </a:prstGeom>
-          <a:noFill/>
-        </p:spPr>
-        <p:txBody>
-          <a:bodyPr wrap="none" lIns="0" tIns="0" rIns="0" bIns="0" anchor="t">
-            <a:noAutofit/>
-          </a:bodyPr>
-          <a:lstStyle/>
-          <a:p>
-            <a:pPr algn="l">
-              <a:lnSpc>
-                <a:spcPts val="1375"/>
-              </a:lnSpc>
-              <a:spcBef>
-                <a:spcPts val="0"/>
-              </a:spcBef>
-              <a:spcAft>
-                <a:spcPts val="0"/>
-              </a:spcAft>
-            </a:pPr>
-            <a:r>
-              <a:rPr lang="en-US" sz="1100" spc="88">
-                <a:solidFill>
-                  <a:srgbClr val="5CD4E1"/>
-                </a:solidFill>
-                <a:latin typeface="JetBrains Mono Medium"/>
-              </a:rPr>
-              <a:t>PROJECT HEALTH</a:t>
-            </a:r>
-          </a:p>
-        </p:txBody>
-      </p:sp>
-      <p:sp>
-        <p:nvSpPr>
-          <p:cNvPr id="3" name="TextBox 2"/>
-          <p:cNvSpPr txBox="1"/>
-          <p:nvPr/>
-        </p:nvSpPr>
-        <p:spPr>
-          <a:xfrm>
-            <a:off x="731520" y="621792"/>
-            <a:ext cx="10728929" cy="448818"/>
-          </a:xfrm>
-          <a:prstGeom prst="rect">
-            <a:avLst/>
-          </a:prstGeom>
-          <a:noFill/>
-        </p:spPr>
-        <p:txBody>
-          <a:bodyPr wrap="none" lIns="0" tIns="0" rIns="0" bIns="0" anchor="t">
-            <a:noAutofit/>
-          </a:bodyPr>
-          <a:lstStyle/>
-          <a:p>
-            <a:pPr algn="l">
-              <a:lnSpc>
-                <a:spcPts val="3390"/>
-              </a:lnSpc>
-              <a:spcBef>
-                <a:spcPts val="0"/>
-              </a:spcBef>
-              <a:spcAft>
-                <a:spcPts val="0"/>
-              </a:spcAft>
-            </a:pPr>
-            <a:r>
-              <a:rPr lang="en-US" sz="3000" spc="-36">
-                <a:solidFill>
-                  <a:srgbClr val="E6EDF3"/>
-                </a:solidFill>
-                <a:latin typeface="Geist Medium"/>
-              </a:rPr>
-              <a:t>Where the project stands in 2026</a:t>
-            </a:r>
-          </a:p>
-        </p:txBody>
-      </p:sp>
-      <p:sp>
-        <p:nvSpPr>
-          <p:cNvPr id="4" name="TextBox 3"/>
-          <p:cNvSpPr txBox="1"/>
-          <p:nvPr/>
-        </p:nvSpPr>
-        <p:spPr>
-          <a:xfrm>
-            <a:off x="731520" y="1171194"/>
-            <a:ext cx="9441457" cy="274320"/>
-          </a:xfrm>
-          <a:prstGeom prst="rect">
-            <a:avLst/>
-          </a:prstGeom>
-          <a:noFill/>
-        </p:spPr>
-        <p:txBody>
-          <a:bodyPr wrap="none" lIns="0" tIns="0" rIns="0" bIns="0" anchor="t">
-            <a:noAutofit/>
-          </a:bodyPr>
-          <a:lstStyle/>
-          <a:p>
-            <a:pPr algn="l">
-              <a:lnSpc>
-                <a:spcPts val="2016"/>
-              </a:lnSpc>
-              <a:spcBef>
-                <a:spcPts val="0"/>
-              </a:spcBef>
-              <a:spcAft>
-                <a:spcPts val="0"/>
-              </a:spcAft>
-            </a:pPr>
-            <a:r>
-              <a:rPr lang="en-US" sz="1400" dirty="0">
-                <a:solidFill>
-                  <a:srgbClr val="AAB3BD"/>
-                </a:solidFill>
-                <a:latin typeface="Geist"/>
-              </a:rPr>
-              <a:t>In September 2023, at the </a:t>
-            </a:r>
-            <a:r>
-              <a:rPr lang="en-US" sz="1400" dirty="0">
-                <a:solidFill>
-                  <a:srgbClr val="AAB3BD"/>
-                </a:solidFill>
-                <a:latin typeface="Geist"/>
-              </a:rPr>
-              <a:t>LF </a:t>
-            </a:r>
-            <a:r>
-              <a:rPr lang="en-US" sz="1400" dirty="0">
-                <a:solidFill>
-                  <a:srgbClr val="AAB3BD"/>
-                </a:solidFill>
-                <a:latin typeface="Geist"/>
-              </a:rPr>
-              <a:t>Sandbox </a:t>
-            </a:r>
-            <a:r>
-              <a:rPr lang="en-US" sz="1400" dirty="0">
-                <a:solidFill>
-                  <a:srgbClr val="AAB3BD"/>
-                </a:solidFill>
-                <a:latin typeface="Geist"/>
-              </a:rPr>
-              <a:t>admission</a:t>
-            </a:r>
-            <a:r>
-              <a:rPr lang="en-US" sz="1400" dirty="0">
-                <a:solidFill>
-                  <a:srgbClr val="AAB3BD"/>
-                </a:solidFill>
-                <a:latin typeface="Geist"/>
-              </a:rPr>
-              <a:t>, the </a:t>
-            </a:r>
-            <a:r>
-              <a:rPr lang="en-US" sz="1400" dirty="0">
-                <a:solidFill>
-                  <a:srgbClr val="AAB3BD"/>
-                </a:solidFill>
-                <a:latin typeface="Geist"/>
-              </a:rPr>
-              <a:t>project was in its infancy</a:t>
-            </a:r>
-            <a:r>
-              <a:rPr lang="en-US" sz="1400" dirty="0">
-                <a:solidFill>
-                  <a:srgbClr val="AAB3BD"/>
-                </a:solidFill>
-                <a:latin typeface="Geist"/>
-              </a:rPr>
-              <a:t>.</a:t>
-            </a:r>
-          </a:p>
-        </p:txBody>
-      </p:sp>
-      <p:cxnSp>
-        <p:nvCxnSpPr>
-          <p:cNvPr id="5" name="Connector 4"/>
-          <p:cNvCxnSpPr/>
-          <p:nvPr/>
-        </p:nvCxnSpPr>
-        <p:spPr>
-          <a:xfrm>
-            <a:off x="731520" y="1600962"/>
-            <a:ext cx="10728929" cy="0"/>
-          </a:xfrm>
-          <a:prstGeom prst="line">
-            <a:avLst/>
-          </a:prstGeom>
-          <a:ln w="9525">
-            <a:solidFill>
-              <a:srgbClr val="1F2A36"/>
-            </a:solidFill>
-          </a:ln>
-        </p:spPr>
-        <p:style>
-          <a:lnRef idx="2">
-            <a:schemeClr val="accent1"/>
-          </a:lnRef>
-          <a:fillRef idx="0">
-            <a:schemeClr val="accent1"/>
-          </a:fillRef>
-          <a:effectRef idx="1">
-            <a:schemeClr val="accent1"/>
-          </a:effectRef>
-          <a:fontRef idx="minor">
-            <a:schemeClr val="tx1"/>
-          </a:fontRef>
-        </p:style>
-      </p:cxnSp>
-      <p:sp>
-        <p:nvSpPr>
-          <p:cNvPr id="6" name="Rounded Rectangle 5"/>
-          <p:cNvSpPr/>
-          <p:nvPr/>
-        </p:nvSpPr>
-        <p:spPr>
-          <a:xfrm>
-            <a:off x="731520" y="1875282"/>
-            <a:ext cx="3430005" cy="1233510"/>
-          </a:xfrm>
-          <a:prstGeom prst="roundRect">
-            <a:avLst>
-              <a:gd name="adj" fmla="val 6671"/>
-            </a:avLst>
-          </a:prstGeom>
-          <a:solidFill>
-            <a:srgbClr val="0B1118"/>
-          </a:solidFill>
-          <a:ln w="9525">
-            <a:solidFill>
-              <a:srgbClr val="1F2A36"/>
-            </a:solidFill>
-          </a:ln>
-          <a:effectLst/>
-        </p:spPr>
-        <p:style>
-          <a:lnRef idx="1">
-            <a:schemeClr val="accent1"/>
-          </a:lnRef>
-          <a:fillRef idx="3">
-            <a:schemeClr val="accent1"/>
-          </a:fillRef>
-          <a:effectRef idx="2">
-            <a:schemeClr val="accent1"/>
-          </a:effectRef>
-          <a:fontRef idx="minor">
-            <a:schemeClr val="lt1"/>
-          </a:fontRef>
-        </p:style>
-        <p:txBody>
-          <a:bodyPr rtlCol="0" anchor="ctr"/>
-          <a:lstStyle/>
-          <a:p>
-            <a:pPr algn="ctr"/>
-            <a:endParaRPr lang="en-US"/>
-          </a:p>
-        </p:txBody>
-      </p:sp>
-      <p:sp>
-        <p:nvSpPr>
-          <p:cNvPr id="7" name="Rectangle 6"/>
-          <p:cNvSpPr/>
-          <p:nvPr/>
-        </p:nvSpPr>
-        <p:spPr>
-          <a:xfrm>
-            <a:off x="731520" y="2092177"/>
-            <a:ext cx="34747" cy="274320"/>
-          </a:xfrm>
-          <a:prstGeom prst="rect">
-            <a:avLst/>
-          </a:prstGeom>
-          <a:solidFill>
-            <a:srgbClr val="5CD4E1"/>
-          </a:solidFill>
-          <a:ln>
-            <a:noFill/>
-          </a:ln>
-          <a:effectLst/>
-        </p:spPr>
-        <p:style>
-          <a:lnRef idx="1">
-            <a:schemeClr val="accent1"/>
-          </a:lnRef>
-          <a:fillRef idx="3">
-            <a:schemeClr val="accent1"/>
-          </a:fillRef>
-          <a:effectRef idx="2">
-            <a:schemeClr val="accent1"/>
-          </a:effectRef>
-          <a:fontRef idx="minor">
-            <a:schemeClr val="lt1"/>
-          </a:fontRef>
-        </p:style>
-        <p:txBody>
-          <a:bodyPr rtlCol="0" anchor="ctr"/>
-          <a:lstStyle/>
-          <a:p>
-            <a:pPr algn="ctr"/>
-            <a:endParaRPr lang="en-US"/>
-          </a:p>
-        </p:txBody>
-      </p:sp>
-      <p:sp>
-        <p:nvSpPr>
-          <p:cNvPr id="8" name="TextBox 7"/>
-          <p:cNvSpPr txBox="1"/>
-          <p:nvPr/>
-        </p:nvSpPr>
-        <p:spPr>
-          <a:xfrm>
-            <a:off x="987552" y="2046457"/>
-            <a:ext cx="2936229" cy="424688"/>
-          </a:xfrm>
-          <a:prstGeom prst="rect">
-            <a:avLst/>
-          </a:prstGeom>
-          <a:noFill/>
-        </p:spPr>
-        <p:txBody>
-          <a:bodyPr wrap="none" lIns="0" tIns="0" rIns="0" bIns="0" anchor="t">
-            <a:noAutofit/>
-          </a:bodyPr>
-          <a:lstStyle/>
-          <a:p>
-            <a:pPr algn="l">
-              <a:lnSpc>
-                <a:spcPts val="3200"/>
-              </a:lnSpc>
-              <a:spcBef>
-                <a:spcPts val="0"/>
-              </a:spcBef>
-              <a:spcAft>
-                <a:spcPts val="0"/>
-              </a:spcAft>
-            </a:pPr>
-            <a:r>
-              <a:rPr lang="en-US" sz="3200" spc="-38">
-                <a:solidFill>
-                  <a:srgbClr val="E6EDF3"/>
-                </a:solidFill>
-                <a:latin typeface="Geist Medium"/>
-              </a:rPr>
-              <a:t>29</a:t>
-            </a:r>
-          </a:p>
-        </p:txBody>
-      </p:sp>
-      <p:sp>
-        <p:nvSpPr>
-          <p:cNvPr id="9" name="TextBox 8"/>
-          <p:cNvSpPr txBox="1"/>
-          <p:nvPr/>
-        </p:nvSpPr>
-        <p:spPr>
-          <a:xfrm>
-            <a:off x="987552" y="2544297"/>
-            <a:ext cx="2936229" cy="175133"/>
-          </a:xfrm>
-          <a:prstGeom prst="rect">
-            <a:avLst/>
-          </a:prstGeom>
-          <a:noFill/>
-        </p:spPr>
-        <p:txBody>
-          <a:bodyPr wrap="none" lIns="0" tIns="0" rIns="0" bIns="0" anchor="t">
-            <a:noAutofit/>
-          </a:bodyPr>
-          <a:lstStyle/>
-          <a:p>
-            <a:pPr algn="l">
-              <a:lnSpc>
-                <a:spcPts val="1235"/>
-              </a:lnSpc>
-              <a:spcBef>
-                <a:spcPts val="0"/>
-              </a:spcBef>
-              <a:spcAft>
-                <a:spcPts val="0"/>
-              </a:spcAft>
-            </a:pPr>
-            <a:r>
-              <a:rPr lang="en-US" sz="950" spc="76">
-                <a:solidFill>
-                  <a:srgbClr val="5CD4E1"/>
-                </a:solidFill>
-                <a:latin typeface="JetBrains Mono Medium"/>
-              </a:rPr>
-              <a:t>CRATES</a:t>
-            </a:r>
-          </a:p>
-        </p:txBody>
-      </p:sp>
-      <p:sp>
-        <p:nvSpPr>
-          <p:cNvPr id="10" name="TextBox 9"/>
-          <p:cNvSpPr txBox="1"/>
-          <p:nvPr/>
-        </p:nvSpPr>
-        <p:spPr>
-          <a:xfrm>
-            <a:off x="987552" y="2756006"/>
-            <a:ext cx="2936229" cy="199898"/>
-          </a:xfrm>
-          <a:prstGeom prst="rect">
-            <a:avLst/>
-          </a:prstGeom>
-          <a:noFill/>
-        </p:spPr>
-        <p:txBody>
-          <a:bodyPr wrap="none" lIns="0" tIns="0" rIns="0" bIns="0" anchor="t">
-            <a:noAutofit/>
-          </a:bodyPr>
-          <a:lstStyle/>
-          <a:p>
-            <a:pPr algn="l">
-              <a:lnSpc>
-                <a:spcPts val="1430"/>
-              </a:lnSpc>
-              <a:spcBef>
-                <a:spcPts val="0"/>
-              </a:spcBef>
-              <a:spcAft>
-                <a:spcPts val="0"/>
-              </a:spcAft>
-            </a:pPr>
-            <a:r>
-              <a:rPr lang="en-US" sz="1100">
-                <a:solidFill>
-                  <a:srgbClr val="AAB3BD"/>
-                </a:solidFill>
-                <a:latin typeface="Geist"/>
-              </a:rPr>
-              <a:t>Four in 2023</a:t>
-            </a:r>
-          </a:p>
-        </p:txBody>
-      </p:sp>
-      <p:sp>
-        <p:nvSpPr>
-          <p:cNvPr id="11" name="Rounded Rectangle 10"/>
-          <p:cNvSpPr/>
-          <p:nvPr/>
-        </p:nvSpPr>
-        <p:spPr>
-          <a:xfrm>
-            <a:off x="4380981" y="1875282"/>
-            <a:ext cx="3430005" cy="1233510"/>
-          </a:xfrm>
-          <a:prstGeom prst="roundRect">
-            <a:avLst>
-              <a:gd name="adj" fmla="val 6671"/>
-            </a:avLst>
-          </a:prstGeom>
-          <a:solidFill>
-            <a:srgbClr val="0B1118"/>
-          </a:solidFill>
-          <a:ln w="9525">
-            <a:solidFill>
-              <a:srgbClr val="1F2A36"/>
-            </a:solidFill>
-          </a:ln>
-          <a:effectLst/>
-        </p:spPr>
-        <p:style>
-          <a:lnRef idx="1">
-            <a:schemeClr val="accent1"/>
-          </a:lnRef>
-          <a:fillRef idx="3">
-            <a:schemeClr val="accent1"/>
-          </a:fillRef>
-          <a:effectRef idx="2">
-            <a:schemeClr val="accent1"/>
-          </a:effectRef>
-          <a:fontRef idx="minor">
-            <a:schemeClr val="lt1"/>
-          </a:fontRef>
-        </p:style>
-        <p:txBody>
-          <a:bodyPr rtlCol="0" anchor="ctr"/>
-          <a:lstStyle/>
-          <a:p>
-            <a:pPr algn="ctr"/>
-            <a:endParaRPr lang="en-US"/>
-          </a:p>
-        </p:txBody>
-      </p:sp>
-      <p:sp>
-        <p:nvSpPr>
-          <p:cNvPr id="12" name="Rectangle 11"/>
-          <p:cNvSpPr/>
-          <p:nvPr/>
-        </p:nvSpPr>
-        <p:spPr>
-          <a:xfrm>
-            <a:off x="4380981" y="2092177"/>
-            <a:ext cx="34747" cy="274320"/>
-          </a:xfrm>
-          <a:prstGeom prst="rect">
-            <a:avLst/>
-          </a:prstGeom>
-          <a:solidFill>
-            <a:srgbClr val="5CD4E1"/>
-          </a:solidFill>
-          <a:ln>
-            <a:noFill/>
-          </a:ln>
-          <a:effectLst/>
-        </p:spPr>
-        <p:style>
-          <a:lnRef idx="1">
-            <a:schemeClr val="accent1"/>
-          </a:lnRef>
-          <a:fillRef idx="3">
-            <a:schemeClr val="accent1"/>
-          </a:fillRef>
-          <a:effectRef idx="2">
-            <a:schemeClr val="accent1"/>
-          </a:effectRef>
-          <a:fontRef idx="minor">
-            <a:schemeClr val="lt1"/>
-          </a:fontRef>
-        </p:style>
-        <p:txBody>
-          <a:bodyPr rtlCol="0" anchor="ctr"/>
-          <a:lstStyle/>
-          <a:p>
-            <a:pPr algn="ctr"/>
-            <a:endParaRPr lang="en-US"/>
-          </a:p>
-        </p:txBody>
-      </p:sp>
-      <p:sp>
-        <p:nvSpPr>
-          <p:cNvPr id="13" name="TextBox 12"/>
-          <p:cNvSpPr txBox="1"/>
-          <p:nvPr/>
-        </p:nvSpPr>
-        <p:spPr>
-          <a:xfrm>
-            <a:off x="4637013" y="2046457"/>
-            <a:ext cx="2936229" cy="424688"/>
-          </a:xfrm>
-          <a:prstGeom prst="rect">
-            <a:avLst/>
-          </a:prstGeom>
-          <a:noFill/>
-        </p:spPr>
-        <p:txBody>
-          <a:bodyPr wrap="none" lIns="0" tIns="0" rIns="0" bIns="0" anchor="t">
-            <a:noAutofit/>
-          </a:bodyPr>
-          <a:lstStyle/>
-          <a:p>
-            <a:pPr algn="l">
-              <a:lnSpc>
-                <a:spcPts val="3200"/>
-              </a:lnSpc>
-              <a:spcBef>
-                <a:spcPts val="0"/>
-              </a:spcBef>
-              <a:spcAft>
-                <a:spcPts val="0"/>
-              </a:spcAft>
-            </a:pPr>
-            <a:r>
-              <a:rPr lang="en-US" sz="3200" spc="-38">
-                <a:solidFill>
-                  <a:srgbClr val="E6EDF3"/>
-                </a:solidFill>
-                <a:latin typeface="Geist Medium"/>
-              </a:rPr>
-              <a:t>438k</a:t>
-            </a:r>
-          </a:p>
-        </p:txBody>
-      </p:sp>
-      <p:sp>
-        <p:nvSpPr>
-          <p:cNvPr id="14" name="TextBox 13"/>
-          <p:cNvSpPr txBox="1"/>
-          <p:nvPr/>
-        </p:nvSpPr>
-        <p:spPr>
-          <a:xfrm>
-            <a:off x="4637013" y="2544297"/>
-            <a:ext cx="2936229" cy="175133"/>
-          </a:xfrm>
-          <a:prstGeom prst="rect">
-            <a:avLst/>
-          </a:prstGeom>
-          <a:noFill/>
-        </p:spPr>
-        <p:txBody>
-          <a:bodyPr wrap="none" lIns="0" tIns="0" rIns="0" bIns="0" anchor="t">
-            <a:noAutofit/>
-          </a:bodyPr>
-          <a:lstStyle/>
-          <a:p>
-            <a:pPr algn="l">
-              <a:lnSpc>
-                <a:spcPts val="1235"/>
-              </a:lnSpc>
-              <a:spcBef>
-                <a:spcPts val="0"/>
-              </a:spcBef>
-              <a:spcAft>
-                <a:spcPts val="0"/>
-              </a:spcAft>
-            </a:pPr>
-            <a:r>
-              <a:rPr lang="en-US" sz="950" spc="76">
-                <a:solidFill>
-                  <a:srgbClr val="5CD4E1"/>
-                </a:solidFill>
-                <a:latin typeface="JetBrains Mono Medium"/>
-              </a:rPr>
-              <a:t>LINES OF RUST</a:t>
-            </a:r>
-          </a:p>
-        </p:txBody>
-      </p:sp>
-      <p:sp>
-        <p:nvSpPr>
-          <p:cNvPr id="15" name="TextBox 14"/>
-          <p:cNvSpPr txBox="1"/>
-          <p:nvPr/>
-        </p:nvSpPr>
-        <p:spPr>
-          <a:xfrm>
-            <a:off x="4637013" y="2756006"/>
-            <a:ext cx="2936229" cy="199898"/>
-          </a:xfrm>
-          <a:prstGeom prst="rect">
-            <a:avLst/>
-          </a:prstGeom>
-          <a:noFill/>
-        </p:spPr>
-        <p:txBody>
-          <a:bodyPr wrap="none" lIns="0" tIns="0" rIns="0" bIns="0" anchor="t">
-            <a:noAutofit/>
-          </a:bodyPr>
-          <a:lstStyle/>
-          <a:p>
-            <a:pPr algn="l">
-              <a:lnSpc>
-                <a:spcPts val="1430"/>
-              </a:lnSpc>
-              <a:spcBef>
-                <a:spcPts val="0"/>
-              </a:spcBef>
-              <a:spcAft>
-                <a:spcPts val="0"/>
-              </a:spcAft>
-            </a:pPr>
-            <a:r>
-              <a:rPr lang="en-US" sz="1100">
-                <a:solidFill>
-                  <a:srgbClr val="AAB3BD"/>
-                </a:solidFill>
-                <a:latin typeface="Geist"/>
-              </a:rPr>
-              <a:t>20.7k in 2023</a:t>
-            </a:r>
-          </a:p>
-        </p:txBody>
-      </p:sp>
-      <p:sp>
-        <p:nvSpPr>
-          <p:cNvPr id="16" name="Rounded Rectangle 15"/>
-          <p:cNvSpPr/>
-          <p:nvPr/>
-        </p:nvSpPr>
-        <p:spPr>
-          <a:xfrm>
-            <a:off x="8030443" y="1875282"/>
-            <a:ext cx="3430005" cy="1233510"/>
-          </a:xfrm>
-          <a:prstGeom prst="roundRect">
-            <a:avLst>
-              <a:gd name="adj" fmla="val 6671"/>
-            </a:avLst>
-          </a:prstGeom>
-          <a:solidFill>
-            <a:srgbClr val="0B1118"/>
-          </a:solidFill>
-          <a:ln w="9525">
-            <a:solidFill>
-              <a:srgbClr val="1F2A36"/>
-            </a:solidFill>
-          </a:ln>
-          <a:effectLst/>
-        </p:spPr>
-        <p:style>
-          <a:lnRef idx="1">
-            <a:schemeClr val="accent1"/>
-          </a:lnRef>
-          <a:fillRef idx="3">
-            <a:schemeClr val="accent1"/>
-          </a:fillRef>
-          <a:effectRef idx="2">
-            <a:schemeClr val="accent1"/>
-          </a:effectRef>
-          <a:fontRef idx="minor">
-            <a:schemeClr val="lt1"/>
-          </a:fontRef>
-        </p:style>
-        <p:txBody>
-          <a:bodyPr rtlCol="0" anchor="ctr"/>
-          <a:lstStyle/>
-          <a:p>
-            <a:pPr algn="ctr"/>
-            <a:endParaRPr lang="en-US"/>
-          </a:p>
-        </p:txBody>
-      </p:sp>
-      <p:sp>
-        <p:nvSpPr>
-          <p:cNvPr id="17" name="Rectangle 16"/>
-          <p:cNvSpPr/>
-          <p:nvPr/>
-        </p:nvSpPr>
-        <p:spPr>
-          <a:xfrm>
-            <a:off x="8030443" y="2092177"/>
-            <a:ext cx="34747" cy="274320"/>
-          </a:xfrm>
-          <a:prstGeom prst="rect">
-            <a:avLst/>
-          </a:prstGeom>
-          <a:solidFill>
-            <a:srgbClr val="5CD4E1"/>
-          </a:solidFill>
-          <a:ln>
-            <a:noFill/>
-          </a:ln>
-          <a:effectLst/>
-        </p:spPr>
-        <p:style>
-          <a:lnRef idx="1">
-            <a:schemeClr val="accent1"/>
-          </a:lnRef>
-          <a:fillRef idx="3">
-            <a:schemeClr val="accent1"/>
-          </a:fillRef>
-          <a:effectRef idx="2">
-            <a:schemeClr val="accent1"/>
-          </a:effectRef>
-          <a:fontRef idx="minor">
-            <a:schemeClr val="lt1"/>
-          </a:fontRef>
-        </p:style>
-        <p:txBody>
-          <a:bodyPr rtlCol="0" anchor="ctr"/>
-          <a:lstStyle/>
-          <a:p>
-            <a:pPr algn="ctr"/>
-            <a:endParaRPr lang="en-US"/>
-          </a:p>
-        </p:txBody>
-      </p:sp>
-      <p:sp>
-        <p:nvSpPr>
-          <p:cNvPr id="18" name="TextBox 17"/>
-          <p:cNvSpPr txBox="1"/>
-          <p:nvPr/>
-        </p:nvSpPr>
-        <p:spPr>
-          <a:xfrm>
-            <a:off x="8286475" y="2046457"/>
-            <a:ext cx="2936229" cy="424688"/>
-          </a:xfrm>
-          <a:prstGeom prst="rect">
-            <a:avLst/>
-          </a:prstGeom>
-          <a:noFill/>
-        </p:spPr>
-        <p:txBody>
-          <a:bodyPr wrap="none" lIns="0" tIns="0" rIns="0" bIns="0" anchor="t">
-            <a:noAutofit/>
-          </a:bodyPr>
-          <a:lstStyle/>
-          <a:p>
-            <a:pPr algn="l">
-              <a:lnSpc>
-                <a:spcPts val="3200"/>
-              </a:lnSpc>
-              <a:spcBef>
-                <a:spcPts val="0"/>
-              </a:spcBef>
-              <a:spcAft>
-                <a:spcPts val="0"/>
-              </a:spcAft>
-            </a:pPr>
-            <a:r>
-              <a:rPr lang="en-US" sz="3200" spc="-38" dirty="0">
-                <a:solidFill>
-                  <a:srgbClr val="E6EDF3"/>
-                </a:solidFill>
-                <a:latin typeface="Geist Medium"/>
-              </a:rPr>
-              <a:t>1</a:t>
-            </a:r>
-            <a:r>
-              <a:rPr lang="en-US" sz="3200" spc="-38" dirty="0">
-                <a:solidFill>
-                  <a:srgbClr val="E6EDF3"/>
-                </a:solidFill>
-                <a:latin typeface="Geist Medium"/>
-              </a:rPr>
-              <a:t>4</a:t>
-            </a:r>
-            <a:r>
-              <a:rPr lang="en-US" sz="3200" spc="-38" dirty="0">
-                <a:solidFill>
-                  <a:srgbClr val="E6EDF3"/>
-                </a:solidFill>
-                <a:latin typeface="Geist Medium"/>
-              </a:rPr>
-              <a:t>,</a:t>
-            </a:r>
-            <a:r>
-              <a:rPr lang="en-US" sz="3200" spc="-38" dirty="0">
-                <a:solidFill>
-                  <a:srgbClr val="E6EDF3"/>
-                </a:solidFill>
-                <a:latin typeface="Geist Medium"/>
-              </a:rPr>
-              <a:t>463</a:t>
-            </a:r>
-            <a:endParaRPr lang="en-US" sz="3200" spc="-38" dirty="0">
-              <a:solidFill>
-                <a:srgbClr val="E6EDF3"/>
-              </a:solidFill>
-              <a:latin typeface="Geist Medium"/>
-            </a:endParaRPr>
-          </a:p>
-        </p:txBody>
-      </p:sp>
-      <p:sp>
-        <p:nvSpPr>
-          <p:cNvPr id="19" name="TextBox 18"/>
-          <p:cNvSpPr txBox="1"/>
-          <p:nvPr/>
-        </p:nvSpPr>
-        <p:spPr>
-          <a:xfrm>
-            <a:off x="8286475" y="2544297"/>
-            <a:ext cx="2936229" cy="175133"/>
-          </a:xfrm>
-          <a:prstGeom prst="rect">
-            <a:avLst/>
-          </a:prstGeom>
-          <a:noFill/>
-        </p:spPr>
-        <p:txBody>
-          <a:bodyPr wrap="none" lIns="0" tIns="0" rIns="0" bIns="0" anchor="t">
-            <a:noAutofit/>
-          </a:bodyPr>
-          <a:lstStyle/>
-          <a:p>
-            <a:pPr algn="l">
-              <a:lnSpc>
-                <a:spcPts val="1235"/>
-              </a:lnSpc>
-              <a:spcBef>
-                <a:spcPts val="0"/>
-              </a:spcBef>
-              <a:spcAft>
-                <a:spcPts val="0"/>
-              </a:spcAft>
-            </a:pPr>
-            <a:r>
-              <a:rPr lang="en-US" sz="950" spc="76">
-                <a:solidFill>
-                  <a:srgbClr val="5CD4E1"/>
-                </a:solidFill>
-                <a:latin typeface="JetBrains Mono Medium"/>
-              </a:rPr>
-              <a:t>TESTS</a:t>
-            </a:r>
-          </a:p>
-        </p:txBody>
-      </p:sp>
-      <p:sp>
-        <p:nvSpPr>
-          <p:cNvPr id="20" name="TextBox 19"/>
-          <p:cNvSpPr txBox="1"/>
-          <p:nvPr/>
-        </p:nvSpPr>
-        <p:spPr>
-          <a:xfrm>
-            <a:off x="8286475" y="2756006"/>
-            <a:ext cx="2936229" cy="199898"/>
-          </a:xfrm>
-          <a:prstGeom prst="rect">
-            <a:avLst/>
-          </a:prstGeom>
-          <a:noFill/>
-        </p:spPr>
-        <p:txBody>
-          <a:bodyPr wrap="none" lIns="0" tIns="0" rIns="0" bIns="0" anchor="t">
-            <a:noAutofit/>
-          </a:bodyPr>
-          <a:lstStyle/>
-          <a:p>
-            <a:pPr algn="l">
-              <a:lnSpc>
-                <a:spcPts val="1430"/>
-              </a:lnSpc>
-              <a:spcBef>
-                <a:spcPts val="0"/>
-              </a:spcBef>
-              <a:spcAft>
-                <a:spcPts val="0"/>
-              </a:spcAft>
-            </a:pPr>
-            <a:r>
-              <a:rPr lang="en-US" sz="1100">
-                <a:solidFill>
-                  <a:srgbClr val="AAB3BD"/>
-                </a:solidFill>
-                <a:latin typeface="Geist"/>
-              </a:rPr>
-              <a:t>534 in 2023</a:t>
-            </a:r>
-          </a:p>
-        </p:txBody>
-      </p:sp>
-      <p:sp>
-        <p:nvSpPr>
-          <p:cNvPr id="21" name="Rounded Rectangle 20"/>
-          <p:cNvSpPr/>
-          <p:nvPr/>
-        </p:nvSpPr>
-        <p:spPr>
-          <a:xfrm>
-            <a:off x="731520" y="3328248"/>
-            <a:ext cx="3430005" cy="1233510"/>
-          </a:xfrm>
-          <a:prstGeom prst="roundRect">
-            <a:avLst>
-              <a:gd name="adj" fmla="val 6671"/>
-            </a:avLst>
-          </a:prstGeom>
-          <a:solidFill>
-            <a:srgbClr val="0B1118"/>
-          </a:solidFill>
-          <a:ln w="9525">
-            <a:solidFill>
-              <a:srgbClr val="1F2A36"/>
-            </a:solidFill>
-          </a:ln>
-          <a:effectLst/>
-        </p:spPr>
-        <p:style>
-          <a:lnRef idx="1">
-            <a:schemeClr val="accent1"/>
-          </a:lnRef>
-          <a:fillRef idx="3">
-            <a:schemeClr val="accent1"/>
-          </a:fillRef>
-          <a:effectRef idx="2">
-            <a:schemeClr val="accent1"/>
-          </a:effectRef>
-          <a:fontRef idx="minor">
-            <a:schemeClr val="lt1"/>
-          </a:fontRef>
-        </p:style>
-        <p:txBody>
-          <a:bodyPr rtlCol="0" anchor="ctr"/>
-          <a:lstStyle/>
-          <a:p>
-            <a:pPr algn="ctr"/>
-            <a:endParaRPr lang="en-US"/>
-          </a:p>
-        </p:txBody>
-      </p:sp>
-      <p:sp>
-        <p:nvSpPr>
-          <p:cNvPr id="22" name="Rectangle 21"/>
-          <p:cNvSpPr/>
-          <p:nvPr/>
-        </p:nvSpPr>
-        <p:spPr>
-          <a:xfrm>
-            <a:off x="731520" y="3545144"/>
-            <a:ext cx="34747" cy="274320"/>
-          </a:xfrm>
-          <a:prstGeom prst="rect">
-            <a:avLst/>
-          </a:prstGeom>
-          <a:solidFill>
-            <a:srgbClr val="5CD4E1"/>
-          </a:solidFill>
-          <a:ln>
-            <a:noFill/>
-          </a:ln>
-          <a:effectLst/>
-        </p:spPr>
-        <p:style>
-          <a:lnRef idx="1">
-            <a:schemeClr val="accent1"/>
-          </a:lnRef>
-          <a:fillRef idx="3">
-            <a:schemeClr val="accent1"/>
-          </a:fillRef>
-          <a:effectRef idx="2">
-            <a:schemeClr val="accent1"/>
-          </a:effectRef>
-          <a:fontRef idx="minor">
-            <a:schemeClr val="lt1"/>
-          </a:fontRef>
-        </p:style>
-        <p:txBody>
-          <a:bodyPr rtlCol="0" anchor="ctr"/>
-          <a:lstStyle/>
-          <a:p>
-            <a:pPr algn="ctr"/>
-            <a:endParaRPr lang="en-US"/>
-          </a:p>
-        </p:txBody>
-      </p:sp>
-      <p:sp>
-        <p:nvSpPr>
-          <p:cNvPr id="23" name="TextBox 22"/>
-          <p:cNvSpPr txBox="1"/>
-          <p:nvPr/>
-        </p:nvSpPr>
-        <p:spPr>
-          <a:xfrm>
-            <a:off x="987552" y="3499424"/>
-            <a:ext cx="2936229" cy="424688"/>
-          </a:xfrm>
-          <a:prstGeom prst="rect">
-            <a:avLst/>
-          </a:prstGeom>
-          <a:noFill/>
-        </p:spPr>
-        <p:txBody>
-          <a:bodyPr wrap="none" lIns="0" tIns="0" rIns="0" bIns="0" anchor="t">
-            <a:noAutofit/>
-          </a:bodyPr>
-          <a:lstStyle/>
-          <a:p>
-            <a:pPr algn="l">
-              <a:lnSpc>
-                <a:spcPts val="3200"/>
-              </a:lnSpc>
-              <a:spcBef>
-                <a:spcPts val="0"/>
-              </a:spcBef>
-              <a:spcAft>
-                <a:spcPts val="0"/>
-              </a:spcAft>
-            </a:pPr>
-            <a:r>
-              <a:rPr lang="en-US" sz="3200" spc="-38">
-                <a:solidFill>
-                  <a:srgbClr val="E6EDF3"/>
-                </a:solidFill>
-                <a:latin typeface="Geist Medium"/>
-              </a:rPr>
-              <a:t>113</a:t>
-            </a:r>
-          </a:p>
-        </p:txBody>
-      </p:sp>
-      <p:sp>
-        <p:nvSpPr>
-          <p:cNvPr id="24" name="TextBox 23"/>
-          <p:cNvSpPr txBox="1"/>
-          <p:nvPr/>
-        </p:nvSpPr>
-        <p:spPr>
-          <a:xfrm>
-            <a:off x="987552" y="3997264"/>
-            <a:ext cx="2936229" cy="175133"/>
-          </a:xfrm>
-          <a:prstGeom prst="rect">
-            <a:avLst/>
-          </a:prstGeom>
-          <a:noFill/>
-        </p:spPr>
-        <p:txBody>
-          <a:bodyPr wrap="none" lIns="0" tIns="0" rIns="0" bIns="0" anchor="t">
-            <a:noAutofit/>
-          </a:bodyPr>
-          <a:lstStyle/>
-          <a:p>
-            <a:pPr algn="l">
-              <a:lnSpc>
-                <a:spcPts val="1235"/>
-              </a:lnSpc>
-              <a:spcBef>
-                <a:spcPts val="0"/>
-              </a:spcBef>
-              <a:spcAft>
-                <a:spcPts val="0"/>
-              </a:spcAft>
-            </a:pPr>
-            <a:r>
-              <a:rPr lang="en-US" sz="950" spc="76">
-                <a:solidFill>
-                  <a:srgbClr val="5CD4E1"/>
-                </a:solidFill>
-                <a:latin typeface="JetBrains Mono Medium"/>
-              </a:rPr>
-              <a:t>RUNNABLE EXAMPLES</a:t>
-            </a:r>
-          </a:p>
-        </p:txBody>
-      </p:sp>
-      <p:sp>
-        <p:nvSpPr>
-          <p:cNvPr id="25" name="TextBox 24"/>
-          <p:cNvSpPr txBox="1"/>
-          <p:nvPr/>
-        </p:nvSpPr>
-        <p:spPr>
-          <a:xfrm>
-            <a:off x="987552" y="4208973"/>
-            <a:ext cx="2936229" cy="199898"/>
-          </a:xfrm>
-          <a:prstGeom prst="rect">
-            <a:avLst/>
-          </a:prstGeom>
-          <a:noFill/>
-        </p:spPr>
-        <p:txBody>
-          <a:bodyPr wrap="none" lIns="0" tIns="0" rIns="0" bIns="0" anchor="t">
-            <a:noAutofit/>
-          </a:bodyPr>
-          <a:lstStyle/>
-          <a:p>
-            <a:pPr algn="l">
-              <a:lnSpc>
-                <a:spcPts val="1430"/>
-              </a:lnSpc>
-              <a:spcBef>
-                <a:spcPts val="0"/>
-              </a:spcBef>
-              <a:spcAft>
-                <a:spcPts val="0"/>
-              </a:spcAft>
-            </a:pPr>
-            <a:r>
-              <a:rPr lang="en-US" sz="1100">
-                <a:solidFill>
-                  <a:srgbClr val="AAB3BD"/>
-                </a:solidFill>
-                <a:latin typeface="Geist"/>
-              </a:rPr>
-              <a:t>Across 14 domains</a:t>
-            </a:r>
-          </a:p>
-        </p:txBody>
-      </p:sp>
-      <p:sp>
-        <p:nvSpPr>
-          <p:cNvPr id="26" name="Rounded Rectangle 25"/>
-          <p:cNvSpPr/>
-          <p:nvPr/>
-        </p:nvSpPr>
-        <p:spPr>
-          <a:xfrm>
-            <a:off x="4380981" y="3328248"/>
-            <a:ext cx="3430005" cy="1233510"/>
-          </a:xfrm>
-          <a:prstGeom prst="roundRect">
-            <a:avLst>
-              <a:gd name="adj" fmla="val 6671"/>
-            </a:avLst>
-          </a:prstGeom>
-          <a:solidFill>
-            <a:srgbClr val="0B1118"/>
-          </a:solidFill>
-          <a:ln w="9525">
-            <a:solidFill>
-              <a:srgbClr val="1F2A36"/>
-            </a:solidFill>
-          </a:ln>
-          <a:effectLst/>
-        </p:spPr>
-        <p:style>
-          <a:lnRef idx="1">
-            <a:schemeClr val="accent1"/>
-          </a:lnRef>
-          <a:fillRef idx="3">
-            <a:schemeClr val="accent1"/>
-          </a:fillRef>
-          <a:effectRef idx="2">
-            <a:schemeClr val="accent1"/>
-          </a:effectRef>
-          <a:fontRef idx="minor">
-            <a:schemeClr val="lt1"/>
-          </a:fontRef>
-        </p:style>
-        <p:txBody>
-          <a:bodyPr rtlCol="0" anchor="ctr"/>
-          <a:lstStyle/>
-          <a:p>
-            <a:pPr algn="ctr"/>
-            <a:endParaRPr lang="en-US"/>
-          </a:p>
-        </p:txBody>
-      </p:sp>
-      <p:sp>
-        <p:nvSpPr>
-          <p:cNvPr id="27" name="Rectangle 26"/>
-          <p:cNvSpPr/>
-          <p:nvPr/>
-        </p:nvSpPr>
-        <p:spPr>
-          <a:xfrm>
-            <a:off x="4380981" y="3545144"/>
-            <a:ext cx="34747" cy="274320"/>
-          </a:xfrm>
-          <a:prstGeom prst="rect">
-            <a:avLst/>
-          </a:prstGeom>
-          <a:solidFill>
-            <a:srgbClr val="5CD4E1"/>
-          </a:solidFill>
-          <a:ln>
-            <a:noFill/>
-          </a:ln>
-          <a:effectLst/>
-        </p:spPr>
-        <p:style>
-          <a:lnRef idx="1">
-            <a:schemeClr val="accent1"/>
-          </a:lnRef>
-          <a:fillRef idx="3">
-            <a:schemeClr val="accent1"/>
-          </a:fillRef>
-          <a:effectRef idx="2">
-            <a:schemeClr val="accent1"/>
-          </a:effectRef>
-          <a:fontRef idx="minor">
-            <a:schemeClr val="lt1"/>
-          </a:fontRef>
-        </p:style>
-        <p:txBody>
-          <a:bodyPr rtlCol="0" anchor="ctr"/>
-          <a:lstStyle/>
-          <a:p>
-            <a:pPr algn="ctr"/>
-            <a:endParaRPr lang="en-US"/>
-          </a:p>
-        </p:txBody>
-      </p:sp>
-      <p:sp>
-        <p:nvSpPr>
-          <p:cNvPr id="28" name="TextBox 27"/>
-          <p:cNvSpPr txBox="1"/>
-          <p:nvPr/>
-        </p:nvSpPr>
-        <p:spPr>
-          <a:xfrm>
-            <a:off x="4637013" y="3499424"/>
-            <a:ext cx="2936229" cy="424688"/>
-          </a:xfrm>
-          <a:prstGeom prst="rect">
-            <a:avLst/>
-          </a:prstGeom>
-          <a:noFill/>
-        </p:spPr>
-        <p:txBody>
-          <a:bodyPr wrap="none" lIns="0" tIns="0" rIns="0" bIns="0" anchor="t">
-            <a:noAutofit/>
-          </a:bodyPr>
-          <a:lstStyle/>
-          <a:p>
-            <a:pPr algn="l">
-              <a:lnSpc>
-                <a:spcPts val="3200"/>
-              </a:lnSpc>
-              <a:spcBef>
-                <a:spcPts val="0"/>
-              </a:spcBef>
-              <a:spcAft>
-                <a:spcPts val="0"/>
-              </a:spcAft>
-            </a:pPr>
-            <a:r>
-              <a:rPr lang="en-US" sz="3200" spc="-38">
-                <a:solidFill>
-                  <a:srgbClr val="E6EDF3"/>
-                </a:solidFill>
-                <a:latin typeface="Geist Medium"/>
-              </a:rPr>
-              <a:t>183</a:t>
-            </a:r>
-          </a:p>
-        </p:txBody>
-      </p:sp>
-      <p:sp>
-        <p:nvSpPr>
-          <p:cNvPr id="29" name="TextBox 28"/>
-          <p:cNvSpPr txBox="1"/>
-          <p:nvPr/>
-        </p:nvSpPr>
-        <p:spPr>
-          <a:xfrm>
-            <a:off x="4637013" y="3997264"/>
-            <a:ext cx="2936229" cy="175133"/>
-          </a:xfrm>
-          <a:prstGeom prst="rect">
-            <a:avLst/>
-          </a:prstGeom>
-          <a:noFill/>
-        </p:spPr>
-        <p:txBody>
-          <a:bodyPr wrap="none" lIns="0" tIns="0" rIns="0" bIns="0" anchor="t">
-            <a:noAutofit/>
-          </a:bodyPr>
-          <a:lstStyle/>
-          <a:p>
-            <a:pPr algn="l">
-              <a:lnSpc>
-                <a:spcPts val="1235"/>
-              </a:lnSpc>
-              <a:spcBef>
-                <a:spcPts val="0"/>
-              </a:spcBef>
-              <a:spcAft>
-                <a:spcPts val="0"/>
-              </a:spcAft>
-            </a:pPr>
-            <a:r>
-              <a:rPr lang="en-US" sz="950" spc="76">
-                <a:solidFill>
-                  <a:srgbClr val="5CD4E1"/>
-                </a:solidFill>
-                <a:latin typeface="JetBrains Mono Medium"/>
-              </a:rPr>
-              <a:t>LEAN THEOREMS</a:t>
-            </a:r>
-          </a:p>
-        </p:txBody>
-      </p:sp>
-      <p:sp>
-        <p:nvSpPr>
-          <p:cNvPr id="30" name="TextBox 29"/>
-          <p:cNvSpPr txBox="1"/>
-          <p:nvPr/>
-        </p:nvSpPr>
-        <p:spPr>
-          <a:xfrm>
-            <a:off x="4637013" y="4208973"/>
-            <a:ext cx="2936229" cy="199898"/>
-          </a:xfrm>
-          <a:prstGeom prst="rect">
-            <a:avLst/>
-          </a:prstGeom>
-          <a:noFill/>
-        </p:spPr>
-        <p:txBody>
-          <a:bodyPr wrap="none" lIns="0" tIns="0" rIns="0" bIns="0" anchor="t">
-            <a:noAutofit/>
-          </a:bodyPr>
-          <a:lstStyle/>
-          <a:p>
-            <a:pPr algn="l">
-              <a:lnSpc>
-                <a:spcPts val="1430"/>
-              </a:lnSpc>
-              <a:spcBef>
-                <a:spcPts val="0"/>
-              </a:spcBef>
-              <a:spcAft>
-                <a:spcPts val="0"/>
-              </a:spcAft>
-            </a:pPr>
-            <a:r>
-              <a:rPr lang="en-US" sz="1100">
-                <a:solidFill>
-                  <a:srgbClr val="AAB3BD"/>
-                </a:solidFill>
-                <a:latin typeface="Geist"/>
-              </a:rPr>
-              <a:t>Bound to Rust witnesses</a:t>
-            </a:r>
-          </a:p>
-        </p:txBody>
-      </p:sp>
-      <p:sp>
-        <p:nvSpPr>
-          <p:cNvPr id="31" name="Rounded Rectangle 30"/>
-          <p:cNvSpPr/>
-          <p:nvPr/>
-        </p:nvSpPr>
-        <p:spPr>
-          <a:xfrm>
-            <a:off x="8030443" y="3328248"/>
-            <a:ext cx="3430005" cy="1233510"/>
-          </a:xfrm>
-          <a:prstGeom prst="roundRect">
-            <a:avLst>
-              <a:gd name="adj" fmla="val 6671"/>
-            </a:avLst>
-          </a:prstGeom>
-          <a:solidFill>
-            <a:srgbClr val="0B1118"/>
-          </a:solidFill>
-          <a:ln w="9525">
-            <a:solidFill>
-              <a:srgbClr val="1F2A36"/>
-            </a:solidFill>
-          </a:ln>
-          <a:effectLst/>
-        </p:spPr>
-        <p:style>
-          <a:lnRef idx="1">
-            <a:schemeClr val="accent1"/>
-          </a:lnRef>
-          <a:fillRef idx="3">
-            <a:schemeClr val="accent1"/>
-          </a:fillRef>
-          <a:effectRef idx="2">
-            <a:schemeClr val="accent1"/>
-          </a:effectRef>
-          <a:fontRef idx="minor">
-            <a:schemeClr val="lt1"/>
-          </a:fontRef>
-        </p:style>
-        <p:txBody>
-          <a:bodyPr rtlCol="0" anchor="ctr"/>
-          <a:lstStyle/>
-          <a:p>
-            <a:pPr algn="ctr"/>
-            <a:endParaRPr lang="en-US"/>
-          </a:p>
-        </p:txBody>
-      </p:sp>
-      <p:sp>
-        <p:nvSpPr>
-          <p:cNvPr id="32" name="Rectangle 31"/>
-          <p:cNvSpPr/>
-          <p:nvPr/>
-        </p:nvSpPr>
-        <p:spPr>
-          <a:xfrm>
-            <a:off x="8030443" y="3545144"/>
-            <a:ext cx="34747" cy="274320"/>
-          </a:xfrm>
-          <a:prstGeom prst="rect">
-            <a:avLst/>
-          </a:prstGeom>
-          <a:solidFill>
-            <a:srgbClr val="5CD4E1"/>
-          </a:solidFill>
-          <a:ln>
-            <a:noFill/>
-          </a:ln>
-          <a:effectLst/>
-        </p:spPr>
-        <p:style>
-          <a:lnRef idx="1">
-            <a:schemeClr val="accent1"/>
-          </a:lnRef>
-          <a:fillRef idx="3">
-            <a:schemeClr val="accent1"/>
-          </a:fillRef>
-          <a:effectRef idx="2">
-            <a:schemeClr val="accent1"/>
-          </a:effectRef>
-          <a:fontRef idx="minor">
-            <a:schemeClr val="lt1"/>
-          </a:fontRef>
-        </p:style>
-        <p:txBody>
-          <a:bodyPr rtlCol="0" anchor="ctr"/>
-          <a:lstStyle/>
-          <a:p>
-            <a:pPr algn="ctr"/>
-            <a:endParaRPr lang="en-US"/>
-          </a:p>
-        </p:txBody>
-      </p:sp>
-      <p:sp>
-        <p:nvSpPr>
-          <p:cNvPr id="33" name="TextBox 32"/>
-          <p:cNvSpPr txBox="1"/>
-          <p:nvPr/>
-        </p:nvSpPr>
-        <p:spPr>
-          <a:xfrm>
-            <a:off x="8286475" y="3499424"/>
-            <a:ext cx="2936229" cy="424688"/>
-          </a:xfrm>
-          <a:prstGeom prst="rect">
-            <a:avLst/>
-          </a:prstGeom>
-          <a:noFill/>
-        </p:spPr>
-        <p:txBody>
-          <a:bodyPr wrap="none" lIns="0" tIns="0" rIns="0" bIns="0" anchor="t">
-            <a:noAutofit/>
-          </a:bodyPr>
-          <a:lstStyle/>
-          <a:p>
-            <a:pPr algn="l">
-              <a:lnSpc>
-                <a:spcPts val="3200"/>
-              </a:lnSpc>
-              <a:spcBef>
-                <a:spcPts val="0"/>
-              </a:spcBef>
-              <a:spcAft>
-                <a:spcPts val="0"/>
-              </a:spcAft>
-            </a:pPr>
-            <a:r>
-              <a:rPr lang="en-US" sz="3200" spc="-38" dirty="0">
-                <a:solidFill>
-                  <a:srgbClr val="E6EDF3"/>
-                </a:solidFill>
-                <a:latin typeface="Geist Medium"/>
-              </a:rPr>
-              <a:t>2</a:t>
-            </a:r>
-            <a:r>
-              <a:rPr lang="en-US" sz="3200" spc="-38" dirty="0">
-                <a:solidFill>
-                  <a:srgbClr val="E6EDF3"/>
-                </a:solidFill>
-                <a:latin typeface="Geist Medium"/>
-              </a:rPr>
-              <a:t>3</a:t>
-            </a:r>
-            <a:r>
-              <a:rPr lang="en-US" sz="3200" spc="-38" dirty="0">
-                <a:solidFill>
-                  <a:srgbClr val="E6EDF3"/>
-                </a:solidFill>
-                <a:latin typeface="Geist Medium"/>
-              </a:rPr>
-              <a:t> / 29</a:t>
-            </a:r>
-          </a:p>
-        </p:txBody>
-      </p:sp>
-      <p:sp>
-        <p:nvSpPr>
-          <p:cNvPr id="34" name="TextBox 33"/>
-          <p:cNvSpPr txBox="1"/>
-          <p:nvPr/>
-        </p:nvSpPr>
-        <p:spPr>
-          <a:xfrm>
-            <a:off x="8286475" y="3997264"/>
-            <a:ext cx="2936229" cy="175133"/>
-          </a:xfrm>
-          <a:prstGeom prst="rect">
-            <a:avLst/>
-          </a:prstGeom>
-          <a:noFill/>
-        </p:spPr>
-        <p:txBody>
-          <a:bodyPr wrap="none" lIns="0" tIns="0" rIns="0" bIns="0" anchor="t">
-            <a:noAutofit/>
-          </a:bodyPr>
-          <a:lstStyle/>
-          <a:p>
-            <a:pPr algn="l">
-              <a:lnSpc>
-                <a:spcPts val="1235"/>
-              </a:lnSpc>
-              <a:spcBef>
-                <a:spcPts val="0"/>
-              </a:spcBef>
-              <a:spcAft>
-                <a:spcPts val="0"/>
-              </a:spcAft>
-            </a:pPr>
-            <a:r>
-              <a:rPr lang="en-US" sz="950" spc="76" dirty="0">
-                <a:solidFill>
-                  <a:srgbClr val="5CD4E1"/>
-                </a:solidFill>
-                <a:latin typeface="JetBrains Mono Medium"/>
-              </a:rPr>
-              <a:t>ZERO-DEPENDENCY CRATES</a:t>
-            </a:r>
-          </a:p>
-        </p:txBody>
-      </p:sp>
-      <p:sp>
-        <p:nvSpPr>
-          <p:cNvPr id="35" name="TextBox 34"/>
-          <p:cNvSpPr txBox="1"/>
-          <p:nvPr/>
-        </p:nvSpPr>
-        <p:spPr>
-          <a:xfrm>
-            <a:off x="8286475" y="4208973"/>
-            <a:ext cx="2936229" cy="199898"/>
-          </a:xfrm>
-          <a:prstGeom prst="rect">
-            <a:avLst/>
-          </a:prstGeom>
-          <a:noFill/>
-        </p:spPr>
-        <p:txBody>
-          <a:bodyPr wrap="none" lIns="0" tIns="0" rIns="0" bIns="0" anchor="t">
-            <a:noAutofit/>
-          </a:bodyPr>
-          <a:lstStyle/>
-          <a:p>
-            <a:pPr algn="l">
-              <a:lnSpc>
-                <a:spcPts val="1430"/>
-              </a:lnSpc>
-              <a:spcBef>
-                <a:spcPts val="0"/>
-              </a:spcBef>
-              <a:spcAft>
-                <a:spcPts val="0"/>
-              </a:spcAft>
-            </a:pPr>
-            <a:r>
-              <a:rPr lang="en-US" sz="1100" dirty="0">
-                <a:solidFill>
-                  <a:srgbClr val="AAB3BD"/>
-                </a:solidFill>
-                <a:latin typeface="Geist"/>
-              </a:rPr>
-              <a:t>No external dependencies</a:t>
-            </a:r>
-          </a:p>
-        </p:txBody>
-      </p:sp>
-      <p:sp>
-        <p:nvSpPr>
-          <p:cNvPr id="36" name="Rounded Rectangle 35"/>
-          <p:cNvSpPr/>
-          <p:nvPr/>
-        </p:nvSpPr>
-        <p:spPr>
-          <a:xfrm>
-            <a:off x="731520" y="4799502"/>
-            <a:ext cx="10728929" cy="1042629"/>
-          </a:xfrm>
-          <a:prstGeom prst="roundRect">
-            <a:avLst>
-              <a:gd name="adj" fmla="val 7893"/>
-            </a:avLst>
-          </a:prstGeom>
-          <a:solidFill>
-            <a:srgbClr val="121A23"/>
-          </a:solidFill>
-          <a:ln w="9525">
-            <a:solidFill>
-              <a:srgbClr val="2A3A4A"/>
-            </a:solidFill>
-          </a:ln>
-          <a:effectLst/>
-        </p:spPr>
-        <p:style>
-          <a:lnRef idx="1">
-            <a:schemeClr val="accent1"/>
-          </a:lnRef>
-          <a:fillRef idx="3">
-            <a:schemeClr val="accent1"/>
-          </a:fillRef>
-          <a:effectRef idx="2">
-            <a:schemeClr val="accent1"/>
-          </a:effectRef>
-          <a:fontRef idx="minor">
-            <a:schemeClr val="lt1"/>
-          </a:fontRef>
-        </p:style>
-        <p:txBody>
-          <a:bodyPr rtlCol="0" anchor="ctr"/>
-          <a:lstStyle/>
-          <a:p>
-            <a:pPr algn="ctr"/>
-            <a:endParaRPr lang="en-US"/>
-          </a:p>
-        </p:txBody>
-      </p:sp>
-      <p:sp>
-        <p:nvSpPr>
-          <p:cNvPr id="37" name="Rectangle 36"/>
-          <p:cNvSpPr/>
-          <p:nvPr/>
-        </p:nvSpPr>
-        <p:spPr>
-          <a:xfrm>
-            <a:off x="731520" y="4988966"/>
-            <a:ext cx="41148" cy="292608"/>
-          </a:xfrm>
-          <a:prstGeom prst="rect">
-            <a:avLst/>
-          </a:prstGeom>
-          <a:solidFill>
-            <a:srgbClr val="5CD4E1"/>
-          </a:solidFill>
-          <a:ln>
-            <a:noFill/>
-          </a:ln>
-          <a:effectLst/>
-        </p:spPr>
-        <p:style>
-          <a:lnRef idx="1">
-            <a:schemeClr val="accent1"/>
-          </a:lnRef>
-          <a:fillRef idx="3">
-            <a:schemeClr val="accent1"/>
-          </a:fillRef>
-          <a:effectRef idx="2">
-            <a:schemeClr val="accent1"/>
-          </a:effectRef>
-          <a:fontRef idx="minor">
-            <a:schemeClr val="lt1"/>
-          </a:fontRef>
-        </p:style>
-        <p:txBody>
-          <a:bodyPr rtlCol="0" anchor="ctr"/>
-          <a:lstStyle/>
-          <a:p>
-            <a:pPr algn="ctr"/>
-            <a:endParaRPr lang="en-US"/>
-          </a:p>
-        </p:txBody>
-      </p:sp>
-      <p:sp>
-        <p:nvSpPr>
-          <p:cNvPr id="38" name="TextBox 37"/>
-          <p:cNvSpPr txBox="1"/>
-          <p:nvPr/>
-        </p:nvSpPr>
-        <p:spPr>
-          <a:xfrm>
-            <a:off x="969264" y="4970678"/>
-            <a:ext cx="10253441" cy="250698"/>
-          </a:xfrm>
-          <a:prstGeom prst="rect">
-            <a:avLst/>
-          </a:prstGeom>
-          <a:noFill/>
-        </p:spPr>
-        <p:txBody>
-          <a:bodyPr wrap="none" lIns="0" tIns="0" rIns="0" bIns="0" anchor="t">
-            <a:noAutofit/>
-          </a:bodyPr>
-          <a:lstStyle/>
-          <a:p>
-            <a:pPr algn="l">
-              <a:lnSpc>
-                <a:spcPts val="1830"/>
-              </a:lnSpc>
-              <a:spcBef>
-                <a:spcPts val="0"/>
-              </a:spcBef>
-              <a:spcAft>
-                <a:spcPts val="0"/>
-              </a:spcAft>
-            </a:pPr>
-            <a:r>
-              <a:rPr lang="en-US" sz="1500" spc="-17" dirty="0">
-                <a:solidFill>
-                  <a:srgbClr val="E6EDF3"/>
-                </a:solidFill>
-                <a:latin typeface="Geist Medium"/>
-              </a:rPr>
-              <a:t>Dynamic Causality is just getting started</a:t>
-            </a:r>
-            <a:endParaRPr lang="en-US" sz="1500" spc="-17" dirty="0">
-              <a:solidFill>
-                <a:srgbClr val="E6EDF3"/>
-              </a:solidFill>
-              <a:latin typeface="Geist Medium"/>
-            </a:endParaRPr>
-          </a:p>
-        </p:txBody>
-      </p:sp>
-      <p:sp>
-        <p:nvSpPr>
-          <p:cNvPr id="39" name="TextBox 38"/>
-          <p:cNvSpPr txBox="1"/>
-          <p:nvPr/>
-        </p:nvSpPr>
-        <p:spPr>
-          <a:xfrm>
-            <a:off x="969264" y="5285384"/>
-            <a:ext cx="10253441" cy="403860"/>
-          </a:xfrm>
-          <a:prstGeom prst="rect">
-            <a:avLst/>
-          </a:prstGeom>
-          <a:noFill/>
-        </p:spPr>
-        <p:txBody>
-          <a:bodyPr wrap="none" lIns="0" tIns="0" rIns="0" bIns="0" anchor="t">
-            <a:noAutofit/>
-          </a:bodyPr>
-          <a:lstStyle/>
-          <a:p>
-            <a:pPr algn="l">
-              <a:lnSpc>
-                <a:spcPts val="1518"/>
-              </a:lnSpc>
-              <a:spcBef>
-                <a:spcPts val="0"/>
-              </a:spcBef>
-              <a:spcAft>
-                <a:spcPts val="0"/>
-              </a:spcAft>
-            </a:pPr>
-            <a:r>
-              <a:rPr lang="en-US" sz="1150" dirty="0">
-                <a:solidFill>
-                  <a:srgbClr val="AAB3BD"/>
-                </a:solidFill>
-                <a:latin typeface="Geist"/>
-              </a:rPr>
-              <a:t>ServiceRadar integration just began and is structured to continue.</a:t>
-            </a:r>
-          </a:p>
-          <a:p>
-            <a:pPr algn="l">
-              <a:lnSpc>
-                <a:spcPts val="1518"/>
-              </a:lnSpc>
-              <a:spcBef>
-                <a:spcPts val="0"/>
-              </a:spcBef>
-              <a:spcAft>
-                <a:spcPts val="0"/>
-              </a:spcAft>
-            </a:pPr>
-            <a:r>
-              <a:rPr lang="en-US" sz="1150" dirty="0">
-                <a:solidFill>
-                  <a:srgbClr val="AAB3BD"/>
-                </a:solidFill>
-                <a:latin typeface="Geist"/>
-              </a:rPr>
-              <a:t>Research in advanced topics started only in mid-2026 and will continue.</a:t>
-            </a:r>
-            <a:endParaRPr lang="en-US" sz="1150" dirty="0">
-              <a:solidFill>
-                <a:srgbClr val="AAB3BD"/>
-              </a:solidFill>
-              <a:latin typeface="Geist"/>
-            </a:endParaRPr>
-          </a:p>
-        </p:txBody>
-      </p:sp>
-      <p:cxnSp>
-        <p:nvCxnSpPr>
-          <p:cNvPr id="40" name="Connector 39"/>
-          <p:cNvCxnSpPr/>
-          <p:nvPr/>
-        </p:nvCxnSpPr>
-        <p:spPr>
-          <a:xfrm>
-            <a:off x="731520" y="6327648"/>
-            <a:ext cx="10728929" cy="0"/>
-          </a:xfrm>
-          <a:prstGeom prst="line">
-            <a:avLst/>
-          </a:prstGeom>
-          <a:ln w="9525">
-            <a:solidFill>
-              <a:srgbClr val="1F2A36"/>
-            </a:solidFill>
-          </a:ln>
-        </p:spPr>
-        <p:style>
-          <a:lnRef idx="2">
-            <a:schemeClr val="accent1"/>
-          </a:lnRef>
-          <a:fillRef idx="0">
-            <a:schemeClr val="accent1"/>
-          </a:fillRef>
-          <a:effectRef idx="1">
-            <a:schemeClr val="accent1"/>
-          </a:effectRef>
-          <a:fontRef idx="minor">
-            <a:schemeClr val="tx1"/>
-          </a:fontRef>
-        </p:style>
-      </p:cxnSp>
-      <p:sp>
-        <p:nvSpPr>
-          <p:cNvPr id="41" name="TextBox 40"/>
-          <p:cNvSpPr txBox="1"/>
-          <p:nvPr/>
-        </p:nvSpPr>
-        <p:spPr>
-          <a:xfrm>
-            <a:off x="731520" y="6419088"/>
-            <a:ext cx="5486400" cy="153225"/>
-          </a:xfrm>
-          <a:prstGeom prst="rect">
-            <a:avLst/>
-          </a:prstGeom>
-          <a:noFill/>
-        </p:spPr>
-        <p:txBody>
-          <a:bodyPr wrap="none" lIns="0" tIns="0" rIns="0" bIns="0" anchor="t">
-            <a:noAutofit/>
-          </a:bodyPr>
-          <a:lstStyle/>
-          <a:p>
-            <a:pPr algn="l">
-              <a:lnSpc>
-                <a:spcPts val="1062"/>
-              </a:lnSpc>
-              <a:spcBef>
-                <a:spcPts val="0"/>
-              </a:spcBef>
-              <a:spcAft>
-                <a:spcPts val="0"/>
-              </a:spcAft>
-            </a:pPr>
-            <a:r>
-              <a:rPr lang="en-US" sz="850" spc="68" dirty="0">
-                <a:solidFill>
-                  <a:srgbClr val="6B7682"/>
-                </a:solidFill>
-                <a:latin typeface="JetBrains Mono"/>
-              </a:rPr>
-              <a:t>DEEPCAUSALITY · LF AI &amp; DATA · TAC 2026</a:t>
-            </a:r>
-          </a:p>
-        </p:txBody>
-      </p:sp>
-    </p:spTree>
-  </p:cSld>
-  <p:clrMapOvr>
-    <a:masterClrMapping/>
-  </p:clrMapOvr>
-</p:sld>
-</file>
-
-<file path=ppt/slides/slide15.xml><?xml version="1.0" encoding="utf-8"?>
 <p:sld xmlns:a="http://schemas.openxmlformats.org/drawingml/2006/main" xmlns:r="http://schemas.openxmlformats.org/officeDocument/2006/relationships" xmlns:p="http://schemas.openxmlformats.org/presentationml/2006/main">
   <p:cSld>
     <p:bg>
@@ -14486,23 +12197,8 @@
                 </a:solidFill>
                 <a:latin typeface="Geist Medium"/>
               </a:rPr>
-              <a:t>Where the project </a:t>
-            </a:r>
-            <a:r>
-              <a:rPr lang="en-US" sz="3000" spc="-36" dirty="0">
-                <a:solidFill>
-                  <a:srgbClr val="E6EDF3"/>
-                </a:solidFill>
-                <a:latin typeface="Geist Medium"/>
-              </a:rPr>
-              <a:t>seeks help and offers value in return</a:t>
-            </a:r>
-            <a:endParaRPr lang="en-US" sz="3000" spc="-36" dirty="0">
-              <a:solidFill>
-                <a:srgbClr val="E6EDF3"/>
-              </a:solidFill>
-              <a:latin typeface="Geist Medium"/>
-            </a:endParaRPr>
+              <a:t>Where the project seeks help and offers value in return</a:t>
+            </a:r>
           </a:p>
         </p:txBody>
       </p:sp>
@@ -14750,32 +12446,8 @@
                 </a:solidFill>
                 <a:latin typeface="Geist"/>
               </a:rPr>
-              <a:t>The stack is strongest where a</a:t>
-            </a:r>
-            <a:r>
-              <a:rPr lang="en-US" sz="1200" dirty="0">
-                <a:solidFill>
-                  <a:srgbClr val="AAB3BD"/>
-                </a:solidFill>
-                <a:latin typeface="Geist"/>
-              </a:rPr>
-              <a:t> </a:t>
-            </a:r>
-            <a:r>
-              <a:rPr lang="en-US" sz="1200" dirty="0">
-                <a:solidFill>
-                  <a:srgbClr val="AAB3BD"/>
-                </a:solidFill>
-                <a:latin typeface="Geist"/>
-              </a:rPr>
-              <a:t>domain</a:t>
-            </a:r>
-            <a:endParaRPr lang="en-US" sz="1200" dirty="0">
-              <a:solidFill>
-                <a:srgbClr val="AAB3BD"/>
-              </a:solidFill>
-              <a:latin typeface="Geist"/>
-            </a:endParaRPr>
+              <a:t>The stack is strongest where a domain</a:t>
+            </a:r>
           </a:p>
           <a:p>
             <a:pPr algn="l">
@@ -14796,16 +12468,7 @@
                 </a:solidFill>
                 <a:latin typeface="Geist"/>
               </a:rPr>
-              <a:t>needs </a:t>
-            </a:r>
-            <a:r>
-              <a:rPr lang="en-US" sz="1200" dirty="0">
-                <a:solidFill>
-                  <a:srgbClr val="AAB3BD"/>
-                </a:solidFill>
-                <a:latin typeface="Geist"/>
-              </a:rPr>
-              <a:t>verification and an audit trail. If </a:t>
+              <a:t>needs verification and an audit trail. If </a:t>
             </a:r>
             <a:br>
               <a:rPr lang="en-US" sz="1200" dirty="0">
@@ -14858,12 +12521,6 @@
               </a:rPr>
               <a:t>processes, dynamic causality may help.</a:t>
             </a:r>
-            <a:endParaRPr lang="en-US" sz="1200" dirty="0">
-              <a:solidFill>
-                <a:srgbClr val="AAB3BD"/>
-              </a:solidFill>
-              <a:latin typeface="Geist"/>
-            </a:endParaRPr>
           </a:p>
         </p:txBody>
       </p:sp>
@@ -15114,25 +12771,7 @@
                 </a:solidFill>
                 <a:latin typeface="Geist"/>
               </a:rPr>
-              <a:t>verdict and then </a:t>
-            </a:r>
-            <a:r>
-              <a:rPr lang="en-US" sz="1200" dirty="0">
-                <a:solidFill>
-                  <a:srgbClr val="AAB3BD"/>
-                </a:solidFill>
-                <a:latin typeface="Geist"/>
-              </a:rPr>
-              <a:t>needs</a:t>
-            </a:r>
-            <a:r>
-              <a:rPr lang="en-US" sz="1200" dirty="0">
-                <a:solidFill>
-                  <a:srgbClr val="AAB3BD"/>
-                </a:solidFill>
-                <a:latin typeface="Geist"/>
-              </a:rPr>
-              <a:t> to explain it. If your</a:t>
+              <a:t>verdict and then needs to explain it. If your</a:t>
             </a:r>
           </a:p>
           <a:p>
@@ -15154,16 +12793,7 @@
                 </a:solidFill>
                 <a:latin typeface="Geist"/>
               </a:rPr>
-              <a:t>project has that shape, </a:t>
-            </a:r>
-            <a:r>
-              <a:rPr lang="en-US" sz="1200" dirty="0">
-                <a:solidFill>
-                  <a:srgbClr val="AAB3BD"/>
-                </a:solidFill>
-                <a:latin typeface="Geist"/>
-              </a:rPr>
-              <a:t>please explore </a:t>
+              <a:t>project has that shape, please explore </a:t>
             </a:r>
             <a:br>
               <a:rPr lang="en-US" sz="1200" dirty="0">
@@ -15182,12 +12812,6 @@
               </a:rPr>
               <a:t>what dynamic causality has to offer.</a:t>
             </a:r>
-            <a:endParaRPr lang="en-US" sz="1200" dirty="0">
-              <a:solidFill>
-                <a:srgbClr val="AAB3BD"/>
-              </a:solidFill>
-              <a:latin typeface="Geist"/>
-            </a:endParaRPr>
           </a:p>
         </p:txBody>
       </p:sp>
@@ -15394,25 +13018,7 @@
                 </a:solidFill>
                 <a:latin typeface="Geist"/>
               </a:rPr>
-              <a:t>The </a:t>
-            </a:r>
-            <a:r>
-              <a:rPr lang="en-US" sz="1200" dirty="0">
-                <a:solidFill>
-                  <a:srgbClr val="AAB3BD"/>
-                </a:solidFill>
-                <a:latin typeface="Geist"/>
-              </a:rPr>
-              <a:t>Lean</a:t>
-            </a:r>
-            <a:r>
-              <a:rPr lang="en-US" sz="1200" dirty="0">
-                <a:solidFill>
-                  <a:srgbClr val="AAB3BD"/>
-                </a:solidFill>
-                <a:latin typeface="Geist"/>
-              </a:rPr>
-              <a:t> layer publishes its open edges.</a:t>
+              <a:t>The Lean layer publishes its open edges.</a:t>
             </a:r>
           </a:p>
           <a:p>
@@ -15434,16 +13040,7 @@
                 </a:solidFill>
                 <a:latin typeface="Geist"/>
               </a:rPr>
-              <a:t>Extending the proven surface </a:t>
-            </a:r>
-            <a:r>
-              <a:rPr lang="en-US" sz="1200" dirty="0">
-                <a:solidFill>
-                  <a:srgbClr val="AAB3BD"/>
-                </a:solidFill>
-                <a:latin typeface="Geist"/>
-              </a:rPr>
-              <a:t>is ongoing </a:t>
+              <a:t>Extending the proven surface is ongoing </a:t>
             </a:r>
             <a:br>
               <a:rPr lang="en-US" sz="1200" dirty="0">
@@ -15462,12 +13059,6 @@
               </a:rPr>
               <a:t>work and any help is welcome.</a:t>
             </a:r>
-            <a:endParaRPr lang="en-US" sz="1200" dirty="0">
-              <a:solidFill>
-                <a:srgbClr val="AAB3BD"/>
-              </a:solidFill>
-              <a:latin typeface="Geist"/>
-            </a:endParaRPr>
           </a:p>
         </p:txBody>
       </p:sp>
@@ -15917,12 +13508,6 @@
               </a:rPr>
               <a:t>Expertise</a:t>
             </a:r>
-            <a:endParaRPr lang="en-US" sz="1550" spc="-17" dirty="0">
-              <a:solidFill>
-                <a:srgbClr val="E6EDF3"/>
-              </a:solidFill>
-              <a:latin typeface="Geist Medium"/>
-            </a:endParaRPr>
           </a:p>
         </p:txBody>
       </p:sp>
@@ -16030,12 +13615,6 @@
               </a:rPr>
               <a:t>help with large or complex projects.</a:t>
             </a:r>
-            <a:endParaRPr lang="en-US" sz="1200" dirty="0">
-              <a:solidFill>
-                <a:srgbClr val="AAB3BD"/>
-              </a:solidFill>
-              <a:latin typeface="Geist"/>
-            </a:endParaRPr>
           </a:p>
         </p:txBody>
       </p:sp>
@@ -16193,12 +13772,6 @@
               </a:rPr>
               <a:t>Research</a:t>
             </a:r>
-            <a:endParaRPr lang="en-US" sz="1550" spc="-17" dirty="0">
-              <a:solidFill>
-                <a:srgbClr val="E6EDF3"/>
-              </a:solidFill>
-              <a:latin typeface="Geist Medium"/>
-            </a:endParaRPr>
           </a:p>
         </p:txBody>
       </p:sp>
@@ -16316,12 +13889,6 @@
               </a:rPr>
               <a:t>All results are open source.</a:t>
             </a:r>
-            <a:endParaRPr lang="en-US" sz="1200" dirty="0">
-              <a:solidFill>
-                <a:srgbClr val="AAB3BD"/>
-              </a:solidFill>
-              <a:latin typeface="Geist"/>
-            </a:endParaRPr>
           </a:p>
         </p:txBody>
       </p:sp>
@@ -16532,12 +14099,6 @@
               </a:rPr>
               <a:t>Integration</a:t>
             </a:r>
-            <a:endParaRPr lang="en-US" sz="1550" spc="-17" dirty="0">
-              <a:solidFill>
-                <a:srgbClr val="E6EDF3"/>
-              </a:solidFill>
-              <a:latin typeface="Geist Medium"/>
-            </a:endParaRPr>
           </a:p>
         </p:txBody>
       </p:sp>
@@ -16589,12 +14150,6 @@
               </a:rPr>
               <a:t>ServiceRadar only scratches the surface</a:t>
             </a:r>
-            <a:endParaRPr lang="en-US" sz="1200" dirty="0">
-              <a:solidFill>
-                <a:srgbClr val="AAB3BD"/>
-              </a:solidFill>
-              <a:latin typeface="Geist"/>
-            </a:endParaRPr>
           </a:p>
           <a:p>
             <a:pPr algn="l">
@@ -16617,12 +14172,6 @@
               </a:rPr>
               <a:t>of what a product can do when</a:t>
             </a:r>
-            <a:endParaRPr lang="en-US" sz="1200" dirty="0">
-              <a:solidFill>
-                <a:srgbClr val="AAB3BD"/>
-              </a:solidFill>
-              <a:latin typeface="Geist"/>
-            </a:endParaRPr>
           </a:p>
           <a:p>
             <a:pPr algn="l">
@@ -16645,12 +14194,6 @@
               </a:rPr>
               <a:t>augmented with dynamic causality.</a:t>
             </a:r>
-            <a:endParaRPr lang="en-US" sz="1200" dirty="0">
-              <a:solidFill>
-                <a:srgbClr val="AAB3BD"/>
-              </a:solidFill>
-              <a:latin typeface="Geist"/>
-            </a:endParaRPr>
           </a:p>
           <a:p>
             <a:pPr algn="l">
@@ -16673,12 +14216,6 @@
               </a:rPr>
               <a:t>Deeper integrations will unlock</a:t>
             </a:r>
-            <a:endParaRPr lang="en-US" sz="1200" dirty="0">
-              <a:solidFill>
-                <a:srgbClr val="AAB3BD"/>
-              </a:solidFill>
-              <a:latin typeface="Geist"/>
-            </a:endParaRPr>
           </a:p>
           <a:p>
             <a:pPr algn="l">
@@ -16701,12 +14238,6 @@
               </a:rPr>
               <a:t>advanced functionality.</a:t>
             </a:r>
-            <a:endParaRPr lang="en-US" sz="1200" dirty="0">
-              <a:solidFill>
-                <a:srgbClr val="AAB3BD"/>
-              </a:solidFill>
-              <a:latin typeface="Geist"/>
-            </a:endParaRPr>
           </a:p>
         </p:txBody>
       </p:sp>
@@ -16858,7 +14389,7 @@
 </p:sld>
 </file>
 
-<file path=ppt/slides/slide16.xml><?xml version="1.0" encoding="utf-8"?>
+<file path=ppt/slides/slide15.xml><?xml version="1.0" encoding="utf-8"?>
 <p:sld xmlns:a="http://schemas.openxmlformats.org/drawingml/2006/main" xmlns:r="http://schemas.openxmlformats.org/officeDocument/2006/relationships" xmlns:p="http://schemas.openxmlformats.org/presentationml/2006/main">
   <p:cSld>
     <p:bg>
@@ -17755,12 +15286,6 @@
               </a:rPr>
               <a:t>www.deepcausality.com</a:t>
             </a:r>
-            <a:endParaRPr lang="en-US" sz="1800" dirty="0">
-              <a:solidFill>
-                <a:srgbClr val="E6EDF3"/>
-              </a:solidFill>
-              <a:latin typeface="Geist"/>
-            </a:endParaRPr>
           </a:p>
         </p:txBody>
       </p:sp>
@@ -17838,12 +15363,6 @@
               </a:rPr>
               <a:t>ACKNOWLEDGMENT</a:t>
             </a:r>
-            <a:endParaRPr lang="en-US" sz="1100" spc="88" dirty="0">
-              <a:solidFill>
-                <a:srgbClr val="5CD4E1"/>
-              </a:solidFill>
-              <a:latin typeface="JetBrains Mono Medium"/>
-            </a:endParaRPr>
           </a:p>
         </p:txBody>
       </p:sp>
@@ -17887,23 +15406,8 @@
                 </a:solidFill>
                 <a:latin typeface="Geist Medium"/>
               </a:rPr>
-              <a:t>DeepCausality </a:t>
-            </a:r>
-            <a:r>
-              <a:rPr lang="en-US" sz="3000" spc="-36" dirty="0">
-                <a:solidFill>
-                  <a:srgbClr val="E6EDF3"/>
-                </a:solidFill>
-                <a:latin typeface="Geist Medium"/>
-              </a:rPr>
-              <a:t>project sponsors</a:t>
-            </a:r>
-            <a:endParaRPr lang="en-US" sz="3000" spc="-36" dirty="0">
-              <a:solidFill>
-                <a:srgbClr val="E6EDF3"/>
-              </a:solidFill>
-              <a:latin typeface="Geist Medium"/>
-            </a:endParaRPr>
+              <a:t>DeepCausality project sponsors</a:t>
+            </a:r>
           </a:p>
         </p:txBody>
       </p:sp>
@@ -18382,8 +15886,8 @@
         </p:blipFill>
         <p:spPr>
           <a:xfrm>
-            <a:off x="6693118" y="2165772"/>
-            <a:ext cx="2963216" cy="2963216"/>
+            <a:off x="6375402" y="1938248"/>
+            <a:ext cx="3280932" cy="3280932"/>
           </a:xfrm>
           <a:prstGeom prst="rect">
             <a:avLst/>
@@ -18743,23 +16247,8 @@
                 </a:solidFill>
                 <a:latin typeface="Geist"/>
               </a:rPr>
-              <a:t>Why DeepCausality starts from a different </a:t>
-            </a:r>
-            <a:r>
-              <a:rPr lang="en-US" sz="1350" dirty="0">
-                <a:solidFill>
-                  <a:srgbClr val="AAB3BD"/>
-                </a:solidFill>
-                <a:latin typeface="Geist"/>
-              </a:rPr>
-              <a:t>premise</a:t>
-            </a:r>
-            <a:endParaRPr lang="en-US" sz="1350" dirty="0">
-              <a:solidFill>
-                <a:srgbClr val="AAB3BD"/>
-              </a:solidFill>
-              <a:latin typeface="Geist"/>
-            </a:endParaRPr>
+              <a:t>Why DeepCausality starts from a different premise</a:t>
+            </a:r>
           </a:p>
         </p:txBody>
       </p:sp>
@@ -18928,25 +16417,7 @@
                 </a:solidFill>
                 <a:latin typeface="Geist"/>
               </a:rPr>
-              <a:t>One working definition, </a:t>
-            </a:r>
-            <a:r>
-              <a:rPr lang="en-US" sz="1350" dirty="0">
-                <a:solidFill>
-                  <a:srgbClr val="AAB3BD"/>
-                </a:solidFill>
-                <a:latin typeface="Geist"/>
-              </a:rPr>
-              <a:t>two</a:t>
-            </a:r>
-            <a:r>
-              <a:rPr lang="en-US" sz="1350" dirty="0">
-                <a:solidFill>
-                  <a:srgbClr val="AAB3BD"/>
-                </a:solidFill>
-                <a:latin typeface="Geist"/>
-              </a:rPr>
-              <a:t> computable primitives, one safety layer</a:t>
+              <a:t>One working definition, two computable primitives, one safety layer</a:t>
             </a:r>
           </a:p>
         </p:txBody>
@@ -19071,16 +16542,7 @@
                 </a:solidFill>
                 <a:latin typeface="Geist Medium"/>
               </a:rPr>
-              <a:t>One causal </a:t>
-            </a:r>
-            <a:r>
-              <a:rPr lang="en-US" sz="1600" spc="-14" dirty="0">
-                <a:solidFill>
-                  <a:srgbClr val="E6EDF3"/>
-                </a:solidFill>
-                <a:latin typeface="Geist Medium"/>
-              </a:rPr>
-              <a:t>stack</a:t>
+              <a:t>One causal stack</a:t>
             </a:r>
           </a:p>
         </p:txBody>
@@ -19297,12 +16759,6 @@
               </a:rPr>
               <a:t>Counterfactual fluid dynamics, quantum causal models, DeepBrain, and Scrith</a:t>
             </a:r>
-            <a:endParaRPr lang="en-US" sz="1350" dirty="0">
-              <a:solidFill>
-                <a:srgbClr val="AAB3BD"/>
-              </a:solidFill>
-              <a:latin typeface="Geist"/>
-            </a:endParaRPr>
           </a:p>
         </p:txBody>
       </p:sp>
@@ -19641,16 +17097,7 @@
                 </a:solidFill>
                 <a:latin typeface="Geist"/>
               </a:rPr>
-              <a:t>Project health and where </a:t>
-            </a:r>
-            <a:r>
-              <a:rPr lang="en-US" sz="1350" dirty="0">
-                <a:solidFill>
-                  <a:srgbClr val="AAB3BD"/>
-                </a:solidFill>
-                <a:latin typeface="Geist"/>
-              </a:rPr>
-              <a:t>collaboration would help</a:t>
+              <a:t>Project health and where collaboration would help</a:t>
             </a:r>
           </a:p>
         </p:txBody>
@@ -19933,25 +17380,7 @@
                 </a:solidFill>
                 <a:latin typeface="Geist"/>
               </a:rPr>
-              <a:t>Every classical framework inherits a definition of </a:t>
-            </a:r>
-            <a:r>
-              <a:rPr lang="en-US" sz="1400" dirty="0">
-                <a:solidFill>
-                  <a:srgbClr val="AAB3BD"/>
-                </a:solidFill>
-                <a:latin typeface="Geist"/>
-              </a:rPr>
-              <a:t>causality</a:t>
-            </a:r>
-            <a:r>
-              <a:rPr lang="en-US" sz="1400" dirty="0">
-                <a:solidFill>
-                  <a:srgbClr val="AAB3BD"/>
-                </a:solidFill>
-                <a:latin typeface="Geist"/>
-              </a:rPr>
-              <a:t> that is two thousand years old</a:t>
+              <a:t>Every classical framework inherits a definition of causality that is two thousand years old</a:t>
             </a:r>
           </a:p>
         </p:txBody>
@@ -20250,25 +17679,7 @@
                 </a:solidFill>
                 <a:latin typeface="Geist"/>
               </a:rPr>
-              <a:t>Time is a straight </a:t>
-            </a:r>
-            <a:r>
-              <a:rPr lang="en-US" sz="1250" dirty="0">
-                <a:solidFill>
-                  <a:srgbClr val="AAB3BD"/>
-                </a:solidFill>
-                <a:latin typeface="Geist"/>
-              </a:rPr>
-              <a:t>arrow</a:t>
-            </a:r>
-            <a:r>
-              <a:rPr lang="en-US" sz="1250" dirty="0">
-                <a:solidFill>
-                  <a:srgbClr val="AAB3BD"/>
-                </a:solidFill>
-                <a:latin typeface="Geist"/>
-              </a:rPr>
-              <a:t>. Cause precedes effect.</a:t>
+              <a:t>Time is a straight arrow. Cause precedes effect.</a:t>
             </a:r>
           </a:p>
         </p:txBody>
@@ -20448,16 +17859,7 @@
                 </a:solidFill>
                 <a:latin typeface="Geist"/>
               </a:rPr>
-              <a:t>Space and time are static background.</a:t>
-            </a:r>
-            <a:r>
-              <a:rPr lang="en-US" sz="1250" dirty="0">
-                <a:solidFill>
-                  <a:srgbClr val="AAB3BD"/>
-                </a:solidFill>
-                <a:latin typeface="Geist"/>
-              </a:rPr>
-              <a:t> The model is a </a:t>
+              <a:t>Space and time are static background. The model is a </a:t>
             </a:r>
             <a:br>
               <a:rPr lang="en-US" sz="1250" dirty="0">
@@ -20476,12 +17878,6 @@
               </a:rPr>
               <a:t>static snapshot in time with a fixed regime.</a:t>
             </a:r>
-            <a:endParaRPr lang="en-US" sz="1250" dirty="0">
-              <a:solidFill>
-                <a:srgbClr val="AAB3BD"/>
-              </a:solidFill>
-              <a:latin typeface="Geist"/>
-            </a:endParaRPr>
           </a:p>
         </p:txBody>
       </p:sp>
@@ -21175,41 +18571,8 @@
                 </a:solidFill>
                 <a:latin typeface="Geist"/>
               </a:rPr>
-              <a:t>Causality is a </a:t>
-            </a:r>
-            <a:r>
-              <a:rPr lang="en-US" sz="1250" dirty="0">
-                <a:solidFill>
-                  <a:srgbClr val="AAB3BD"/>
-                </a:solidFill>
-                <a:latin typeface="Geist"/>
-              </a:rPr>
-              <a:t>dynamic </a:t>
-            </a:r>
-            <a:r>
-              <a:rPr lang="en-US" sz="1250" dirty="0">
-                <a:solidFill>
-                  <a:srgbClr val="AAB3BD"/>
-                </a:solidFill>
-                <a:latin typeface="Geist"/>
-              </a:rPr>
-              <a:t>proces</a:t>
-            </a:r>
-            <a:r>
-              <a:rPr lang="en-US" sz="1250" dirty="0">
-                <a:solidFill>
-                  <a:srgbClr val="AAB3BD"/>
-                </a:solidFill>
-                <a:latin typeface="Geist"/>
-              </a:rPr>
-              <a:t>s.</a:t>
-            </a:r>
-            <a:endParaRPr lang="en-US" sz="1250" dirty="0">
-              <a:solidFill>
-                <a:srgbClr val="AAB3BD"/>
-              </a:solidFill>
-              <a:latin typeface="Geist"/>
-            </a:endParaRPr>
+              <a:t>Causality is a dynamic process.</a:t>
+            </a:r>
           </a:p>
         </p:txBody>
       </p:sp>
@@ -21388,25 +18751,7 @@
                 </a:solidFill>
                 <a:latin typeface="Geist"/>
               </a:rPr>
-              <a:t>Spacetime </a:t>
-            </a:r>
-            <a:r>
-              <a:rPr lang="en-US" sz="1250" dirty="0">
-                <a:solidFill>
-                  <a:srgbClr val="AAB3BD"/>
-                </a:solidFill>
-                <a:latin typeface="Geist"/>
-              </a:rPr>
-              <a:t>is context with a variable regime</a:t>
-            </a:r>
-            <a:r>
-              <a:rPr lang="en-US" sz="1250" dirty="0">
-                <a:solidFill>
-                  <a:srgbClr val="AAB3BD"/>
-                </a:solidFill>
-                <a:latin typeface="Geist"/>
-              </a:rPr>
-              <a:t>.</a:t>
+              <a:t>Spacetime is context with a variable regime.</a:t>
             </a:r>
           </a:p>
         </p:txBody>
@@ -21563,25 +18908,7 @@
                 </a:solidFill>
                 <a:latin typeface="Geist"/>
               </a:rPr>
-              <a:t>background </a:t>
-            </a:r>
-            <a:r>
-              <a:rPr lang="en-US" sz="1200" dirty="0">
-                <a:solidFill>
-                  <a:srgbClr val="AAB3BD"/>
-                </a:solidFill>
-                <a:latin typeface="Geist"/>
-              </a:rPr>
-              <a:t>spacetime assumption</a:t>
-            </a:r>
-            <a:r>
-              <a:rPr lang="en-US" sz="1200" dirty="0">
-                <a:solidFill>
-                  <a:srgbClr val="AAB3BD"/>
-                </a:solidFill>
-                <a:latin typeface="Geist"/>
-              </a:rPr>
-              <a:t>.</a:t>
+              <a:t>background spacetime assumption.</a:t>
             </a:r>
           </a:p>
         </p:txBody>
@@ -22276,25 +19603,7 @@
                 </a:solidFill>
                 <a:latin typeface="Geist"/>
               </a:rPr>
-              <a:t>another by applying a causal function within the monad</a:t>
-            </a:r>
-            <a:r>
-              <a:rPr lang="en-US" sz="1200" dirty="0">
-                <a:solidFill>
-                  <a:srgbClr val="AAB3BD"/>
-                </a:solidFill>
-                <a:latin typeface="Geist"/>
-              </a:rPr>
-              <a:t>ic composition</a:t>
-            </a:r>
-            <a:r>
-              <a:rPr lang="en-US" sz="1200" dirty="0">
-                <a:solidFill>
-                  <a:srgbClr val="AAB3BD"/>
-                </a:solidFill>
-                <a:latin typeface="Geist"/>
-              </a:rPr>
-              <a:t>.</a:t>
+              <a:t>another by applying a causal function within the monadic composition.</a:t>
             </a:r>
           </a:p>
         </p:txBody>
@@ -22427,23 +19736,8 @@
                 </a:solidFill>
                 <a:latin typeface="Geist Medium"/>
               </a:rPr>
-              <a:t>Monadic </a:t>
-            </a:r>
-            <a:r>
-              <a:rPr lang="en-US" sz="1450" spc="-15" dirty="0">
-                <a:solidFill>
-                  <a:srgbClr val="E6EDF3"/>
-                </a:solidFill>
-                <a:latin typeface="Geist Medium"/>
-              </a:rPr>
-              <a:t>composition</a:t>
-            </a:r>
-            <a:endParaRPr lang="en-US" sz="1450" spc="-15" dirty="0">
-              <a:solidFill>
-                <a:srgbClr val="E6EDF3"/>
-              </a:solidFill>
-              <a:latin typeface="Geist Medium"/>
-            </a:endParaRPr>
+              <a:t>Monadic composition</a:t>
+            </a:r>
           </a:p>
         </p:txBody>
       </p:sp>
@@ -22716,12 +20010,6 @@
               </a:rPr>
               <a:t>Causal function</a:t>
             </a:r>
-            <a:endParaRPr lang="en-US" sz="1450" spc="-15" dirty="0">
-              <a:solidFill>
-                <a:srgbClr val="E6EDF3"/>
-              </a:solidFill>
-              <a:latin typeface="Geist Medium"/>
-            </a:endParaRPr>
           </a:p>
         </p:txBody>
       </p:sp>
@@ -23039,12 +20327,6 @@
               </a:rPr>
               <a:t>Time and space are not</a:t>
             </a:r>
-            <a:endParaRPr lang="en-US" sz="1200" dirty="0">
-              <a:solidFill>
-                <a:srgbClr val="AAB3BD"/>
-              </a:solidFill>
-              <a:latin typeface="Geist"/>
-            </a:endParaRPr>
           </a:p>
           <a:p>
             <a:pPr algn="l">
@@ -23067,12 +20349,6 @@
               </a:rPr>
               <a:t>built into the relation. They</a:t>
             </a:r>
-            <a:endParaRPr lang="en-US" sz="1200" dirty="0">
-              <a:solidFill>
-                <a:srgbClr val="AAB3BD"/>
-              </a:solidFill>
-              <a:latin typeface="Geist"/>
-            </a:endParaRPr>
           </a:p>
           <a:p>
             <a:pPr algn="l">
@@ -23095,12 +20371,6 @@
               </a:rPr>
               <a:t>are declared inputs the</a:t>
             </a:r>
-            <a:endParaRPr lang="en-US" sz="1200" dirty="0">
-              <a:solidFill>
-                <a:srgbClr val="AAB3BD"/>
-              </a:solidFill>
-              <a:latin typeface="Geist"/>
-            </a:endParaRPr>
           </a:p>
           <a:p>
             <a:pPr algn="l">
@@ -23123,12 +20393,6 @@
               </a:rPr>
               <a:t>causal function reads.</a:t>
             </a:r>
-            <a:endParaRPr lang="en-US" sz="1200" dirty="0">
-              <a:solidFill>
-                <a:srgbClr val="AAB3BD"/>
-              </a:solidFill>
-              <a:latin typeface="Geist"/>
-            </a:endParaRPr>
           </a:p>
           <a:p>
             <a:pPr algn="l">
@@ -23151,12 +20415,6 @@
               </a:rPr>
               <a:t>Euclidean, Minkowski,</a:t>
             </a:r>
-            <a:endParaRPr lang="en-US" sz="1200" dirty="0">
-              <a:solidFill>
-                <a:srgbClr val="AAB3BD"/>
-              </a:solidFill>
-              <a:latin typeface="Geist"/>
-            </a:endParaRPr>
           </a:p>
           <a:p>
             <a:pPr algn="l">
@@ -23179,12 +20437,6 @@
               </a:rPr>
               <a:t>anything in between.</a:t>
             </a:r>
-            <a:endParaRPr lang="en-US" sz="1200" dirty="0">
-              <a:solidFill>
-                <a:srgbClr val="AAB3BD"/>
-              </a:solidFill>
-              <a:latin typeface="Geist"/>
-            </a:endParaRPr>
           </a:p>
         </p:txBody>
       </p:sp>
@@ -23369,12 +20621,6 @@
               </a:rPr>
               <a:t>Anything time-like,</a:t>
             </a:r>
-            <a:endParaRPr lang="en-US" sz="1200" dirty="0">
-              <a:solidFill>
-                <a:srgbClr val="AAB3BD"/>
-              </a:solidFill>
-              <a:latin typeface="Geist"/>
-            </a:endParaRPr>
           </a:p>
           <a:p>
             <a:pPr algn="l">
@@ -23397,12 +20643,6 @@
               </a:rPr>
               <a:t>space-like, and all data</a:t>
             </a:r>
-            <a:endParaRPr lang="en-US" sz="1200" dirty="0">
-              <a:solidFill>
-                <a:srgbClr val="AAB3BD"/>
-              </a:solidFill>
-              <a:latin typeface="Geist"/>
-            </a:endParaRPr>
           </a:p>
           <a:p>
             <a:pPr algn="l">
@@ -23425,12 +20665,6 @@
               </a:rPr>
               <a:t>live in a queryable</a:t>
             </a:r>
-            <a:endParaRPr lang="en-US" sz="1200" dirty="0">
-              <a:solidFill>
-                <a:srgbClr val="AAB3BD"/>
-              </a:solidFill>
-              <a:latin typeface="Geist"/>
-            </a:endParaRPr>
           </a:p>
           <a:p>
             <a:pPr algn="l">
@@ -23453,12 +20687,6 @@
               </a:rPr>
               <a:t>hypergraph.</a:t>
             </a:r>
-            <a:endParaRPr lang="en-US" sz="1200" dirty="0">
-              <a:solidFill>
-                <a:srgbClr val="AAB3BD"/>
-              </a:solidFill>
-              <a:latin typeface="Geist"/>
-            </a:endParaRPr>
           </a:p>
         </p:txBody>
       </p:sp>
@@ -23502,16 +20730,7 @@
                 </a:solidFill>
                 <a:latin typeface="Geist"/>
               </a:rPr>
-              <a:t>Imagine a</a:t>
-            </a:r>
-            <a:r>
-              <a:rPr lang="en-US" sz="1200" dirty="0">
-                <a:solidFill>
-                  <a:srgbClr val="6B7682"/>
-                </a:solidFill>
-                <a:latin typeface="Geist"/>
-              </a:rPr>
-              <a:t> ripple in a pond. One ripple is an effect; it propagates and produces the next. DeepCausality defines how ripples spread, what each carries, and</a:t>
+              <a:t>Imagine a ripple in a pond. One ripple is an effect; it propagates and produces the next. DeepCausality defines how ripples spread, what each carries, and</a:t>
             </a:r>
           </a:p>
           <a:p>
@@ -23533,25 +20752,7 @@
                 </a:solidFill>
                 <a:latin typeface="Geist"/>
               </a:rPr>
-              <a:t>what happens when the rules for spreading themselves change</a:t>
-            </a:r>
-            <a:r>
-              <a:rPr lang="en-US" sz="1200" dirty="0">
-                <a:solidFill>
-                  <a:srgbClr val="6B7682"/>
-                </a:solidFill>
-                <a:latin typeface="Geist"/>
-              </a:rPr>
-              <a:t> dynamically</a:t>
-            </a:r>
-            <a:r>
-              <a:rPr lang="en-US" sz="1200" dirty="0">
-                <a:solidFill>
-                  <a:srgbClr val="6B7682"/>
-                </a:solidFill>
-                <a:latin typeface="Geist"/>
-              </a:rPr>
-              <a:t>.</a:t>
+              <a:t>what happens when the rules for spreading themselves change dynamically.</a:t>
             </a:r>
           </a:p>
         </p:txBody>
@@ -25514,34 +22715,7 @@
                 </a:solidFill>
                 <a:latin typeface="Geist Medium"/>
               </a:rPr>
-              <a:t>Causal r</a:t>
-            </a:r>
-            <a:r>
-              <a:rPr lang="en-US" sz="1650" spc="-18" dirty="0">
-                <a:solidFill>
-                  <a:srgbClr val="E6EDF3"/>
-                </a:solidFill>
-                <a:latin typeface="Geist Medium"/>
-              </a:rPr>
-              <a:t>easoning </a:t>
-            </a:r>
-            <a:r>
-              <a:rPr lang="en-US" sz="1650" spc="-18" dirty="0">
-                <a:solidFill>
-                  <a:srgbClr val="E6EDF3"/>
-                </a:solidFill>
-                <a:latin typeface="Geist Medium"/>
-              </a:rPr>
-              <a:t>becomes</a:t>
-            </a:r>
-            <a:r>
-              <a:rPr lang="en-US" sz="1650" spc="-18" dirty="0">
-                <a:solidFill>
-                  <a:srgbClr val="E6EDF3"/>
-                </a:solidFill>
-                <a:latin typeface="Geist Medium"/>
-              </a:rPr>
-              <a:t> emergent</a:t>
+              <a:t>Causal reasoning becomes emergent</a:t>
             </a:r>
           </a:p>
         </p:txBody>
@@ -25586,32 +22760,8 @@
                 </a:solidFill>
                 <a:latin typeface="Geist"/>
               </a:rPr>
-              <a:t>Where structure emerges at runtime, static verification of the reasoning stops being </a:t>
-            </a:r>
-            <a:r>
-              <a:rPr lang="en-US" sz="1200" dirty="0">
-                <a:solidFill>
-                  <a:srgbClr val="AAB3BD"/>
-                </a:solidFill>
-                <a:latin typeface="Geist"/>
-              </a:rPr>
-              <a:t>deterministic</a:t>
-            </a:r>
-            <a:r>
-              <a:rPr lang="en-US" sz="1200" dirty="0">
-                <a:solidFill>
-                  <a:srgbClr val="AAB3BD"/>
-                </a:solidFill>
-                <a:latin typeface="Geist"/>
-              </a:rPr>
-              <a:t>. Verifiability is restored at the action boundary</a:t>
-            </a:r>
-            <a:endParaRPr lang="en-US" sz="1200" dirty="0">
-              <a:solidFill>
-                <a:srgbClr val="AAB3BD"/>
-              </a:solidFill>
-              <a:latin typeface="Geist"/>
-            </a:endParaRPr>
+              <a:t>Where structure emerges at runtime, static verification of the reasoning stops being deterministic. Verifiability is restored at the action boundary</a:t>
+            </a:r>
           </a:p>
           <a:p>
             <a:pPr algn="l">
@@ -25880,41 +23030,8 @@
                 </a:solidFill>
                 <a:latin typeface="Geist"/>
               </a:rPr>
-              <a:t>One uniform </a:t>
-            </a:r>
-            <a:r>
-              <a:rPr lang="en-US" sz="1400" dirty="0">
-                <a:solidFill>
-                  <a:srgbClr val="AAB3BD"/>
-                </a:solidFill>
-                <a:latin typeface="Geist"/>
-              </a:rPr>
-              <a:t>substrate</a:t>
-            </a:r>
-            <a:r>
-              <a:rPr lang="en-US" sz="1400" dirty="0">
-                <a:solidFill>
-                  <a:srgbClr val="AAB3BD"/>
-                </a:solidFill>
-                <a:latin typeface="Geist"/>
-              </a:rPr>
-              <a:t> for the whole causal</a:t>
-            </a:r>
-            <a:r>
-              <a:rPr lang="en-US" sz="1400" dirty="0">
-                <a:solidFill>
-                  <a:srgbClr val="AAB3BD"/>
-                </a:solidFill>
-                <a:latin typeface="Geist"/>
-              </a:rPr>
-              <a:t> process</a:t>
-            </a:r>
-            <a:endParaRPr lang="en-US" sz="1400" dirty="0">
-              <a:solidFill>
-                <a:srgbClr val="AAB3BD"/>
-              </a:solidFill>
-              <a:latin typeface="Geist"/>
-            </a:endParaRPr>
+              <a:t>One uniform substrate for the whole causal process</a:t>
+            </a:r>
           </a:p>
         </p:txBody>
       </p:sp>
@@ -26481,25 +23598,7 @@
                 </a:solidFill>
                 <a:latin typeface="Geist"/>
               </a:rPr>
-              <a:t>Surface causal structure from raw observational</a:t>
-            </a:r>
-            <a:r>
-              <a:rPr lang="en-US" sz="1250" dirty="0">
-                <a:solidFill>
-                  <a:srgbClr val="AAB3BD"/>
-                </a:solidFill>
-                <a:latin typeface="Geist"/>
-              </a:rPr>
-              <a:t> </a:t>
-            </a:r>
-            <a:r>
-              <a:rPr lang="en-US" sz="1250" dirty="0">
-                <a:solidFill>
-                  <a:srgbClr val="AAB3BD"/>
-                </a:solidFill>
-                <a:latin typeface="Geist"/>
-              </a:rPr>
-              <a:t>data.</a:t>
+              <a:t>Surface causal structure from raw observational data.</a:t>
             </a:r>
           </a:p>
         </p:txBody>
@@ -26753,25 +23852,7 @@
                 </a:solidFill>
                 <a:latin typeface="Geist"/>
               </a:rPr>
-              <a:t>Encode </a:t>
-            </a:r>
-            <a:r>
-              <a:rPr lang="en-US" sz="1250" dirty="0">
-                <a:solidFill>
-                  <a:srgbClr val="AAB3BD"/>
-                </a:solidFill>
-                <a:latin typeface="Geist"/>
-              </a:rPr>
-              <a:t>causal</a:t>
-            </a:r>
-            <a:r>
-              <a:rPr lang="en-US" sz="1250" dirty="0">
-                <a:solidFill>
-                  <a:srgbClr val="AAB3BD"/>
-                </a:solidFill>
-                <a:latin typeface="Geist"/>
-              </a:rPr>
-              <a:t> structure as composable logic with an</a:t>
+              <a:t>Encode causal structure as composable logic with an</a:t>
             </a:r>
           </a:p>
           <a:p>
@@ -27618,12 +24699,6 @@
               </a:rPr>
               <a:t>Serve the Model</a:t>
             </a:r>
-            <a:endParaRPr lang="en-US" sz="1550" spc="-19" dirty="0">
-              <a:solidFill>
-                <a:srgbClr val="E6EDF3"/>
-              </a:solidFill>
-              <a:latin typeface="Geist Medium"/>
-            </a:endParaRPr>
           </a:p>
         </p:txBody>
       </p:sp>
@@ -27714,12 +24789,6 @@
               </a:rPr>
               <a:t>Embeds in any Rust</a:t>
             </a:r>
-            <a:endParaRPr lang="en-US" sz="950" dirty="0">
-              <a:solidFill>
-                <a:srgbClr val="6B7682"/>
-              </a:solidFill>
-              <a:latin typeface="JetBrains Mono"/>
-            </a:endParaRPr>
           </a:p>
           <a:p>
             <a:pPr algn="l">
@@ -27742,12 +24811,6 @@
               </a:rPr>
               <a:t>sync or async runtime</a:t>
             </a:r>
-            <a:endParaRPr lang="en-US" sz="950" dirty="0">
-              <a:solidFill>
-                <a:srgbClr val="6B7682"/>
-              </a:solidFill>
-              <a:latin typeface="JetBrains Mono"/>
-            </a:endParaRPr>
           </a:p>
         </p:txBody>
       </p:sp>
@@ -27994,16 +25057,7 @@
                 </a:solidFill>
                 <a:latin typeface="Geist"/>
               </a:rPr>
-              <a:t>All</a:t>
-            </a:r>
-            <a:r>
-              <a:rPr lang="en-US" sz="1400" dirty="0">
-                <a:solidFill>
-                  <a:srgbClr val="AAB3BD"/>
-                </a:solidFill>
-                <a:latin typeface="Geist"/>
-              </a:rPr>
-              <a:t> primitives emit the same carrier, so structural and sequential reasoning compose in one path.</a:t>
+              <a:t>All primitives emit the same carrier, so structural and sequential reasoning compose in one path.</a:t>
             </a:r>
           </a:p>
         </p:txBody>
@@ -29664,16 +26718,7 @@
                 </a:solidFill>
                 <a:latin typeface="Geist Medium"/>
               </a:rPr>
-              <a:t>DeepCausalit</a:t>
-            </a:r>
-            <a:r>
-              <a:rPr lang="en-US" sz="3000" spc="-36" dirty="0">
-                <a:solidFill>
-                  <a:srgbClr val="E6EDF3"/>
-                </a:solidFill>
-                <a:latin typeface="Geist Medium"/>
-              </a:rPr>
-              <a:t>y CDL: Causal Discovery Language</a:t>
+              <a:t>DeepCausality CDL: Causal Discovery Language</a:t>
             </a:r>
           </a:p>
         </p:txBody>
@@ -29724,32 +26769,8 @@
                 </a:solidFill>
                 <a:latin typeface="Geist"/>
               </a:rPr>
-              <a:t>Causal discovery, simplified </a:t>
-            </a:r>
-            <a:r>
-              <a:rPr lang="en-US" sz="1400" dirty="0">
-                <a:solidFill>
-                  <a:srgbClr val="AAB3BD"/>
-                </a:solidFill>
-                <a:latin typeface="Geist"/>
-              </a:rPr>
-              <a:t>via the </a:t>
-            </a:r>
-            <a:r>
-              <a:rPr lang="en-US" sz="1400" dirty="0">
-                <a:solidFill>
-                  <a:srgbClr val="AAB3BD"/>
-                </a:solidFill>
-                <a:latin typeface="Geist"/>
-              </a:rPr>
-              <a:t>CDL</a:t>
-            </a:r>
-            <a:endParaRPr lang="en-US" sz="1400" dirty="0">
-              <a:solidFill>
-                <a:srgbClr val="AAB3BD"/>
-              </a:solidFill>
-              <a:latin typeface="Geist"/>
-            </a:endParaRPr>
+              <a:t>Causal discovery, simplified via the CDL</a:t>
+            </a:r>
           </a:p>
         </p:txBody>
       </p:sp>
